--- a/slides/4-11_elderly_frailty_cognition/4-11_elderly_frailty_cognition.pptx
+++ b/slides/4-11_elderly_frailty_cognition/4-11_elderly_frailty_cognition.pptx
@@ -2715,8 +2715,8 @@
         </p:nvSpPr>
         <p:spPr>
           <a:xfrm>
-            <a:off x="1051560" y="4754880"/>
-            <a:ext cx="10085832" cy="1097280"/>
+            <a:off x="502920" y="4754880"/>
+            <a:ext cx="11183112" cy="1097280"/>
           </a:xfrm>
           <a:prstGeom prst="roundRect">
             <a:avLst>
@@ -3210,7 +3210,7 @@
                 <a:ea typeface="メイリオ" pitchFamily="34" charset="-122"/>
                 <a:cs typeface="メイリオ" pitchFamily="34" charset="-120"/>
               </a:rPr>
-              <a:t>Rockwood K, Theou O. Can Geriatr J 2020;23:210-215 / Satake S, Arai H. Geriatr Gerontol</a:t>
+              <a:t>Rockwood K, Theou O. Can Geriatr J 2020;23:210-215/Satake S, Arai H. Geriatr Gerontol Int</a:t>
             </a:r>
             <a:endParaRPr lang="ja-JP" sz="1600" dirty="0"/>
           </a:p>
@@ -3227,7 +3227,7 @@
                 <a:ea typeface="メイリオ" pitchFamily="34" charset="-122"/>
                 <a:cs typeface="メイリオ" pitchFamily="34" charset="-120"/>
               </a:rPr>
-              <a:t>Int 2020;20:992-993（改訂 J-CHS 基準） / Chow WB, et al. J Am Coll Surg 2012;215:453-466</a:t>
+              <a:t>2020;20:992-993（改訂 J-CHS 基準）/Chow WB, et al. J Am Coll Surg 2012;215:453-466</a:t>
             </a:r>
             <a:endParaRPr lang="ja-JP" sz="1600" dirty="0"/>
           </a:p>
@@ -3310,12 +3310,12 @@
         </p:nvSpPr>
         <p:spPr>
           <a:xfrm>
-            <a:off x="502920" y="1691640"/>
-            <a:ext cx="5481828" cy="3447288"/>
+            <a:off x="502920" y="1664208"/>
+            <a:ext cx="5481828" cy="3474720"/>
           </a:xfrm>
           <a:prstGeom prst="roundRect">
             <a:avLst>
-              <a:gd name="adj" fmla="val 2122"/>
+              <a:gd name="adj" fmla="val 2105"/>
             </a:avLst>
           </a:prstGeom>
           <a:solidFill>
@@ -3332,7 +3332,7 @@
         </p:nvSpPr>
         <p:spPr>
           <a:xfrm>
-            <a:off x="566928" y="1728216"/>
+            <a:off x="566928" y="1719072"/>
             <a:ext cx="5353812" cy="420624"/>
           </a:xfrm>
           <a:prstGeom prst="rect">
@@ -3371,7 +3371,7 @@
         </p:nvSpPr>
         <p:spPr>
           <a:xfrm>
-            <a:off x="594360" y="2267712"/>
+            <a:off x="594360" y="2258568"/>
             <a:ext cx="91440" cy="91440"/>
           </a:xfrm>
           <a:prstGeom prst="ellipse">
@@ -3391,7 +3391,7 @@
         </p:nvSpPr>
         <p:spPr>
           <a:xfrm>
-            <a:off x="749808" y="2130552"/>
+            <a:off x="749808" y="2121408"/>
             <a:ext cx="5170932" cy="374904"/>
           </a:xfrm>
           <a:prstGeom prst="rect">
@@ -3452,7 +3452,7 @@
         </p:nvSpPr>
         <p:spPr>
           <a:xfrm>
-            <a:off x="594360" y="2666390"/>
+            <a:off x="594360" y="2891333"/>
             <a:ext cx="91440" cy="91440"/>
           </a:xfrm>
           <a:prstGeom prst="ellipse">
@@ -3472,7 +3472,7 @@
         </p:nvSpPr>
         <p:spPr>
           <a:xfrm>
-            <a:off x="749808" y="2529230"/>
+            <a:off x="749808" y="2754173"/>
             <a:ext cx="5170932" cy="374904"/>
           </a:xfrm>
           <a:prstGeom prst="rect">
@@ -3511,7 +3511,7 @@
         </p:nvSpPr>
         <p:spPr>
           <a:xfrm>
-            <a:off x="749808" y="2863901"/>
+            <a:off x="749808" y="3088843"/>
             <a:ext cx="5170932" cy="374904"/>
           </a:xfrm>
           <a:prstGeom prst="rect">
@@ -3550,7 +3550,7 @@
         </p:nvSpPr>
         <p:spPr>
           <a:xfrm>
-            <a:off x="594360" y="3399739"/>
+            <a:off x="594360" y="3858768"/>
             <a:ext cx="91440" cy="91440"/>
           </a:xfrm>
           <a:prstGeom prst="ellipse">
@@ -3570,7 +3570,7 @@
         </p:nvSpPr>
         <p:spPr>
           <a:xfrm>
-            <a:off x="749808" y="3262579"/>
+            <a:off x="749808" y="3721608"/>
             <a:ext cx="5170932" cy="374904"/>
           </a:xfrm>
           <a:prstGeom prst="rect">
@@ -3620,7 +3620,7 @@
         </p:nvSpPr>
         <p:spPr>
           <a:xfrm>
-            <a:off x="594360" y="3798418"/>
+            <a:off x="594360" y="4491533"/>
             <a:ext cx="91440" cy="91440"/>
           </a:xfrm>
           <a:prstGeom prst="ellipse">
@@ -3640,7 +3640,7 @@
         </p:nvSpPr>
         <p:spPr>
           <a:xfrm>
-            <a:off x="749808" y="3661258"/>
+            <a:off x="749808" y="4354373"/>
             <a:ext cx="5170932" cy="374904"/>
           </a:xfrm>
           <a:prstGeom prst="rect">
@@ -3679,7 +3679,7 @@
         </p:nvSpPr>
         <p:spPr>
           <a:xfrm>
-            <a:off x="749808" y="3995928"/>
+            <a:off x="749808" y="4689043"/>
             <a:ext cx="5170932" cy="374904"/>
           </a:xfrm>
           <a:prstGeom prst="rect">
@@ -3718,12 +3718,12 @@
         </p:nvSpPr>
         <p:spPr>
           <a:xfrm>
-            <a:off x="6204204" y="1691640"/>
-            <a:ext cx="5481828" cy="3447288"/>
+            <a:off x="6204204" y="1664208"/>
+            <a:ext cx="5481828" cy="3474720"/>
           </a:xfrm>
           <a:prstGeom prst="roundRect">
             <a:avLst>
-              <a:gd name="adj" fmla="val 2122"/>
+              <a:gd name="adj" fmla="val 2105"/>
             </a:avLst>
           </a:prstGeom>
           <a:solidFill>
@@ -3740,7 +3740,7 @@
         </p:nvSpPr>
         <p:spPr>
           <a:xfrm>
-            <a:off x="6268212" y="1728216"/>
+            <a:off x="6268212" y="1719072"/>
             <a:ext cx="5353812" cy="420624"/>
           </a:xfrm>
           <a:prstGeom prst="rect">
@@ -3779,7 +3779,7 @@
         </p:nvSpPr>
         <p:spPr>
           <a:xfrm>
-            <a:off x="6295644" y="2267712"/>
+            <a:off x="6295644" y="2258568"/>
             <a:ext cx="91440" cy="91440"/>
           </a:xfrm>
           <a:prstGeom prst="ellipse">
@@ -3799,7 +3799,7 @@
         </p:nvSpPr>
         <p:spPr>
           <a:xfrm>
-            <a:off x="6451092" y="2130552"/>
+            <a:off x="6451092" y="2121408"/>
             <a:ext cx="5170932" cy="374904"/>
           </a:xfrm>
           <a:prstGeom prst="rect">
@@ -3838,7 +3838,7 @@
         </p:nvSpPr>
         <p:spPr>
           <a:xfrm>
-            <a:off x="6295644" y="2666390"/>
+            <a:off x="6295644" y="2649017"/>
             <a:ext cx="91440" cy="91440"/>
           </a:xfrm>
           <a:prstGeom prst="ellipse">
@@ -3858,7 +3858,7 @@
         </p:nvSpPr>
         <p:spPr>
           <a:xfrm>
-            <a:off x="6451092" y="2529230"/>
+            <a:off x="6451092" y="2511857"/>
             <a:ext cx="5170932" cy="374904"/>
           </a:xfrm>
           <a:prstGeom prst="rect">
@@ -3897,7 +3897,7 @@
         </p:nvSpPr>
         <p:spPr>
           <a:xfrm>
-            <a:off x="6295644" y="3064154"/>
+            <a:off x="6295644" y="3038551"/>
             <a:ext cx="91440" cy="91440"/>
           </a:xfrm>
           <a:prstGeom prst="ellipse">
@@ -3917,7 +3917,7 @@
         </p:nvSpPr>
         <p:spPr>
           <a:xfrm>
-            <a:off x="6451092" y="2926994"/>
+            <a:off x="6451092" y="2901391"/>
             <a:ext cx="5170932" cy="374904"/>
           </a:xfrm>
           <a:prstGeom prst="rect">
@@ -3956,7 +3956,7 @@
         </p:nvSpPr>
         <p:spPr>
           <a:xfrm>
-            <a:off x="6451092" y="3262579"/>
+            <a:off x="6451092" y="3236976"/>
             <a:ext cx="5170932" cy="374904"/>
           </a:xfrm>
           <a:prstGeom prst="rect">
@@ -4017,7 +4017,7 @@
         </p:nvSpPr>
         <p:spPr>
           <a:xfrm>
-            <a:off x="6295644" y="3798418"/>
+            <a:off x="6295644" y="3764585"/>
             <a:ext cx="91440" cy="91440"/>
           </a:xfrm>
           <a:prstGeom prst="ellipse">
@@ -4037,7 +4037,7 @@
         </p:nvSpPr>
         <p:spPr>
           <a:xfrm>
-            <a:off x="6451092" y="3661258"/>
+            <a:off x="6451092" y="3627425"/>
             <a:ext cx="5170932" cy="374904"/>
           </a:xfrm>
           <a:prstGeom prst="rect">
@@ -4076,7 +4076,7 @@
         </p:nvSpPr>
         <p:spPr>
           <a:xfrm>
-            <a:off x="6295644" y="4196182"/>
+            <a:off x="6295644" y="4154119"/>
             <a:ext cx="91440" cy="91440"/>
           </a:xfrm>
           <a:prstGeom prst="ellipse">
@@ -4096,7 +4096,7 @@
         </p:nvSpPr>
         <p:spPr>
           <a:xfrm>
-            <a:off x="6451092" y="4059022"/>
+            <a:off x="6451092" y="4016959"/>
             <a:ext cx="5170932" cy="374904"/>
           </a:xfrm>
           <a:prstGeom prst="rect">
@@ -4135,7 +4135,7 @@
         </p:nvSpPr>
         <p:spPr>
           <a:xfrm>
-            <a:off x="6451092" y="4394606"/>
+            <a:off x="6451092" y="4352544"/>
             <a:ext cx="5170932" cy="374904"/>
           </a:xfrm>
           <a:prstGeom prst="rect">
@@ -4174,7 +4174,7 @@
         </p:nvSpPr>
         <p:spPr>
           <a:xfrm>
-            <a:off x="6451092" y="4730191"/>
+            <a:off x="6451092" y="4688129"/>
             <a:ext cx="5170932" cy="374904"/>
           </a:xfrm>
           <a:prstGeom prst="rect">
@@ -4722,12 +4722,12 @@
         </p:nvSpPr>
         <p:spPr>
           <a:xfrm>
-            <a:off x="502920" y="1691640"/>
-            <a:ext cx="5551322" cy="3447288"/>
+            <a:off x="502920" y="1664208"/>
+            <a:ext cx="5551322" cy="3474720"/>
           </a:xfrm>
           <a:prstGeom prst="roundRect">
             <a:avLst>
-              <a:gd name="adj" fmla="val 2122"/>
+              <a:gd name="adj" fmla="val 2105"/>
             </a:avLst>
           </a:prstGeom>
           <a:solidFill>
@@ -4744,7 +4744,7 @@
         </p:nvSpPr>
         <p:spPr>
           <a:xfrm>
-            <a:off x="566928" y="1728216"/>
+            <a:off x="566928" y="1719072"/>
             <a:ext cx="5423306" cy="420624"/>
           </a:xfrm>
           <a:prstGeom prst="rect">
@@ -4783,7 +4783,7 @@
         </p:nvSpPr>
         <p:spPr>
           <a:xfrm>
-            <a:off x="594360" y="2267712"/>
+            <a:off x="594360" y="2258568"/>
             <a:ext cx="91440" cy="91440"/>
           </a:xfrm>
           <a:prstGeom prst="ellipse">
@@ -4803,7 +4803,7 @@
         </p:nvSpPr>
         <p:spPr>
           <a:xfrm>
-            <a:off x="749808" y="2130552"/>
+            <a:off x="749808" y="2121408"/>
             <a:ext cx="5240426" cy="374904"/>
           </a:xfrm>
           <a:prstGeom prst="rect">
@@ -4842,7 +4842,7 @@
         </p:nvSpPr>
         <p:spPr>
           <a:xfrm>
-            <a:off x="749808" y="2466137"/>
+            <a:off x="749808" y="2456993"/>
             <a:ext cx="5240426" cy="374904"/>
           </a:xfrm>
           <a:prstGeom prst="rect">
@@ -4881,7 +4881,7 @@
         </p:nvSpPr>
         <p:spPr>
           <a:xfrm>
-            <a:off x="749808" y="2800807"/>
+            <a:off x="749808" y="2791663"/>
             <a:ext cx="5240426" cy="374904"/>
           </a:xfrm>
           <a:prstGeom prst="rect">
@@ -4920,7 +4920,7 @@
         </p:nvSpPr>
         <p:spPr>
           <a:xfrm>
-            <a:off x="594360" y="3336646"/>
+            <a:off x="594360" y="3338474"/>
             <a:ext cx="91440" cy="91440"/>
           </a:xfrm>
           <a:prstGeom prst="ellipse">
@@ -4940,7 +4940,7 @@
         </p:nvSpPr>
         <p:spPr>
           <a:xfrm>
-            <a:off x="749808" y="3199486"/>
+            <a:off x="749808" y="3201314"/>
             <a:ext cx="5240426" cy="374904"/>
           </a:xfrm>
           <a:prstGeom prst="rect">
@@ -4990,7 +4990,7 @@
         </p:nvSpPr>
         <p:spPr>
           <a:xfrm>
-            <a:off x="749808" y="3535070"/>
+            <a:off x="749808" y="3536899"/>
             <a:ext cx="5240426" cy="374904"/>
           </a:xfrm>
           <a:prstGeom prst="rect">
@@ -5040,7 +5040,7 @@
         </p:nvSpPr>
         <p:spPr>
           <a:xfrm>
-            <a:off x="594360" y="4069994"/>
+            <a:off x="594360" y="4082796"/>
             <a:ext cx="91440" cy="91440"/>
           </a:xfrm>
           <a:prstGeom prst="ellipse">
@@ -5060,7 +5060,7 @@
         </p:nvSpPr>
         <p:spPr>
           <a:xfrm>
-            <a:off x="749808" y="3932834"/>
+            <a:off x="749808" y="3945636"/>
             <a:ext cx="5240426" cy="374904"/>
           </a:xfrm>
           <a:prstGeom prst="rect">
@@ -5099,7 +5099,7 @@
         </p:nvSpPr>
         <p:spPr>
           <a:xfrm>
-            <a:off x="749808" y="4268419"/>
+            <a:off x="749808" y="4281221"/>
             <a:ext cx="5240426" cy="374904"/>
           </a:xfrm>
           <a:prstGeom prst="rect">
@@ -5138,7 +5138,7 @@
         </p:nvSpPr>
         <p:spPr>
           <a:xfrm>
-            <a:off x="594360" y="4804258"/>
+            <a:off x="594360" y="4828032"/>
             <a:ext cx="91440" cy="91440"/>
           </a:xfrm>
           <a:prstGeom prst="ellipse">
@@ -5158,7 +5158,7 @@
         </p:nvSpPr>
         <p:spPr>
           <a:xfrm>
-            <a:off x="749808" y="4667098"/>
+            <a:off x="749808" y="4690872"/>
             <a:ext cx="5240426" cy="374904"/>
           </a:xfrm>
           <a:prstGeom prst="rect">
@@ -5197,12 +5197,12 @@
         </p:nvSpPr>
         <p:spPr>
           <a:xfrm>
-            <a:off x="6273698" y="1691640"/>
-            <a:ext cx="5412334" cy="3447288"/>
+            <a:off x="6273698" y="1664208"/>
+            <a:ext cx="5412334" cy="3474720"/>
           </a:xfrm>
           <a:prstGeom prst="roundRect">
             <a:avLst>
-              <a:gd name="adj" fmla="val 2122"/>
+              <a:gd name="adj" fmla="val 2105"/>
             </a:avLst>
           </a:prstGeom>
           <a:solidFill>
@@ -5219,7 +5219,7 @@
         </p:nvSpPr>
         <p:spPr>
           <a:xfrm>
-            <a:off x="6337706" y="1728216"/>
+            <a:off x="6337706" y="1719072"/>
             <a:ext cx="5284318" cy="420624"/>
           </a:xfrm>
           <a:prstGeom prst="rect">
@@ -5258,7 +5258,7 @@
         </p:nvSpPr>
         <p:spPr>
           <a:xfrm>
-            <a:off x="6365138" y="2267712"/>
+            <a:off x="6365138" y="2258568"/>
             <a:ext cx="91440" cy="91440"/>
           </a:xfrm>
           <a:prstGeom prst="ellipse">
@@ -5278,7 +5278,7 @@
         </p:nvSpPr>
         <p:spPr>
           <a:xfrm>
-            <a:off x="6520586" y="2130552"/>
+            <a:off x="6520586" y="2121408"/>
             <a:ext cx="5101438" cy="374904"/>
           </a:xfrm>
           <a:prstGeom prst="rect">
@@ -5328,7 +5328,7 @@
         </p:nvSpPr>
         <p:spPr>
           <a:xfrm>
-            <a:off x="6365138" y="2666390"/>
+            <a:off x="6365138" y="2649017"/>
             <a:ext cx="91440" cy="91440"/>
           </a:xfrm>
           <a:prstGeom prst="ellipse">
@@ -5348,7 +5348,7 @@
         </p:nvSpPr>
         <p:spPr>
           <a:xfrm>
-            <a:off x="6520586" y="2529230"/>
+            <a:off x="6520586" y="2511857"/>
             <a:ext cx="5101438" cy="374904"/>
           </a:xfrm>
           <a:prstGeom prst="rect">
@@ -5387,7 +5387,7 @@
         </p:nvSpPr>
         <p:spPr>
           <a:xfrm>
-            <a:off x="6520586" y="2863901"/>
+            <a:off x="6520586" y="2846527"/>
             <a:ext cx="5101438" cy="374904"/>
           </a:xfrm>
           <a:prstGeom prst="rect">
@@ -5426,7 +5426,7 @@
         </p:nvSpPr>
         <p:spPr>
           <a:xfrm>
-            <a:off x="6365138" y="3399739"/>
+            <a:off x="6365138" y="3374136"/>
             <a:ext cx="91440" cy="91440"/>
           </a:xfrm>
           <a:prstGeom prst="ellipse">
@@ -5446,7 +5446,7 @@
         </p:nvSpPr>
         <p:spPr>
           <a:xfrm>
-            <a:off x="6520586" y="3262579"/>
+            <a:off x="6520586" y="3236976"/>
             <a:ext cx="5101438" cy="374904"/>
           </a:xfrm>
           <a:prstGeom prst="rect">
@@ -5485,7 +5485,7 @@
         </p:nvSpPr>
         <p:spPr>
           <a:xfrm>
-            <a:off x="6520586" y="3598164"/>
+            <a:off x="6520586" y="3572561"/>
             <a:ext cx="5101438" cy="374904"/>
           </a:xfrm>
           <a:prstGeom prst="rect">
@@ -5524,7 +5524,7 @@
         </p:nvSpPr>
         <p:spPr>
           <a:xfrm>
-            <a:off x="6365138" y="4133088"/>
+            <a:off x="6365138" y="4099255"/>
             <a:ext cx="91440" cy="91440"/>
           </a:xfrm>
           <a:prstGeom prst="ellipse">
@@ -5544,7 +5544,7 @@
         </p:nvSpPr>
         <p:spPr>
           <a:xfrm>
-            <a:off x="6520586" y="3995928"/>
+            <a:off x="6520586" y="3962095"/>
             <a:ext cx="5101438" cy="374904"/>
           </a:xfrm>
           <a:prstGeom prst="rect">
@@ -5583,7 +5583,7 @@
         </p:nvSpPr>
         <p:spPr>
           <a:xfrm>
-            <a:off x="6520586" y="4331513"/>
+            <a:off x="6520586" y="4297680"/>
             <a:ext cx="5101438" cy="374904"/>
           </a:xfrm>
           <a:prstGeom prst="rect">
@@ -5622,7 +5622,7 @@
         </p:nvSpPr>
         <p:spPr>
           <a:xfrm>
-            <a:off x="6365138" y="4867351"/>
+            <a:off x="6365138" y="4825289"/>
             <a:ext cx="91440" cy="91440"/>
           </a:xfrm>
           <a:prstGeom prst="ellipse">
@@ -5642,7 +5642,7 @@
         </p:nvSpPr>
         <p:spPr>
           <a:xfrm>
-            <a:off x="6520586" y="4730191"/>
+            <a:off x="6520586" y="4688129"/>
             <a:ext cx="5101438" cy="374904"/>
           </a:xfrm>
           <a:prstGeom prst="rect">
@@ -6090,7 +6090,7 @@
                 <a:ea typeface="メイリオ" pitchFamily="34" charset="-122"/>
                 <a:cs typeface="メイリオ" pitchFamily="34" charset="-120"/>
               </a:rPr>
-              <a:t>Aldecoa C, et al. Eur J Anaesthesiol 2024;41:81-108 / American Geriatrics Society. J Am</a:t>
+              <a:t>Aldecoa C, et al. Eur J Anaesthesiol 2024;41:81-108 / American Geriatrics Society.</a:t>
             </a:r>
             <a:endParaRPr lang="ja-JP" sz="1600" dirty="0"/>
           </a:p>
@@ -6107,7 +6107,7 @@
                 <a:ea typeface="メイリオ" pitchFamily="34" charset="-122"/>
                 <a:cs typeface="メイリオ" pitchFamily="34" charset="-120"/>
               </a:rPr>
-              <a:t>Geriatr Soc 2015;63:142-150 / Hshieh TT, et al. JAMA Intern Med 2015;175:512-520</a:t>
+              <a:t>J Am Geriatr Soc 2015;63:142-150 / Hshieh TT, et al. JAMA Intern Med 2015;175:512-520</a:t>
             </a:r>
             <a:endParaRPr lang="ja-JP" sz="1600" dirty="0"/>
           </a:p>
@@ -6146,7 +6146,7 @@
               <a:buNone/>
             </a:pPr>
             <a:r>
-              <a:rPr lang="ja-JP" altLang="en-US" sz="2200" b="1" dirty="0">
+              <a:rPr lang="ja-JP" altLang="en-US" sz="2200" b="1" u="sng" dirty="0">
                 <a:solidFill>
                   <a:srgbClr val="C00000"/>
                 </a:solidFill>
@@ -6201,7 +6201,7 @@
         </p:nvSpPr>
         <p:spPr>
           <a:xfrm>
-            <a:off x="566928" y="1691640"/>
+            <a:off x="566928" y="1700784"/>
             <a:ext cx="5191963" cy="420624"/>
           </a:xfrm>
           <a:prstGeom prst="rect">
@@ -6324,7 +6324,7 @@
                 <a:ea typeface="メイリオ" pitchFamily="34" charset="-122"/>
                 <a:cs typeface="メイリオ" pitchFamily="34" charset="-120"/>
               </a:rPr>
-              <a:t>Charlson 2 超、MMSE 25 未満</a:t>
+              <a:t>Charlson 2 超、</a:t>
             </a:r>
             <a:endParaRPr lang="ja-JP" sz="2200" dirty="0"/>
           </a:p>
@@ -6332,13 +6332,52 @@
       </p:sp>
       <p:sp>
         <p:nvSpPr>
-          <p:cNvPr id="17" name="Shape 15"/>
+          <p:cNvPr id="17" name="Text 15"/>
+          <p:cNvSpPr txBox="1"/>
+          <p:nvPr/>
+        </p:nvSpPr>
+        <p:spPr>
+          <a:xfrm>
+            <a:off x="749808" y="2659990"/>
+            <a:ext cx="5009083" cy="374904"/>
+          </a:xfrm>
+          <a:prstGeom prst="rect">
+            <a:avLst/>
+          </a:prstGeom>
+          <a:noFill/>
+          <a:ln/>
+        </p:spPr>
+        <p:txBody>
+          <a:bodyPr wrap="square" lIns="0" tIns="0" rIns="0" bIns="0" rtlCol="0" anchor="t"/>
+          <a:lstStyle/>
+          <a:p>
+            <a:pPr algn="l" indent="0" marL="0">
+              <a:buNone/>
+            </a:pPr>
+            <a:r>
+              <a:rPr lang="ja-JP" altLang="en-US" sz="2200" dirty="0">
+                <a:solidFill>
+                  <a:srgbClr val="262626"/>
+                </a:solidFill>
+                <a:latin typeface="メイリオ" pitchFamily="34" charset="0"/>
+                <a:ea typeface="メイリオ" pitchFamily="34" charset="-122"/>
+                <a:cs typeface="メイリオ" pitchFamily="34" charset="-120"/>
+              </a:rPr>
+              <a:t>MMSE 25 未満（ESAIC）</a:t>
+            </a:r>
+            <a:endParaRPr lang="ja-JP" sz="2200" dirty="0"/>
+          </a:p>
+        </p:txBody>
+      </p:sp>
+      <p:sp>
+        <p:nvSpPr>
+          <p:cNvPr id="18" name="Shape 16"/>
           <p:cNvSpPr/>
           <p:nvPr/>
         </p:nvSpPr>
         <p:spPr>
           <a:xfrm>
-            <a:off x="594360" y="2809951"/>
+            <a:off x="594360" y="3096158"/>
             <a:ext cx="91440" cy="91440"/>
           </a:xfrm>
           <a:prstGeom prst="ellipse">
@@ -6352,52 +6391,13 @@
       </p:sp>
       <p:sp>
         <p:nvSpPr>
-          <p:cNvPr id="18" name="Text 16"/>
-          <p:cNvSpPr txBox="1"/>
-          <p:nvPr/>
-        </p:nvSpPr>
-        <p:spPr>
-          <a:xfrm>
-            <a:off x="749808" y="2681935"/>
-            <a:ext cx="5009083" cy="374904"/>
-          </a:xfrm>
-          <a:prstGeom prst="rect">
-            <a:avLst/>
-          </a:prstGeom>
-          <a:noFill/>
-          <a:ln/>
-        </p:spPr>
-        <p:txBody>
-          <a:bodyPr wrap="square" lIns="0" tIns="0" rIns="0" bIns="0" rtlCol="0" anchor="t"/>
-          <a:lstStyle/>
-          <a:p>
-            <a:pPr algn="l" indent="0" marL="0">
-              <a:buNone/>
-            </a:pPr>
-            <a:r>
-              <a:rPr lang="ja-JP" altLang="en-US" sz="2200" dirty="0">
-                <a:solidFill>
-                  <a:srgbClr val="262626"/>
-                </a:solidFill>
-                <a:latin typeface="メイリオ" pitchFamily="34" charset="0"/>
-                <a:ea typeface="メイリオ" pitchFamily="34" charset="-122"/>
-                <a:cs typeface="メイリオ" pitchFamily="34" charset="-120"/>
-              </a:rPr>
-              <a:t>フレイル、感覚障害、低栄養、</a:t>
-            </a:r>
-            <a:endParaRPr lang="ja-JP" sz="2200" dirty="0"/>
-          </a:p>
-        </p:txBody>
-      </p:sp>
-      <p:sp>
-        <p:nvSpPr>
           <p:cNvPr id="19" name="Text 17"/>
           <p:cNvSpPr txBox="1"/>
           <p:nvPr/>
         </p:nvSpPr>
         <p:spPr>
           <a:xfrm>
-            <a:off x="749808" y="2989174"/>
+            <a:off x="749808" y="2968142"/>
             <a:ext cx="5009083" cy="374904"/>
           </a:xfrm>
           <a:prstGeom prst="rect">
@@ -6422,7 +6422,7 @@
                 <a:ea typeface="メイリオ" pitchFamily="34" charset="-122"/>
                 <a:cs typeface="メイリオ" pitchFamily="34" charset="-120"/>
               </a:rPr>
-              <a:t>多剤、貧血、社会的因子</a:t>
+              <a:t>フレイル、感覚障害、低栄養、</a:t>
             </a:r>
             <a:endParaRPr lang="ja-JP" sz="2200" dirty="0"/>
           </a:p>
@@ -6436,7 +6436,7 @@
         </p:nvSpPr>
         <p:spPr>
           <a:xfrm>
-            <a:off x="749808" y="3296412"/>
+            <a:off x="749808" y="3275381"/>
             <a:ext cx="5009083" cy="374904"/>
           </a:xfrm>
           <a:prstGeom prst="rect">
@@ -6461,7 +6461,7 @@
                 <a:ea typeface="メイリオ" pitchFamily="34" charset="-122"/>
                 <a:cs typeface="メイリオ" pitchFamily="34" charset="-120"/>
               </a:rPr>
-              <a:t>（高齢者評価）</a:t>
+              <a:t>多剤、貧血、社会的因子</a:t>
             </a:r>
             <a:endParaRPr lang="ja-JP" sz="2200" dirty="0"/>
           </a:p>
@@ -6475,7 +6475,7 @@
         </p:nvSpPr>
         <p:spPr>
           <a:xfrm>
-            <a:off x="594360" y="3753612"/>
+            <a:off x="594360" y="3711550"/>
             <a:ext cx="91440" cy="91440"/>
           </a:xfrm>
           <a:prstGeom prst="ellipse">
@@ -6495,7 +6495,7 @@
         </p:nvSpPr>
         <p:spPr>
           <a:xfrm>
-            <a:off x="749808" y="3625596"/>
+            <a:off x="749808" y="3583534"/>
             <a:ext cx="5009083" cy="374904"/>
           </a:xfrm>
           <a:prstGeom prst="rect">
@@ -6534,7 +6534,7 @@
         </p:nvSpPr>
         <p:spPr>
           <a:xfrm>
-            <a:off x="749808" y="3932834"/>
+            <a:off x="749808" y="3890772"/>
             <a:ext cx="5009083" cy="374904"/>
           </a:xfrm>
           <a:prstGeom prst="rect">
@@ -6573,7 +6573,7 @@
         </p:nvSpPr>
         <p:spPr>
           <a:xfrm>
-            <a:off x="749808" y="4240073"/>
+            <a:off x="749808" y="4198010"/>
             <a:ext cx="5009083" cy="374904"/>
           </a:xfrm>
           <a:prstGeom prst="rect">
@@ -6612,7 +6612,7 @@
         </p:nvSpPr>
         <p:spPr>
           <a:xfrm>
-            <a:off x="594360" y="4698187"/>
+            <a:off x="594360" y="4635094"/>
             <a:ext cx="91440" cy="91440"/>
           </a:xfrm>
           <a:prstGeom prst="ellipse">
@@ -6632,7 +6632,7 @@
         </p:nvSpPr>
         <p:spPr>
           <a:xfrm>
-            <a:off x="749808" y="4570171"/>
+            <a:off x="749808" y="4507078"/>
             <a:ext cx="5009083" cy="374904"/>
           </a:xfrm>
           <a:prstGeom prst="rect">
@@ -6693,7 +6693,7 @@
         </p:nvSpPr>
         <p:spPr>
           <a:xfrm>
-            <a:off x="749808" y="4877410"/>
+            <a:off x="749808" y="4814316"/>
             <a:ext cx="5009083" cy="374904"/>
           </a:xfrm>
           <a:prstGeom prst="rect">
@@ -6765,7 +6765,7 @@
         </p:nvSpPr>
         <p:spPr>
           <a:xfrm>
-            <a:off x="6106363" y="1691640"/>
+            <a:off x="6106363" y="1700784"/>
             <a:ext cx="5515661" cy="420624"/>
           </a:xfrm>
           <a:prstGeom prst="rect">
@@ -6991,7 +6991,7 @@
         </p:nvSpPr>
         <p:spPr>
           <a:xfrm>
-            <a:off x="6133795" y="3424428"/>
+            <a:off x="6133795" y="3403397"/>
             <a:ext cx="91440" cy="91440"/>
           </a:xfrm>
           <a:prstGeom prst="ellipse">
@@ -7011,7 +7011,7 @@
         </p:nvSpPr>
         <p:spPr>
           <a:xfrm>
-            <a:off x="6289243" y="3296412"/>
+            <a:off x="6289243" y="3275381"/>
             <a:ext cx="5332781" cy="374904"/>
           </a:xfrm>
           <a:prstGeom prst="rect">
@@ -7072,7 +7072,7 @@
         </p:nvSpPr>
         <p:spPr>
           <a:xfrm>
-            <a:off x="6133795" y="3753612"/>
+            <a:off x="6133795" y="3711550"/>
             <a:ext cx="91440" cy="91440"/>
           </a:xfrm>
           <a:prstGeom prst="ellipse">
@@ -7092,7 +7092,7 @@
         </p:nvSpPr>
         <p:spPr>
           <a:xfrm>
-            <a:off x="6289243" y="3625596"/>
+            <a:off x="6289243" y="3583534"/>
             <a:ext cx="5332781" cy="374904"/>
           </a:xfrm>
           <a:prstGeom prst="rect">
@@ -7153,7 +7153,7 @@
         </p:nvSpPr>
         <p:spPr>
           <a:xfrm>
-            <a:off x="6133795" y="4082796"/>
+            <a:off x="6133795" y="4019702"/>
             <a:ext cx="91440" cy="91440"/>
           </a:xfrm>
           <a:prstGeom prst="ellipse">
@@ -7173,7 +7173,7 @@
         </p:nvSpPr>
         <p:spPr>
           <a:xfrm>
-            <a:off x="6289243" y="3954780"/>
+            <a:off x="6289243" y="3891686"/>
             <a:ext cx="5332781" cy="374904"/>
           </a:xfrm>
           <a:prstGeom prst="rect">
@@ -7190,7 +7190,7 @@
               <a:buNone/>
             </a:pPr>
             <a:r>
-              <a:rPr lang="ja-JP" altLang="en-US" sz="2200" b="1" dirty="0">
+              <a:rPr lang="ja-JP" altLang="en-US" sz="2200" b="1" u="sng" dirty="0">
                 <a:solidFill>
                   <a:srgbClr val="C00000"/>
                 </a:solidFill>
@@ -7223,7 +7223,7 @@
         </p:nvSpPr>
         <p:spPr>
           <a:xfrm>
-            <a:off x="6289243" y="4262018"/>
+            <a:off x="6289243" y="4198925"/>
             <a:ext cx="5332781" cy="374904"/>
           </a:xfrm>
           <a:prstGeom prst="rect">
@@ -7262,7 +7262,7 @@
         </p:nvSpPr>
         <p:spPr>
           <a:xfrm>
-            <a:off x="6289243" y="4570171"/>
+            <a:off x="6289243" y="4507078"/>
             <a:ext cx="5332781" cy="374904"/>
           </a:xfrm>
           <a:prstGeom prst="rect">
@@ -7301,7 +7301,7 @@
         </p:nvSpPr>
         <p:spPr>
           <a:xfrm>
-            <a:off x="6289243" y="4877410"/>
+            <a:off x="6289243" y="4814316"/>
             <a:ext cx="5332781" cy="374904"/>
           </a:xfrm>
           <a:prstGeom prst="rect">
@@ -7780,12 +7780,12 @@
         </p:nvSpPr>
         <p:spPr>
           <a:xfrm>
-            <a:off x="502920" y="5182819"/>
-            <a:ext cx="11183112" cy="705917"/>
+            <a:off x="502920" y="5158130"/>
+            <a:ext cx="11183112" cy="730606"/>
           </a:xfrm>
           <a:prstGeom prst="roundRect">
             <a:avLst>
-              <a:gd name="adj" fmla="val 12953"/>
+              <a:gd name="adj" fmla="val 12516"/>
             </a:avLst>
           </a:prstGeom>
           <a:solidFill>
@@ -7807,7 +7807,7 @@
         </p:nvSpPr>
         <p:spPr>
           <a:xfrm>
-            <a:off x="640080" y="5217566"/>
+            <a:off x="640080" y="5182819"/>
             <a:ext cx="10908792" cy="374904"/>
           </a:xfrm>
           <a:prstGeom prst="rect">
@@ -7868,7 +7868,7 @@
         </p:nvSpPr>
         <p:spPr>
           <a:xfrm>
-            <a:off x="640080" y="5524805"/>
+            <a:off x="640080" y="5490972"/>
             <a:ext cx="10908792" cy="374904"/>
           </a:xfrm>
           <a:prstGeom prst="rect">
@@ -7919,11 +7919,11 @@
         <p:spPr>
           <a:xfrm>
             <a:off x="502920" y="1664208"/>
-            <a:ext cx="5945429" cy="3299155"/>
+            <a:ext cx="5945429" cy="3274466"/>
           </a:xfrm>
           <a:prstGeom prst="roundRect">
             <a:avLst>
-              <a:gd name="adj" fmla="val 2217"/>
+              <a:gd name="adj" fmla="val 2234"/>
             </a:avLst>
           </a:prstGeom>
           <a:solidFill>
@@ -7940,7 +7940,7 @@
         </p:nvSpPr>
         <p:spPr>
           <a:xfrm>
-            <a:off x="566928" y="1691640"/>
+            <a:off x="566928" y="1700784"/>
             <a:ext cx="5817413" cy="420624"/>
           </a:xfrm>
           <a:prstGeom prst="rect">
@@ -8077,7 +8077,7 @@
         </p:nvSpPr>
         <p:spPr>
           <a:xfrm>
-            <a:off x="594360" y="2809951"/>
+            <a:off x="594360" y="2788006"/>
             <a:ext cx="91440" cy="91440"/>
           </a:xfrm>
           <a:prstGeom prst="ellipse">
@@ -8097,7 +8097,7 @@
         </p:nvSpPr>
         <p:spPr>
           <a:xfrm>
-            <a:off x="749808" y="2681935"/>
+            <a:off x="749808" y="2659990"/>
             <a:ext cx="5634533" cy="374904"/>
           </a:xfrm>
           <a:prstGeom prst="rect">
@@ -8136,7 +8136,7 @@
         </p:nvSpPr>
         <p:spPr>
           <a:xfrm>
-            <a:off x="749808" y="2989174"/>
+            <a:off x="749808" y="2967228"/>
             <a:ext cx="5634533" cy="374904"/>
           </a:xfrm>
           <a:prstGeom prst="rect">
@@ -8175,7 +8175,7 @@
         </p:nvSpPr>
         <p:spPr>
           <a:xfrm>
-            <a:off x="594360" y="3446374"/>
+            <a:off x="594360" y="3402482"/>
             <a:ext cx="91440" cy="91440"/>
           </a:xfrm>
           <a:prstGeom prst="ellipse">
@@ -8195,7 +8195,7 @@
         </p:nvSpPr>
         <p:spPr>
           <a:xfrm>
-            <a:off x="749808" y="3318358"/>
+            <a:off x="749808" y="3274466"/>
             <a:ext cx="5634533" cy="374904"/>
           </a:xfrm>
           <a:prstGeom prst="rect">
@@ -8234,7 +8234,7 @@
         </p:nvSpPr>
         <p:spPr>
           <a:xfrm>
-            <a:off x="749808" y="3625596"/>
+            <a:off x="749808" y="3581705"/>
             <a:ext cx="5634533" cy="374904"/>
           </a:xfrm>
           <a:prstGeom prst="rect">
@@ -8273,7 +8273,7 @@
         </p:nvSpPr>
         <p:spPr>
           <a:xfrm>
-            <a:off x="594360" y="4082796"/>
+            <a:off x="594360" y="4016959"/>
             <a:ext cx="91440" cy="91440"/>
           </a:xfrm>
           <a:prstGeom prst="ellipse">
@@ -8293,7 +8293,7 @@
         </p:nvSpPr>
         <p:spPr>
           <a:xfrm>
-            <a:off x="749808" y="3954780"/>
+            <a:off x="749808" y="3888943"/>
             <a:ext cx="5634533" cy="374904"/>
           </a:xfrm>
           <a:prstGeom prst="rect">
@@ -8332,7 +8332,7 @@
         </p:nvSpPr>
         <p:spPr>
           <a:xfrm>
-            <a:off x="594360" y="4411980"/>
+            <a:off x="594360" y="4324198"/>
             <a:ext cx="91440" cy="91440"/>
           </a:xfrm>
           <a:prstGeom prst="ellipse">
@@ -8352,7 +8352,7 @@
         </p:nvSpPr>
         <p:spPr>
           <a:xfrm>
-            <a:off x="749808" y="4283964"/>
+            <a:off x="749808" y="4196182"/>
             <a:ext cx="5634533" cy="374904"/>
           </a:xfrm>
           <a:prstGeom prst="rect">
@@ -8402,7 +8402,7 @@
         </p:nvSpPr>
         <p:spPr>
           <a:xfrm>
-            <a:off x="749808" y="4592117"/>
+            <a:off x="749808" y="4504334"/>
             <a:ext cx="5634533" cy="374904"/>
           </a:xfrm>
           <a:prstGeom prst="rect">
@@ -8442,11 +8442,11 @@
         <p:spPr>
           <a:xfrm>
             <a:off x="6667805" y="1664208"/>
-            <a:ext cx="5018227" cy="3299155"/>
+            <a:ext cx="5018227" cy="3274466"/>
           </a:xfrm>
           <a:prstGeom prst="roundRect">
             <a:avLst>
-              <a:gd name="adj" fmla="val 2217"/>
+              <a:gd name="adj" fmla="val 2234"/>
             </a:avLst>
           </a:prstGeom>
           <a:solidFill>
@@ -8463,7 +8463,7 @@
         </p:nvSpPr>
         <p:spPr>
           <a:xfrm>
-            <a:off x="6731813" y="1691640"/>
+            <a:off x="6731813" y="1700784"/>
             <a:ext cx="4890211" cy="420624"/>
           </a:xfrm>
           <a:prstGeom prst="rect">
@@ -8611,7 +8611,7 @@
         </p:nvSpPr>
         <p:spPr>
           <a:xfrm>
-            <a:off x="6759245" y="2809951"/>
+            <a:off x="6759245" y="2788006"/>
             <a:ext cx="91440" cy="91440"/>
           </a:xfrm>
           <a:prstGeom prst="ellipse">
@@ -8631,7 +8631,7 @@
         </p:nvSpPr>
         <p:spPr>
           <a:xfrm>
-            <a:off x="6914693" y="2681935"/>
+            <a:off x="6914693" y="2659990"/>
             <a:ext cx="4707331" cy="374904"/>
           </a:xfrm>
           <a:prstGeom prst="rect">
@@ -8670,7 +8670,7 @@
         </p:nvSpPr>
         <p:spPr>
           <a:xfrm>
-            <a:off x="6914693" y="2989174"/>
+            <a:off x="6914693" y="2967228"/>
             <a:ext cx="4707331" cy="374904"/>
           </a:xfrm>
           <a:prstGeom prst="rect">
@@ -8709,7 +8709,7 @@
         </p:nvSpPr>
         <p:spPr>
           <a:xfrm>
-            <a:off x="6759245" y="3446374"/>
+            <a:off x="6759245" y="3402482"/>
             <a:ext cx="91440" cy="91440"/>
           </a:xfrm>
           <a:prstGeom prst="ellipse">
@@ -8729,7 +8729,7 @@
         </p:nvSpPr>
         <p:spPr>
           <a:xfrm>
-            <a:off x="6914693" y="3318358"/>
+            <a:off x="6914693" y="3274466"/>
             <a:ext cx="4707331" cy="374904"/>
           </a:xfrm>
           <a:prstGeom prst="rect">
@@ -8768,7 +8768,7 @@
         </p:nvSpPr>
         <p:spPr>
           <a:xfrm>
-            <a:off x="6914693" y="3625596"/>
+            <a:off x="6914693" y="3581705"/>
             <a:ext cx="4707331" cy="374904"/>
           </a:xfrm>
           <a:prstGeom prst="rect">
@@ -8807,7 +8807,7 @@
         </p:nvSpPr>
         <p:spPr>
           <a:xfrm>
-            <a:off x="6759245" y="4082796"/>
+            <a:off x="6759245" y="4016959"/>
             <a:ext cx="91440" cy="91440"/>
           </a:xfrm>
           <a:prstGeom prst="ellipse">
@@ -8827,7 +8827,7 @@
         </p:nvSpPr>
         <p:spPr>
           <a:xfrm>
-            <a:off x="6914693" y="3954780"/>
+            <a:off x="6914693" y="3888943"/>
             <a:ext cx="4707331" cy="374904"/>
           </a:xfrm>
           <a:prstGeom prst="rect">
@@ -8877,7 +8877,7 @@
         </p:nvSpPr>
         <p:spPr>
           <a:xfrm>
-            <a:off x="6759245" y="4411980"/>
+            <a:off x="6759245" y="4324198"/>
             <a:ext cx="91440" cy="91440"/>
           </a:xfrm>
           <a:prstGeom prst="ellipse">
@@ -8897,7 +8897,7 @@
         </p:nvSpPr>
         <p:spPr>
           <a:xfrm>
-            <a:off x="6914693" y="4283964"/>
+            <a:off x="6914693" y="4196182"/>
             <a:ext cx="4707331" cy="374904"/>
           </a:xfrm>
           <a:prstGeom prst="rect">
@@ -8936,7 +8936,7 @@
         </p:nvSpPr>
         <p:spPr>
           <a:xfrm>
-            <a:off x="6914693" y="4592117"/>
+            <a:off x="6914693" y="4504334"/>
             <a:ext cx="4707331" cy="374904"/>
           </a:xfrm>
           <a:prstGeom prst="rect">
@@ -8961,7 +8961,7 @@
                 <a:ea typeface="メイリオ" pitchFamily="34" charset="-122"/>
                 <a:cs typeface="メイリオ" pitchFamily="34" charset="-120"/>
               </a:rPr>
-              <a:t>区域麻酔ではせん妄は減らない</a:t>
+              <a:t>区域麻酔自体でせん妄は減らない</a:t>
             </a:r>
             <a:endParaRPr lang="ja-JP" sz="2200" dirty="0"/>
           </a:p>
@@ -9641,8 +9641,8 @@
         </p:nvSpPr>
         <p:spPr>
           <a:xfrm>
-            <a:off x="1051560" y="4754880"/>
-            <a:ext cx="10085832" cy="1097280"/>
+            <a:off x="502920" y="4754880"/>
+            <a:ext cx="11183112" cy="1097280"/>
           </a:xfrm>
           <a:prstGeom prst="roundRect">
             <a:avLst>
@@ -10125,7 +10125,7 @@
                 <a:ea typeface="メイリオ" pitchFamily="34" charset="-122"/>
                 <a:cs typeface="メイリオ" pitchFamily="34" charset="-120"/>
               </a:rPr>
-              <a:t>Berger M, et al. Anesth Analg 2018;127:1406-1413 / American Geriatrics Society. J Am</a:t>
+              <a:t>Berger M, et al. Anesth Analg 2018;127:1406-1413 / American Geriatrics Society.</a:t>
             </a:r>
             <a:endParaRPr lang="ja-JP" sz="1600" dirty="0"/>
           </a:p>
@@ -10142,7 +10142,7 @@
                 <a:ea typeface="メイリオ" pitchFamily="34" charset="-122"/>
                 <a:cs typeface="メイリオ" pitchFamily="34" charset="-120"/>
               </a:rPr>
-              <a:t>Geriatr Soc 2015;63:142-150 / Aldecoa C, et al. Eur J Anaesthesiol 2024;41:81-108</a:t>
+              <a:t>J Am Geriatr Soc 2015;63:142-150 / Aldecoa C, et al. Eur J Anaesthesiol 2024;41:81-108</a:t>
             </a:r>
             <a:endParaRPr lang="ja-JP" sz="1600" dirty="0"/>
           </a:p>
@@ -10306,7 +10306,7 @@
               <a:t>薬で</a:t>
             </a:r>
             <a:r>
-              <a:rPr lang="ja-JP" altLang="en-US" sz="2400" b="1" dirty="0">
+              <a:rPr lang="ja-JP" altLang="en-US" sz="2400" b="1" u="sng" dirty="0">
                 <a:solidFill>
                   <a:srgbClr val="C00000"/>
                 </a:solidFill>

--- a/slides/4-11_elderly_frailty_cognition/4-11_elderly_frailty_cognition.pptx
+++ b/slides/4-11_elderly_frailty_cognition/4-11_elderly_frailty_cognition.pptx
@@ -13,9 +13,11 @@
     <p:sldId id="261" r:id="rId7"/>
     <p:sldId id="262" r:id="rId8"/>
     <p:sldId id="263" r:id="rId9"/>
+    <p:sldId id="264" r:id="rId10"/>
+    <p:sldId id="265" r:id="rId11"/>
   </p:sldIdLst>
   <p:notesMasterIdLst>
-    <p:notesMasterId r:id="rId10"/>
+    <p:notesMasterId r:id="rId12"/>
   </p:notesMasterIdLst>
   <p:sldSz cx="12192000" cy="6858000"/>
   <p:notesSz cx="6858000" cy="12192000"/>
@@ -550,6 +552,93 @@
 </p:notes>
 </file>
 
+<file path=ppt/notesSlides/notesSlide10.xml><?xml version="1.0" encoding="utf-8"?>
+<p:notes xmlns:a="http://schemas.openxmlformats.org/drawingml/2006/main" xmlns:r="http://schemas.openxmlformats.org/officeDocument/2006/relationships" xmlns:p="http://schemas.openxmlformats.org/presentationml/2006/main">
+  <p:cSld>
+    <p:spTree>
+      <p:nvGrpSpPr>
+        <p:cNvPr id="1" name=""/>
+        <p:cNvGrpSpPr/>
+        <p:nvPr/>
+      </p:nvGrpSpPr>
+      <p:grpSpPr>
+        <a:xfrm>
+          <a:off x="0" y="0"/>
+          <a:ext cx="0" cy="0"/>
+          <a:chOff x="0" y="0"/>
+          <a:chExt cx="0" cy="0"/>
+        </a:xfrm>
+      </p:grpSpPr>
+      <p:sp>
+        <p:nvSpPr>
+          <p:cNvPr id="2" name="Slide Image Placeholder 1"/>
+          <p:cNvSpPr>
+            <a:spLocks noGrp="1" noRot="1" noChangeAspect="1"/>
+          </p:cNvSpPr>
+          <p:nvPr>
+            <p:ph type="sldImg"/>
+          </p:nvPr>
+        </p:nvSpPr>
+        <p:spPr/>
+      </p:sp>
+      <p:sp>
+        <p:nvSpPr>
+          <p:cNvPr id="3" name="Notes Placeholder 2"/>
+          <p:cNvSpPr>
+            <a:spLocks noGrp="1"/>
+          </p:cNvSpPr>
+          <p:nvPr>
+            <p:ph type="body" idx="1"/>
+          </p:nvPr>
+        </p:nvSpPr>
+        <p:spPr/>
+        <p:txBody>
+          <a:bodyPr/>
+          <a:lstStyle/>
+          <a:p>
+            <a:r>
+              <a:rPr lang="ja-JP" altLang="en-US" dirty="0"/>
+              <a:t>まとめ（約 1 分）。高齢者のリスクは年齢だけでは決まらず、フレイルと認知機能で大きく変わる。根拠は、フレイルを加えると ASA・Lee・Eagle の予測力が上がったこと（Makary 2010）、フレイルによる死亡リスクの上乗せは若いほど大きかったこと（McIsaac 2016：65 歳で HR 2.66、90 歳で 1.63。診断コードによるフレイル）、資源配分の判断では CFS の方が年齢よりはるかに望ましいとされること（Rockwood 2020）。CFS は約 2 週間前の病前の状態で付け、4 以上で注意、5 以上をフレイルとし（閾値は研究で違い、これは講義者の運用）、J-CHS 基準や基本チェックリスト、栄養・転倒歴・社会的支援も確かめる。65 歳を超える全員に Mini-Cog でベースラインの認知機能を測り、周術期神経認知障害のリスクを説明し、陽性なら意思決定能力を確かめる（陰性でもせん妄のリスクが低いとは言えない）。術後せん妄は大手術で 20〜40% に起き半数以上が見逃されるので、リスク因子を共有し、多因子の非薬物的介入（見当識、睡眠、早期離床、眼鏡・補聴器、水分・栄養、鎮痛、薬の見直し）で予防し（メタ解析でせん妄のオッズ 44% 減）、薬による予防はしない。ベンゾジアゼピン・抗コリン薬・ペチジンを避け、MAC が 10 歳ごとに約 6% 下がることと BIS の限界を知り、相対的低血圧を避けて鎮静の少ない多角的鎮痛を行う（区域麻酔そのものではせん妄は減らない）。老年科医がいない島では多職種とチェックリストで補う。次は 4-12（常用薬①：抗血栓薬）。</a:t>
+            </a:r>
+          </a:p>
+        </p:txBody>
+      </p:sp>
+      <p:sp>
+        <p:nvSpPr>
+          <p:cNvPr id="4" name="Slide Number Placeholder 3"/>
+          <p:cNvSpPr>
+            <a:spLocks noGrp="1"/>
+          </p:cNvSpPr>
+          <p:nvPr>
+            <p:ph type="sldNum" sz="quarter" idx="10"/>
+          </p:nvPr>
+        </p:nvSpPr>
+        <p:spPr/>
+        <p:txBody>
+          <a:bodyPr/>
+          <a:lstStyle/>
+          <a:p>
+            <a:fld id="{F7021451-1387-4CA6-816F-3879F97B5CBC}" type="slidenum">
+              <a:rPr lang="en-US"/>
+              <a:t>10</a:t>
+            </a:fld>
+            <a:endParaRPr lang="en-US"/>
+          </a:p>
+        </p:txBody>
+      </p:sp>
+    </p:spTree>
+    <p:extLst>
+      <p:ext uri="{BB962C8B-B14F-4D97-AF65-F5344CB8AC3E}">
+        <p14:creationId xmlns:p14="http://schemas.microsoft.com/office/powerpoint/2010/main" val="1024086991"/>
+      </p:ext>
+    </p:extLst>
+  </p:cSld>
+  <p:clrMapOvr>
+    <a:masterClrMapping/>
+  </p:clrMapOvr>
+</p:notes>
+</file>
+
 <file path=ppt/notesSlides/notesSlide2.xml><?xml version="1.0" encoding="utf-8"?>
 <p:notes xmlns:a="http://schemas.openxmlformats.org/drawingml/2006/main" xmlns:r="http://schemas.openxmlformats.org/officeDocument/2006/relationships" xmlns:p="http://schemas.openxmlformats.org/presentationml/2006/main">
   <p:cSld>
@@ -959,7 +1048,7 @@
           <a:p>
             <a:r>
               <a:rPr lang="ja-JP" altLang="en-US" dirty="0"/>
-              <a:t>リスク因子: ESAIC 2024（欧州麻酔集中治療学会 術後せん妄ガイドライン改訂版）の推奨 2.1（エビデンスの質 中・強い推奨）は、術前に評価すべき危険因子として高齢、ASA-PS 2 超（つまり 3 以上）、Charlson 併存疾患指数 2 超、MMSE 25 未満を挙げる。Charlson は第 2 章の本文では「&gt;2」、巻末の推奨一覧では「≥2」と表記が揺れている。続けて、個別の予防計画のためにフレイル・感覚障害（視覚・聴覚）・低栄養・多剤併用・貧血・社会的因子を含む老年医学的評価（スライドの「高齢者評価」）を求め、麻酔科の術前外来で危険因子をスクリーニングしてチームで共有し記録するよう推奨している。脱水は ESAIC の危険因子にはないので、スライドでは予防の介入（水分・栄養）の側に置いた。せん妄の既往・アルコール多飲・ベンゾジアゼピンは ESAIC の推奨 2.1 の項目ではなく、国内の加算の項目。</a:t>
+              <a:t>リスク因子: ESAIC 2024（欧州麻酔集中治療学会 術後せん妄ガイドライン改訂版）の推奨 2.1（エビデンスの質 中・強い推奨）は、術前に評価すべき危険因子として高齢、ASA-PS 2 超（つまり 3 以上）、Charlson 併存疾患指数 2 超、MMSE 25 未満を挙げる。Charlson は第 2 章の本文では「&gt;2」、巻末の推奨一覧では「≥2」と表記が揺れている。続けて、個別の予防計画のためにフレイル・感覚障害（視覚・聴覚）・低栄養・多剤併用・貧血・社会的因子を含む老年医学的評価（スライドの「高齢者評価」）を求め、麻酔科の術前外来で危険因子をスクリーニングしてチームで共有し記録するよう推奨している。脱水は ESAIC の危険因子にはないので、スライドでは予防の介入（水分・栄養 → S6）の側に置いた。せん妄の既往・アルコール多飲・ベンゾジアゼピンは ESAIC の推奨 2.1 の項目ではなく、国内の加算の項目。</a:t>
             </a:r>
           </a:p>
           <a:p>
@@ -971,31 +1060,13 @@
           <a:p>
             <a:r>
               <a:rPr lang="ja-JP" altLang="en-US" dirty="0"/>
-              <a:t>予防: HELP（Inouye 1999、内科入院の 70 歳以上 852 人）は認知障害・睡眠不足・不動・視覚障害・聴覚障害・脱水への標準化した介入でせん妄を 9.9% 対 15.0% に減らした。多因子の非薬物的介入のメタ解析（Hshieh 2015、14 介入研究、内科と外科の混合）では、11 研究の統合でせん妄のオッズ比 0.47（95%CI 0.38–0.58）、ランダム化またはマッチング試験 4 件に限ると 0.56（0.42–0.76。オッズで 44% 減）。転倒もオッズ比 0.38（4 研究）に減った。AGS 2015 は、リスクのある高齢手術患者に多職種チームが入院期間を通じて多因子の非薬物的介入を行うこと（強い推奨）、術後疼痛をできれば非オピオイドで十分に管理すること、不適切な薬を避けることを挙げる。ESAIC 2024 も多因子の非薬物的介入を強く推奨する。大腿骨近位部骨折の 65 歳以上 126 人で老年科医が術前または術後 24 時間以内から関与すると、せん妄 32% 対 50%（NNT 5.6）、重症せん妄 12% 対 29% に減った（Marcantonio 2001）。</a:t>
+              <a:t>スクリーニング: 回復室を出る前にせん妄をスクリーニングし、病棟でも CAM などで続ける（Peden 2021）【要確認: Peden 2021 本文で、回復室を出る前という時点と病棟での頻度】。低活動型（静かで動かない、反応が鈍い）は「おとなしい」と見過ごされやすい。術後の管理は 5-5。</a:t>
             </a:r>
           </a:p>
           <a:p>
             <a:r>
               <a:rPr lang="ja-JP" altLang="en-US" dirty="0"/>
-              <a:t>薬による予防: ESAIC 2024 は「どの予防薬も提案しない」（推奨 3.1、質 低・弱い推奨）。デクスメデトミジンは、ICU に入った非心臓手術後の 65 歳以上 700 人の RCT（Su 2016）で、術後に少量（0.1 μg/kg/h）を投与するとせん妄が 9% 対 23% に減った。一方、術中に 0.5 μg/kg/h で持続投与した RCT（Deiner 2017、68 歳超の 390 人）では 12.2% 対 11.4% で差がなかった。術中のルーチン投与は勧めない。ESAIC は、使うなら利益と副作用（徐脈・低血圧）を比べて判断するとし（推奨 3.2、強い推奨）、国内の添付文書にせん妄の予防・治療の適応はない（適応外）。AGS 2015 は、コリンエステラーゼ阻害薬をせん妄の予防・治療のために新しく始めないよう勧め（強い推奨・質 低）、抗精神病薬の予防投与は根拠不十分とする（推奨の強さなし・質 低）。ベンゾジアゼピンの回避は多くのガイドラインが推奨するが、心臓手術の B-Free 試験（2025、19,768 人）では、制限した期間のせん妄は 14.0%、自由に使った期間は 14.9% で、有意には減らなかった（調整 OR 0.92、95%CI 0.84–1.01）。</a:t>
-            </a:r>
-          </a:p>
-          <a:p>
-            <a:r>
-              <a:rPr lang="ja-JP" altLang="en-US" dirty="0"/>
-              <a:t>国内でよく使う薬: ラメルテオン・スボレキサント・抑肝散の術前投与も、せん妄の予防目的では勧められない。陽性の国内 RCT（ラメルテオン 3% 対 32%、Hatta 2014）は内科の急性期入院患者（65〜89 歳、67 人）が対象で、手術患者ではない。手術患者での抑肝散の RCT は陰性だった（高侵襲手術を受けるがん患者。Wada 2021）。どの薬もせん妄の予防は効能にない【要確認: ロゼレム・ベルソムラ・抑肝散エキス製剤の電子添文（PMDA）の効能又は効果】。</a:t>
-            </a:r>
-          </a:p>
-          <a:p>
-            <a:r>
-              <a:rPr lang="ja-JP" altLang="en-US" dirty="0"/>
-              <a:t>スクリーニング: 回復室を出る前にせん妄をスクリーニングし、病棟でも CAM などで続ける（Peden 2021）【要確認: Peden 2021 本文で、回復室を出る前という時点と病棟での頻度】。術後の管理は 5-5。</a:t>
-            </a:r>
-          </a:p>
-          <a:p>
-            <a:r>
-              <a:rPr lang="ja-JP" altLang="en-US" dirty="0"/>
-              <a:t>参考: Aldecoa C, et al. Eur J Anaesthesiol 2024;41:81-108（ESAIC） / AGS Expert Panel. J Am Geriatr Soc 2015;63:142-150 / Berger M, et al. Anesth Analg 2018;127:1406-1413 / Witlox J, et al. JAMA 2010;304:443-451 / Inouye SK, et al. N Engl J Med 1999;340:669-676（HELP） / Hshieh TT, et al. JAMA Intern Med 2015;175:512-520 / Marcantonio ER, et al. J Am Geriatr Soc 2001;49:516-522 / Su X, et al. Lancet 2016;388:1893-1902 / Deiner S, et al. JAMA Surg 2017;152:e171505 / Spence J, et al. JAMA Surg 2025;160:286-294（B-Free） / Hatta K, et al. JAMA Psychiatry 2014;71:397-403 / Wada S, et al. J Pain Symptom Manage 2021;61:71-80 / Peden CJ, et al. Br J Anaesth 2021;126:423-432</a:t>
+              <a:t>参考: Aldecoa C, et al. Eur J Anaesthesiol 2024;41:81-108（ESAIC） / AGS Expert Panel. J Am Geriatr Soc 2015;63:142-150 / Berger M, et al. Anesth Analg 2018;127:1406-1413 / Witlox J, et al. JAMA 2010;304:443-451 / Marcantonio ER, et al. J Am Geriatr Soc 2001;49:516-522 / Peden CJ, et al. Br J Anaesth 2021;126:423-432</a:t>
             </a:r>
           </a:p>
         </p:txBody>
@@ -1082,67 +1153,25 @@
           <a:p>
             <a:r>
               <a:rPr lang="ja-JP" altLang="en-US" dirty="0"/>
-              <a:t>避ける薬: AGS 2015 は術後せん妄を誘発する薬として、ベンゾジアゼピン、抗コリン薬（オキシブチニン、プロクロルペラジン、プロメタジン、三環系抗うつ薬、パロキセチンなど）、ジフェンヒドラミン、ヒドロキシジン、H2 受容体拮抗薬、鎮静催眠薬、メペリジン（ペチジン）を挙げ（強い推奨）、5 剤以上の多剤併用もリスクとする。Berger 2018 の表（Beers 基準準拠）は麻酔科医がよく使う薬として、ジフェンヒドラミン、プロメタジン、アトロピン・スコポラミン（中枢性抗コリン作用）、ハロペリドール、ミダゾラム・ジアゼパム、ヒドロコルチゾン・メチルプレドニゾロン（せん妄・精神症状）、ラニチジン、メトクロプラミド（錐体外路症状）、ペチジン（神経毒性）を挙げる。日常的に使いがちな薬（シバリングのペチジン、制吐のプロメタジン、鎮痙薬）ほど見直す。例外は、アルコールやベンゾジアゼピンの離脱予防にはベンゾジアゼピンが必要で、常用している患者で急に中止すると離脱せん妄を起こす（飲酒量を必ず聞く → 4-1）。AGS は、重いアレルギー反応・輸血反応へのジフェンヒドラミンも例外とする。ドネペジルなどを常用している患者では中止で悪化しうるが、予防のために新しく始めない。</a:t>
+              <a:t>予防: HELP（Inouye 1999、内科入院の 70 歳以上 852 人）は認知障害・睡眠不足・不動・視覚障害・聴覚障害・脱水への標準化した介入でせん妄を 9.9% 対 15.0% に減らした。多因子の非薬物的介入のメタ解析（Hshieh 2015、14 介入研究、内科と外科の混合）では、11 研究の統合でせん妄のオッズ比 0.47（95%CI 0.38–0.58）、ランダム化またはマッチング試験 4 件に限ると 0.56（0.42–0.76。オッズで 44% 減）。転倒もオッズ比 0.38（4 研究）に減った。AGS 2015 は、リスクのある高齢手術患者に多職種チームが入院期間を通じて多因子の非薬物的介入を行うこと（強い推奨）、術後疼痛をできれば非オピオイドで十分に管理すること、不適切な薬を避けることを挙げる。ESAIC 2024 も多因子の非薬物的介入を強く推奨する。介入の中身は見当識（時計・カレンダー・家族）、睡眠（夜間の騒音と処置を減らす）、早期離床、眼鏡・補聴器の早期返却、水分・栄養、十分な鎮痛、薬の見直し、酸素化、便秘・尿閉の対策。大腿骨近位部骨折の 65 歳以上 126 人で老年科医が術前または術後 24 時間以内から関与すると、せん妄 32% 対 50%（NNT 5.6）、重症せん妄 12% 対 29% に減った（Marcantonio 2001）。</a:t>
             </a:r>
           </a:p>
           <a:p>
             <a:r>
               <a:rPr lang="ja-JP" altLang="en-US" dirty="0"/>
-              <a:t>H2 受容体拮抗薬（スライドの「H2 遮断薬」）: Beers 2023 は、せん妄がある、または高リスクの高齢者では H2 受容体拮抗薬（シメチジン、ファモチジン、ニザチジン）を避けるとする（根拠の質 低・推奨 強）。国内で誤嚥予防の前投薬に使うファモチジンも含まれる。せん妄リスクの高い高齢者ではルーチンの前投薬にせず、誤嚥リスクから適応を個別に判断する（→ 4-3）。使うときは腎機能に合わせて減量する（CrCl 50 mL/分未満で減量。Beers 2023 表 6）。ラニチジンは米国で販売中止のため Beers 2023 からは外れた。</a:t>
+              <a:t>薬による予防: ESAIC 2024 は「どの予防薬も提案しない」（推奨 3.1、質 低・弱い推奨）。デクスメデトミジンは、ICU に入った非心臓手術後の 65 歳以上 700 人の RCT（Su 2016）で、術後に少量（0.1 μg/kg/h）を投与するとせん妄が 9% 対 23% に減った。一方、術中に 0.5 μg/kg/h で持続投与した RCT（Deiner 2017、68 歳超の 390 人）では 12.2% 対 11.4% で差がなかった。術中のルーチン投与は勧めない。ESAIC は、使うなら利益と副作用（徐脈・低血圧）を比べて判断するとし（推奨 3.2、強い推奨）、国内の添付文書にせん妄の予防・治療の適応はない（適応外）。AGS 2015 は、コリンエステラーゼ阻害薬をせん妄の予防・治療のために新しく始めないよう勧め（強い推奨・質 低）、抗精神病薬の予防投与は根拠不十分とする（推奨の強さなし・質 低）。ベンゾジアゼピンの回避は多くのガイドラインが推奨するが、心臓手術の B-Free 試験（2025、19,768 人）では、制限した期間のせん妄は 14.0%、自由に使った期間は 14.9% で、有意には減らなかった（調整 OR 0.92、95%CI 0.84–1.01）。</a:t>
             </a:r>
           </a:p>
           <a:p>
             <a:r>
               <a:rPr lang="ja-JP" altLang="en-US" dirty="0"/>
-              <a:t>アトロピン・スコポラミン: 中枢に移行する 3 級アミンで、中枢性抗コリン作用がある（Berger 2018 表 3、Beers 2023 表 7）。唾液分泌の抑制などの前投薬に漫然と使わない。症候性の徐脈の治療や、ネオスチグミンとの併用では、必要な量を使う（スライドの「例外」）。ブチルスコポラミン（4 級アンモニウム）は Beers 2023 表 7 に載っていない。</a:t>
+              <a:t>国内でよく使う薬: ラメルテオン・スボレキサント・抑肝散の術前投与も、せん妄の予防目的では勧められない。陽性の国内 RCT（ラメルテオン 3% 対 32%、Hatta 2014）は内科の急性期入院患者（65〜89 歳、67 人）が対象で、手術患者ではない。手術患者での抑肝散の RCT は陰性だった（高侵襲手術を受けるがん患者。Wada 2021）。どの薬もせん妄の予防は効能にない【要確認: ロゼレム・ベルソムラ・抑肝散エキス製剤の電子添文（PMDA）の効能又は効果】。</a:t>
             </a:r>
           </a:p>
           <a:p>
             <a:r>
               <a:rPr lang="ja-JP" altLang="en-US" dirty="0"/>
-              <a:t>ペチジン: Beers 2023 で「避ける」（質 中・推奨 強。せん妄を含む神経毒性）、Berger 2018 表 3 では「避けるか慎重に使う」（神経毒性）。シバリングにはまず加温し、ペチジンをルーチンで使わない。</a:t>
-            </a:r>
-          </a:p>
-          <a:p>
-            <a:r>
-              <a:rPr lang="ja-JP" altLang="en-US" dirty="0"/>
-              <a:t>ハロペリドール: Berger 表 3 に載るが、ESAIC 2024 推奨 6.1 は、非薬物的対応が無効なときの術後せん妄の治療に低用量ハロペリドールを提案する（質 非常に低・弱い推奨。短期間、ボーラスで最小量。パーキンソン病やレビー小体型認知症では慎重に使うか、使わない）。Beers 2023 も、非薬物的対応が無効か行えず、自分や他人を大きく傷つけるおそれがあるときを除いて、抗精神病薬を避けるとしている。スライドで避けるのは予防投与とルーチン投与で、せん妄の治療は 5-5。</a:t>
-            </a:r>
-          </a:p>
-          <a:p>
-            <a:r>
-              <a:rPr lang="ja-JP" altLang="en-US" dirty="0"/>
-              <a:t>多剤: 国内の高齢入院患者のデータベースでは、6 剤以上で薬物有害事象が多かった（Kojima 2012、GGI 12:761-762）。老年科外来の 172 人を 2 年追跡した研究では、5 剤以上で転倒が増えた（Kojima 2012、GGI 12:425-430。ROC で求めたカットオフ）。</a:t>
-            </a:r>
-          </a:p>
-          <a:p>
-            <a:r>
-              <a:rPr lang="ja-JP" altLang="en-US" dirty="0"/>
-              <a:t>MAC: log MAC は年齢とともに直線的に下がり、10 歳ごとに約 6%（Mapleson 1996。40 歳でセボフルラン 1.80%）。80 歳のセボフルランの MAC は式から約 1.4%（出典にこの数値はない）。若年成人と同じ設定では過量になるので年齢補正した呼気終末 MAC 比をモニターする。BIS のアルゴリズムは高齢者で検証されておらず、値が誤って高く出て過量につながりうる（Berger 2018）。脳波ガイドの麻酔は ENGAGES 試験（2019、60 歳以上 1,232 人）でせん妄を減らさず（26.0% 対 23.0%）、ESAIC 2024 は弱い提案、AGS は根拠不十分、Berger 2018 表 4 は脳波による調節を勧めていて、資料で結論が違う。</a:t>
-            </a:r>
-          </a:p>
-          <a:p>
-            <a:r>
-              <a:rPr lang="ja-JP" altLang="en-US" dirty="0"/>
-              <a:t>血圧・体温: 患者ごとのベースラインからみた相対的な低血圧を避け、正常体温を保つ（Berger 2018 表 4）。</a:t>
-            </a:r>
-          </a:p>
-          <a:p>
-            <a:r>
-              <a:rPr lang="ja-JP" altLang="en-US" dirty="0"/>
-              <a:t>静脈麻酔薬: 高齢者は静脈麻酔薬への感受性が高い（主に薬力学）。プロポフォールで意識を失う濃度（C50）は、25 歳・50 歳・75 歳で 2.35・1.8・1.25 μg/mL だった（Schnider 1999、健康志願者）。ミダゾラムは、脳波の目標に達するのに必要な総量が若年 71 mg・高齢 35 mg で、EC50 は約 50% 低く、クリアランスは同じだった（Albrecht 1999、男性志願者）。フェンタニルの必要量も 20 歳から 89 歳で約 50% 減り、薬物動態の変化ではなく脳の感受性による（Scott 1987）。肝・腎機能が正常でも、導入量と維持量を減らし、ゆっくり投与する。ディプリバンの添付文書（用法及び用量）にも「高齢者においては、より少量で就眠が得られる場合がある」とある【要確認: ディプリバン・ドルミカムの電子添文（PMDA）の 9.8 高齢者の項と、上の引用の文言】。</a:t>
-            </a:r>
-          </a:p>
-          <a:p>
-            <a:r>
-              <a:rPr lang="ja-JP" altLang="en-US" dirty="0"/>
-              <a:t>区域麻酔: AGS は疼痛管理とせん妄予防のために考慮してよい（弱い推奨）とするが、区域麻酔群で鎮静が深すぎた交絡があり、全身麻酔より減らすという根拠は乏しい。ESAIC 2024 推奨 3.3（質 低・弱い推奨）は、せん妄を減らす目的で特定の麻酔法を提案しない。大腿骨近位部骨折の RCT では、REGAIN（50 歳以上 1,600 人）で脊髄くも膜下麻酔 20.5% 対 全身麻酔 19.7%（RR 1.04）、RAGA（65 歳以上 950 人、鎮静なしの区域麻酔）で 6.2% 対 5.1% と、せん妄に差がなかった。区域麻酔でも鎮静を深くしない。術後疼痛は非オピオイド中心の多角的鎮痛で（AGS 強い推奨）。</a:t>
-            </a:r>
-          </a:p>
-          <a:p>
-            <a:r>
-              <a:rPr lang="ja-JP" altLang="en-US" dirty="0"/>
-              <a:t>参考: AGS. J Am Geriatr Soc 2015;63:142-150 / Berger M, et al. Anesth Analg 2018;127:1406-1413 / Mapleson WW. Br J Anaesth 1996;76:179-185 / Wildes TS, et al. JAMA 2019;321:473-483（ENGAGES） / Kojima T, et al. Geriatr Gerontol Int 2012;12:425-430 / Kojima T, et al. Geriatr Gerontol Int 2012;12:761-762 / Schnider TW, et al. Anesthesiology 1999;90:1502-1516 / Albrecht S, et al. Clin Pharmacol Ther 1999;65:630-639 / Scott JC, Stanski DR. J Pharmacol Exp Ther 1987;240:159-166 / Neuman MD, et al. N Engl J Med 2021;385:2025-2035（REGAIN） / Li T, et al. JAMA 2022;327:50-58（RAGA）</a:t>
+              <a:t>参考: Aldecoa C, et al. Eur J Anaesthesiol 2024;41:81-108（ESAIC） / AGS Expert Panel. J Am Geriatr Soc 2015;63:142-150 / Inouye SK, et al. N Engl J Med 1999;340:669-676（HELP） / Hshieh TT, et al. JAMA Intern Med 2015;175:512-520 / Marcantonio ER, et al. J Am Geriatr Soc 2001;49:516-522 / Su X, et al. Lancet 2016;388:1893-1902 / Deiner S, et al. JAMA Surg 2017;152:e171505 / Spence J, et al. JAMA Surg 2025;160:286-294（B-Free） / Hatta K, et al. JAMA Psychiatry 2014;71:397-403 / Wada S, et al. J Pain Symptom Manage 2021;61:71-80</a:t>
             </a:r>
           </a:p>
         </p:txBody>
@@ -1229,25 +1258,43 @@
           <a:p>
             <a:r>
               <a:rPr lang="ja-JP" altLang="en-US" dirty="0"/>
-              <a:t>相談先: 大腿骨近位部骨折で老年科医が術前または術後 24 時間以内から関与するとせん妄が減った（Marcantonio 2001）。老年科医がいない離島では、認知症ケアチーム、精神科リエゾン、遠隔での相談、せん妄ハイリスク患者ケア加算のチェックリストと多職種（看護師、薬剤師、リハビリ）で「老年科の目」を代わりに入れる。</a:t>
+              <a:t>避ける薬: AGS 2015 は術後せん妄を誘発する薬として、ベンゾジアゼピン、抗コリン薬（オキシブチニン、プロクロルペラジン、プロメタジン、三環系抗うつ薬、パロキセチンなど）、ジフェンヒドラミン、ヒドロキシジン、H2 受容体拮抗薬、鎮静催眠薬、メペリジン（ペチジン）を挙げ（強い推奨）、5 剤以上の多剤併用もリスクとする。Berger 2018 の表（Beers 基準準拠）は麻酔科医がよく使う薬として、ジフェンヒドラミン、プロメタジン、アトロピン・スコポラミン（中枢性抗コリン作用）、ハロペリドール、ミダゾラム・ジアゼパム、ヒドロコルチゾン・メチルプレドニゾロン（せん妄・精神症状）、ラニチジン、メトクロプラミド（錐体外路症状）、ペチジン（神経毒性）を挙げる。日常的に使いがちな薬（シバリングのペチジン、制吐のプロメタジン、鎮痙薬）ほど見直す。例外は、アルコールやベンゾジアゼピンの離脱予防にはベンゾジアゼピンが必要で、常用している患者で急に中止すると離脱せん妄を起こす（飲酒量を必ず聞く → 4-1）。AGS は、重いアレルギー反応・輸血反応へのジフェンヒドラミンも例外とする。ドネペジルなどを常用している患者では中止で悪化しうるが、予防のために新しく始めない。</a:t>
             </a:r>
           </a:p>
           <a:p>
             <a:r>
               <a:rPr lang="ja-JP" altLang="en-US" dirty="0"/>
-              <a:t>家族: 眼鏡・補聴器・入れ歯・時計・カレンダー・慣れた物を持参してもらい、可能なら付き添いを頼む。家族の関与、睡眠と栄養の改善、特定の薬の回避、眼鏡・補聴器の早期返却、術中管理などを組み合わせると、周術期神経認知障害を最大 40% 減らせる可能性がある（Berger 2018）。</a:t>
+              <a:t>H2 受容体拮抗薬（スライドの「H2 遮断薬」）: Beers 2023 は、せん妄がある、または高リスクの高齢者では H2 受容体拮抗薬（シメチジン、ファモチジン、ニザチジン）を避けるとする（根拠の質 低・推奨 強）。国内で誤嚥予防の前投薬に使うファモチジンも含まれる。せん妄リスクの高い高齢者ではルーチンの前投薬にせず、誤嚥リスクから適応を個別に判断する（→ 4-3）。使うときは腎機能に合わせて減量する（CrCl 50 mL/分未満で減量。Beers 2023 表 6）。ラニチジンは米国で販売中止のため Beers 2023 からは外れた。</a:t>
             </a:r>
           </a:p>
           <a:p>
             <a:r>
               <a:rPr lang="ja-JP" altLang="en-US" dirty="0"/>
-              <a:t>術前から: 栄養（アルブミン、体重減少）と運動のプレハビリテーション、飲酒と睡眠薬の整理、多剤の見直しは外来の時点で始める。</a:t>
+              <a:t>アトロピン・スコポラミン: 中枢に移行する 3 級アミンで、中枢性抗コリン作用がある（Berger 2018 表 3、Beers 2023 表 7）。唾液分泌の抑制などの前投薬に漫然と使わない。症候性の徐脈の治療や、ネオスチグミンとの併用では、必要な量を使う（スライドの「例外」）。ブチルスコポラミン（4 級アンモニウム）は Beers 2023 表 7 に載っていない。</a:t>
             </a:r>
           </a:p>
           <a:p>
             <a:r>
               <a:rPr lang="ja-JP" altLang="en-US" dirty="0"/>
-              <a:t>目標: 退院先（施設退院の可能性）と治療の目標・希望を本人・家族と前もって話し、記録する（ACS NSQIP/AGS チェックリスト。DNAR は 4-6）。</a:t>
+              <a:t>ペチジン: Beers 2023 で「避ける」（質 中・推奨 強。せん妄を含む神経毒性）、Berger 2018 表 3 では「避けるか慎重に使う」（神経毒性）。シバリングにはまず加温し、ペチジンをルーチンで使わない。</a:t>
+            </a:r>
+          </a:p>
+          <a:p>
+            <a:r>
+              <a:rPr lang="ja-JP" altLang="en-US" dirty="0"/>
+              <a:t>ハロペリドール: Berger 表 3 に載るが、ESAIC 2024 推奨 6.1 は、非薬物的対応が無効なときの術後せん妄の治療に低用量ハロペリドールを提案する（質 非常に低・弱い推奨。短期間、ボーラスで最小量。パーキンソン病やレビー小体型認知症では慎重に使うか、使わない）。Beers 2023 も、非薬物的対応が無効か行えず、自分や他人を大きく傷つけるおそれがあるときを除いて、抗精神病薬を避けるとしている。スライドで避けるのは予防投与とルーチン投与で、せん妄の治療は 5-5。</a:t>
+            </a:r>
+          </a:p>
+          <a:p>
+            <a:r>
+              <a:rPr lang="ja-JP" altLang="en-US" dirty="0"/>
+              <a:t>多剤: 国内の高齢入院患者のデータベースでは、6 剤以上で薬物有害事象が多かった（Kojima 2012、GGI 12:761-762）。老年科外来の 172 人を 2 年追跡した研究では、5 剤以上で転倒が増えた（Kojima 2012、GGI 12:425-430。ROC で求めたカットオフ）。お薬手帳で睡眠薬・抗コリン薬・市販薬・サプリまで確かめる。</a:t>
+            </a:r>
+          </a:p>
+          <a:p>
+            <a:r>
+              <a:rPr lang="ja-JP" altLang="en-US" dirty="0"/>
+              <a:t>参考: AGS. J Am Geriatr Soc 2015;63:142-150 / Berger M, et al. Anesth Analg 2018;127:1406-1413 / 2023 AGS Beers Criteria Update Expert Panel. J Am Geriatr Soc 2023;71:2052-2081 / Kojima T, et al. Geriatr Gerontol Int 2012;12:425-430 / Kojima T, et al. Geriatr Gerontol Int 2012;12:761-762</a:t>
             </a:r>
           </a:p>
         </p:txBody>
@@ -1334,7 +1381,31 @@
           <a:p>
             <a:r>
               <a:rPr lang="ja-JP" altLang="en-US" dirty="0"/>
-              <a:t>まとめ（約 1 分）。高齢者のリスクは年齢だけでは決まらず、フレイルと認知機能で大きく変わる。根拠は、フレイルを加えると ASA・Lee・Eagle の予測力が上がったこと（Makary 2010）、フレイルによる死亡リスクの上乗せは若いほど大きかったこと（McIsaac 2016：65 歳で HR 2.66、90 歳で 1.63。診断コードによるフレイル）、資源配分の判断では CFS の方が年齢よりはるかに望ましいとされること（Rockwood 2020）。CFS は約 2 週間前の病前の状態で付け、4 以上で注意、5 以上をフレイルとし（閾値は研究で違い、これは講義者の運用）、J-CHS 基準や基本チェックリスト、栄養・転倒歴・社会的支援も確かめる。65 歳を超える全員に Mini-Cog でベースラインの認知機能を測り、周術期神経認知障害のリスクを説明し、陽性なら意思決定能力を確かめる（陰性でもせん妄のリスクが低いとは言えない）。術後せん妄は大手術で 20〜40% に起き半数以上が見逃されるので、リスク因子を共有し、多因子の非薬物的介入（見当識、睡眠、早期離床、眼鏡・補聴器、水分・栄養、鎮痛、薬の見直し）で予防し（メタ解析でせん妄のオッズ 44% 減）、薬による予防はしない。ベンゾジアゼピン・抗コリン薬・ペチジンを避け、MAC が 10 歳ごとに約 6% 下がることと BIS の限界を知り、相対的低血圧を避けて鎮静の少ない多角的鎮痛を行う（区域麻酔そのものではせん妄は減らない）。老年科医がいない島では多職種とチェックリストで補う。次は 4-12（常用薬①：抗血栓薬）。</a:t>
+              <a:t>MAC: log MAC は年齢とともに直線的に下がり、10 歳ごとに約 6%（Mapleson 1996。40 歳でセボフルラン 1.80%）。80 歳のセボフルランの MAC は式から約 1.4%（出典にこの数値はない）。若年成人と同じ設定では過量になるので年齢補正した呼気終末 MAC 比をモニターする。BIS のアルゴリズムは高齢者で検証されておらず、値が誤って高く出て過量につながりうる（Berger 2018）。脳波ガイドの麻酔は ENGAGES 試験（2019、60 歳以上 1,232 人）でせん妄を減らさず（26.0% 対 23.0%）、ESAIC 2024 は弱い提案、AGS は根拠不十分、Berger 2018 表 4 は脳波による調節を勧めていて、資料で結論が違う。</a:t>
+            </a:r>
+          </a:p>
+          <a:p>
+            <a:r>
+              <a:rPr lang="ja-JP" altLang="en-US" dirty="0"/>
+              <a:t>血圧・体温: 患者ごとのベースラインからみた相対的な低血圧を避け、正常体温を保つ（Berger 2018 表 4）。</a:t>
+            </a:r>
+          </a:p>
+          <a:p>
+            <a:r>
+              <a:rPr lang="ja-JP" altLang="en-US" dirty="0"/>
+              <a:t>静脈麻酔薬: 高齢者は静脈麻酔薬への感受性が高い（主に薬力学）。プロポフォールで意識を失う濃度（C50）は、25 歳・50 歳・75 歳で 2.35・1.8・1.25 μg/mL だった（Schnider 1999、健康志願者）。ミダゾラムは、脳波の目標に達するのに必要な総量が若年 71 mg・高齢 35 mg で、EC50 は約 50% 低く、クリアランスは同じだった（Albrecht 1999、男性志願者）。フェンタニルの必要量も 20 歳から 89 歳で約 50% 減り、薬物動態の変化ではなく脳の感受性による（Scott 1987）。肝・腎機能が正常でも、導入量と維持量を減らし、ゆっくり投与する。ディプリバンの添付文書（用法及び用量）にも「高齢者においては、より少量で就眠が得られる場合がある」とある【要確認: ディプリバン・ドルミカムの電子添文（PMDA）の 9.8 高齢者の項と、上の引用の文言】。</a:t>
+            </a:r>
+          </a:p>
+          <a:p>
+            <a:r>
+              <a:rPr lang="ja-JP" altLang="en-US" dirty="0"/>
+              <a:t>区域麻酔: AGS は疼痛管理とせん妄予防のために考慮してよい（弱い推奨）とするが、区域麻酔群で鎮静が深すぎた交絡があり、全身麻酔より減らすという根拠は乏しい。ESAIC 2024 推奨 3.3（質 低・弱い推奨）は、せん妄を減らす目的で特定の麻酔法を提案しない。大腿骨近位部骨折の RCT では、REGAIN（50 歳以上 1,600 人）で脊髄くも膜下麻酔 20.5% 対 全身麻酔 19.7%（RR 1.04）、RAGA（65 歳以上 950 人、鎮静なしの区域麻酔）で 6.2% 対 5.1% と、せん妄に差がなかった。区域麻酔でも鎮静を深くしない。術後疼痛は非オピオイド中心の多角的鎮痛で（AGS 強い推奨）。</a:t>
+            </a:r>
+          </a:p>
+          <a:p>
+            <a:r>
+              <a:rPr lang="ja-JP" altLang="en-US" dirty="0"/>
+              <a:t>参考: Berger M, et al. Anesth Analg 2018;127:1406-1413 / Mapleson WW. Br J Anaesth 1996;76:179-185 / Wildes TS, et al. JAMA 2019;321:473-483（ENGAGES） / Schnider TW, et al. Anesthesiology 1999;90:1502-1516 / Albrecht S, et al. Clin Pharmacol Ther 1999;65:630-639 / Scott JC, Stanski DR. J Pharmacol Exp Ther 1987;240:159-166 / Neuman MD, et al. N Engl J Med 2021;385:2025-2035（REGAIN） / Li T, et al. JAMA 2022;327:50-58（RAGA）</a:t>
             </a:r>
           </a:p>
         </p:txBody>
@@ -1357,6 +1428,111 @@
             <a:fld id="{F7021451-1387-4CA6-816F-3879F97B5CBC}" type="slidenum">
               <a:rPr lang="en-US"/>
               <a:t>8</a:t>
+            </a:fld>
+            <a:endParaRPr lang="en-US"/>
+          </a:p>
+        </p:txBody>
+      </p:sp>
+    </p:spTree>
+    <p:extLst>
+      <p:ext uri="{BB962C8B-B14F-4D97-AF65-F5344CB8AC3E}">
+        <p14:creationId xmlns:p14="http://schemas.microsoft.com/office/powerpoint/2010/main" val="1024086991"/>
+      </p:ext>
+    </p:extLst>
+  </p:cSld>
+  <p:clrMapOvr>
+    <a:masterClrMapping/>
+  </p:clrMapOvr>
+</p:notes>
+</file>
+
+<file path=ppt/notesSlides/notesSlide9.xml><?xml version="1.0" encoding="utf-8"?>
+<p:notes xmlns:a="http://schemas.openxmlformats.org/drawingml/2006/main" xmlns:r="http://schemas.openxmlformats.org/officeDocument/2006/relationships" xmlns:p="http://schemas.openxmlformats.org/presentationml/2006/main">
+  <p:cSld>
+    <p:spTree>
+      <p:nvGrpSpPr>
+        <p:cNvPr id="1" name=""/>
+        <p:cNvGrpSpPr/>
+        <p:nvPr/>
+      </p:nvGrpSpPr>
+      <p:grpSpPr>
+        <a:xfrm>
+          <a:off x="0" y="0"/>
+          <a:ext cx="0" cy="0"/>
+          <a:chOff x="0" y="0"/>
+          <a:chExt cx="0" cy="0"/>
+        </a:xfrm>
+      </p:grpSpPr>
+      <p:sp>
+        <p:nvSpPr>
+          <p:cNvPr id="2" name="Slide Image Placeholder 1"/>
+          <p:cNvSpPr>
+            <a:spLocks noGrp="1" noRot="1" noChangeAspect="1"/>
+          </p:cNvSpPr>
+          <p:nvPr>
+            <p:ph type="sldImg"/>
+          </p:nvPr>
+        </p:nvSpPr>
+        <p:spPr/>
+      </p:sp>
+      <p:sp>
+        <p:nvSpPr>
+          <p:cNvPr id="3" name="Notes Placeholder 2"/>
+          <p:cNvSpPr>
+            <a:spLocks noGrp="1"/>
+          </p:cNvSpPr>
+          <p:nvPr>
+            <p:ph type="body" idx="1"/>
+          </p:nvPr>
+        </p:nvSpPr>
+        <p:spPr/>
+        <p:txBody>
+          <a:bodyPr/>
+          <a:lstStyle/>
+          <a:p>
+            <a:r>
+              <a:rPr lang="ja-JP" altLang="en-US" dirty="0"/>
+              <a:t>相談先: 大腿骨近位部骨折で老年科医が術前または術後 24 時間以内から関与するとせん妄が減った（Marcantonio 2001）。老年科医がいない離島では、認知症ケアチーム、精神科リエゾン、遠隔での相談、せん妄ハイリスク患者ケア加算のチェックリストと多職種（看護師、薬剤師、リハビリ）で「老年科の目」を代わりに入れる。</a:t>
+            </a:r>
+          </a:p>
+          <a:p>
+            <a:r>
+              <a:rPr lang="ja-JP" altLang="en-US" dirty="0"/>
+              <a:t>家族: 眼鏡・補聴器・入れ歯・時計・カレンダー・慣れた物を持参してもらい、可能なら付き添いを頼む。家族の関与、睡眠と栄養の改善、特定の薬の回避、眼鏡・補聴器の早期返却、術中管理などを組み合わせると、周術期神経認知障害を最大 40% 減らせる可能性がある（Berger 2018）。</a:t>
+            </a:r>
+          </a:p>
+          <a:p>
+            <a:r>
+              <a:rPr lang="ja-JP" altLang="en-US" dirty="0"/>
+              <a:t>術前から: 栄養（アルブミン、体重減少）と運動のプレハビリテーション、飲酒と睡眠薬の整理、多剤の見直しは外来の時点で始める。</a:t>
+            </a:r>
+          </a:p>
+          <a:p>
+            <a:r>
+              <a:rPr lang="ja-JP" altLang="en-US" dirty="0"/>
+              <a:t>目標: 退院先（施設退院の可能性）と治療の目標・希望を本人・家族と前もって話し、記録する（ACS NSQIP/AGS チェックリスト。DNAR は 4-6）。</a:t>
+            </a:r>
+          </a:p>
+        </p:txBody>
+      </p:sp>
+      <p:sp>
+        <p:nvSpPr>
+          <p:cNvPr id="4" name="Slide Number Placeholder 3"/>
+          <p:cNvSpPr>
+            <a:spLocks noGrp="1"/>
+          </p:cNvSpPr>
+          <p:nvPr>
+            <p:ph type="sldNum" sz="quarter" idx="10"/>
+          </p:nvPr>
+        </p:nvSpPr>
+        <p:spPr/>
+        <p:txBody>
+          <a:bodyPr/>
+          <a:lstStyle/>
+          <a:p>
+            <a:fld id="{F7021451-1387-4CA6-816F-3879F97B5CBC}" type="slidenum">
+              <a:rPr lang="en-US"/>
+              <a:t>9</a:t>
             </a:fld>
             <a:endParaRPr lang="en-US"/>
           </a:p>
@@ -2016,6 +2192,687 @@
 </p:sld>
 </file>
 
+<file path=ppt/slides/slide10.xml><?xml version="1.0" encoding="utf-8"?>
+<p:sld xmlns:a="http://schemas.openxmlformats.org/drawingml/2006/main" xmlns:r="http://schemas.openxmlformats.org/officeDocument/2006/relationships" xmlns:p="http://schemas.openxmlformats.org/presentationml/2006/main">
+  <p:cSld name="Slide 10">
+    <p:spTree>
+      <p:nvGrpSpPr>
+        <p:cNvPr id="1" name=""/>
+        <p:cNvGrpSpPr/>
+        <p:nvPr/>
+      </p:nvGrpSpPr>
+      <p:grpSpPr>
+        <a:xfrm>
+          <a:off x="0" y="0"/>
+          <a:ext cx="0" cy="0"/>
+          <a:chOff x="0" y="0"/>
+          <a:chExt cx="0" cy="0"/>
+        </a:xfrm>
+      </p:grpSpPr>
+      <p:sp>
+        <p:nvSpPr>
+          <p:cNvPr id="2" name="Title"/>
+          <p:cNvSpPr>
+            <a:spLocks noGrp="1"/>
+          </p:cNvSpPr>
+          <p:nvPr>
+            <p:ph type="title"/>
+          </p:nvPr>
+        </p:nvSpPr>
+        <p:spPr>
+          <a:xfrm>
+            <a:off x="502920" y="320040"/>
+            <a:ext cx="8503920" cy="868680"/>
+          </a:xfrm>
+          <a:prstGeom prst="rect">
+            <a:avLst/>
+          </a:prstGeom>
+          <a:noFill/>
+          <a:ln/>
+        </p:spPr>
+        <p:txBody>
+          <a:bodyPr wrap="square" lIns="0" tIns="0" rIns="0" bIns="0" rtlCol="0" anchor="ctr"/>
+          <a:lstStyle/>
+          <a:p>
+            <a:pPr algn="l" indent="0" marL="0">
+              <a:buNone/>
+            </a:pPr>
+            <a:r>
+              <a:rPr lang="ja-JP" altLang="en-US" sz="4400" b="1" dirty="0">
+                <a:ln w="28575">
+                  <a:solidFill>
+                    <a:srgbClr val="000000"/>
+                  </a:solidFill>
+                </a:ln>
+                <a:solidFill>
+                  <a:srgbClr val="BF9000"/>
+                </a:solidFill>
+                <a:latin typeface="メイリオ" pitchFamily="34" charset="0"/>
+                <a:ea typeface="メイリオ" pitchFamily="34" charset="-122"/>
+                <a:cs typeface="メイリオ" pitchFamily="34" charset="-120"/>
+              </a:rPr>
+              <a:t>まとめ</a:t>
+            </a:r>
+            <a:endParaRPr lang="ja-JP" sz="4400" dirty="0"/>
+          </a:p>
+        </p:txBody>
+      </p:sp>
+      <p:sp>
+        <p:nvSpPr>
+          <p:cNvPr id="3" name="Shape 1"/>
+          <p:cNvSpPr/>
+          <p:nvPr/>
+        </p:nvSpPr>
+        <p:spPr>
+          <a:xfrm>
+            <a:off x="0" y="1389888"/>
+            <a:ext cx="12191970" cy="0"/>
+          </a:xfrm>
+          <a:prstGeom prst="line">
+            <a:avLst/>
+          </a:prstGeom>
+          <a:noFill/>
+          <a:ln w="101600">
+            <a:solidFill>
+              <a:srgbClr val="BF9000"/>
+            </a:solidFill>
+            <a:prstDash val="solid"/>
+          </a:ln>
+        </p:spPr>
+      </p:sp>
+      <p:sp>
+        <p:nvSpPr>
+          <p:cNvPr id="4" name="Text 2"/>
+          <p:cNvSpPr/>
+          <p:nvPr/>
+        </p:nvSpPr>
+        <p:spPr>
+          <a:xfrm>
+            <a:off x="8677656" y="54864"/>
+            <a:ext cx="621792" cy="585216"/>
+          </a:xfrm>
+          <a:prstGeom prst="roundRect">
+            <a:avLst>
+              <a:gd name="adj" fmla="val 7813"/>
+            </a:avLst>
+          </a:prstGeom>
+          <a:solidFill>
+            <a:srgbClr val="D9D9D9"/>
+          </a:solidFill>
+          <a:ln/>
+        </p:spPr>
+        <p:txBody>
+          <a:bodyPr wrap="none" lIns="0" tIns="0" rIns="0" bIns="0" rtlCol="0" anchor="ctr"/>
+          <a:lstStyle/>
+          <a:p>
+            <a:pPr algn="ctr" indent="0" marL="0">
+              <a:buNone/>
+            </a:pPr>
+            <a:r>
+              <a:rPr lang="ja-JP" altLang="en-US" sz="1050" dirty="0">
+                <a:solidFill>
+                  <a:srgbClr val="404040"/>
+                </a:solidFill>
+                <a:latin typeface="メイリオ" pitchFamily="34" charset="0"/>
+                <a:ea typeface="メイリオ" pitchFamily="34" charset="-122"/>
+                <a:cs typeface="メイリオ" pitchFamily="34" charset="-120"/>
+              </a:rPr>
+              <a:t>フレイル</a:t>
+            </a:r>
+            <a:endParaRPr lang="ja-JP" sz="1050" dirty="0"/>
+          </a:p>
+        </p:txBody>
+      </p:sp>
+      <p:sp>
+        <p:nvSpPr>
+          <p:cNvPr id="5" name="Text 3"/>
+          <p:cNvSpPr/>
+          <p:nvPr/>
+        </p:nvSpPr>
+        <p:spPr>
+          <a:xfrm>
+            <a:off x="9354312" y="54864"/>
+            <a:ext cx="621792" cy="585216"/>
+          </a:xfrm>
+          <a:prstGeom prst="roundRect">
+            <a:avLst>
+              <a:gd name="adj" fmla="val 7813"/>
+            </a:avLst>
+          </a:prstGeom>
+          <a:solidFill>
+            <a:srgbClr val="D9D9D9"/>
+          </a:solidFill>
+          <a:ln/>
+        </p:spPr>
+        <p:txBody>
+          <a:bodyPr wrap="none" lIns="0" tIns="0" rIns="0" bIns="0" rtlCol="0" anchor="ctr"/>
+          <a:lstStyle/>
+          <a:p>
+            <a:pPr algn="ctr" indent="0" marL="0">
+              <a:buNone/>
+            </a:pPr>
+            <a:r>
+              <a:rPr lang="ja-JP" altLang="en-US" sz="1050" dirty="0">
+                <a:solidFill>
+                  <a:srgbClr val="404040"/>
+                </a:solidFill>
+                <a:latin typeface="メイリオ" pitchFamily="34" charset="0"/>
+                <a:ea typeface="メイリオ" pitchFamily="34" charset="-122"/>
+                <a:cs typeface="メイリオ" pitchFamily="34" charset="-120"/>
+              </a:rPr>
+              <a:t>認知</a:t>
+            </a:r>
+            <a:endParaRPr lang="ja-JP" sz="1050" dirty="0"/>
+          </a:p>
+          <a:p>
+            <a:pPr algn="ctr" indent="0" marL="0">
+              <a:buNone/>
+            </a:pPr>
+            <a:r>
+              <a:rPr lang="ja-JP" altLang="en-US" sz="1050" dirty="0">
+                <a:solidFill>
+                  <a:srgbClr val="404040"/>
+                </a:solidFill>
+                <a:latin typeface="メイリオ" pitchFamily="34" charset="0"/>
+                <a:ea typeface="メイリオ" pitchFamily="34" charset="-122"/>
+                <a:cs typeface="メイリオ" pitchFamily="34" charset="-120"/>
+              </a:rPr>
+              <a:t>機能</a:t>
+            </a:r>
+            <a:endParaRPr lang="ja-JP" sz="1050" dirty="0"/>
+          </a:p>
+        </p:txBody>
+      </p:sp>
+      <p:sp>
+        <p:nvSpPr>
+          <p:cNvPr id="6" name="Text 4"/>
+          <p:cNvSpPr/>
+          <p:nvPr/>
+        </p:nvSpPr>
+        <p:spPr>
+          <a:xfrm>
+            <a:off x="10030968" y="54864"/>
+            <a:ext cx="621792" cy="585216"/>
+          </a:xfrm>
+          <a:prstGeom prst="roundRect">
+            <a:avLst>
+              <a:gd name="adj" fmla="val 7813"/>
+            </a:avLst>
+          </a:prstGeom>
+          <a:solidFill>
+            <a:srgbClr val="D9D9D9"/>
+          </a:solidFill>
+          <a:ln/>
+        </p:spPr>
+        <p:txBody>
+          <a:bodyPr wrap="none" lIns="0" tIns="0" rIns="0" bIns="0" rtlCol="0" anchor="ctr"/>
+          <a:lstStyle/>
+          <a:p>
+            <a:pPr algn="ctr" indent="0" marL="0">
+              <a:buNone/>
+            </a:pPr>
+            <a:r>
+              <a:rPr lang="ja-JP" altLang="en-US" sz="1050" dirty="0">
+                <a:solidFill>
+                  <a:srgbClr val="404040"/>
+                </a:solidFill>
+                <a:latin typeface="メイリオ" pitchFamily="34" charset="0"/>
+                <a:ea typeface="メイリオ" pitchFamily="34" charset="-122"/>
+                <a:cs typeface="メイリオ" pitchFamily="34" charset="-120"/>
+              </a:rPr>
+              <a:t>せん妄</a:t>
+            </a:r>
+            <a:endParaRPr lang="ja-JP" sz="1050" dirty="0"/>
+          </a:p>
+        </p:txBody>
+      </p:sp>
+      <p:sp>
+        <p:nvSpPr>
+          <p:cNvPr id="7" name="Text 5"/>
+          <p:cNvSpPr/>
+          <p:nvPr/>
+        </p:nvSpPr>
+        <p:spPr>
+          <a:xfrm>
+            <a:off x="10707624" y="54864"/>
+            <a:ext cx="621792" cy="585216"/>
+          </a:xfrm>
+          <a:prstGeom prst="roundRect">
+            <a:avLst>
+              <a:gd name="adj" fmla="val 7813"/>
+            </a:avLst>
+          </a:prstGeom>
+          <a:solidFill>
+            <a:srgbClr val="D9D9D9"/>
+          </a:solidFill>
+          <a:ln/>
+        </p:spPr>
+        <p:txBody>
+          <a:bodyPr wrap="none" lIns="0" tIns="0" rIns="0" bIns="0" rtlCol="0" anchor="ctr"/>
+          <a:lstStyle/>
+          <a:p>
+            <a:pPr algn="ctr" indent="0" marL="0">
+              <a:buNone/>
+            </a:pPr>
+            <a:r>
+              <a:rPr lang="ja-JP" altLang="en-US" sz="1050" dirty="0">
+                <a:solidFill>
+                  <a:srgbClr val="404040"/>
+                </a:solidFill>
+                <a:latin typeface="メイリオ" pitchFamily="34" charset="0"/>
+                <a:ea typeface="メイリオ" pitchFamily="34" charset="-122"/>
+                <a:cs typeface="メイリオ" pitchFamily="34" charset="-120"/>
+              </a:rPr>
+              <a:t>薬と</a:t>
+            </a:r>
+            <a:endParaRPr lang="ja-JP" sz="1050" dirty="0"/>
+          </a:p>
+          <a:p>
+            <a:pPr algn="ctr" indent="0" marL="0">
+              <a:buNone/>
+            </a:pPr>
+            <a:r>
+              <a:rPr lang="ja-JP" altLang="en-US" sz="1050" dirty="0">
+                <a:solidFill>
+                  <a:srgbClr val="404040"/>
+                </a:solidFill>
+                <a:latin typeface="メイリオ" pitchFamily="34" charset="0"/>
+                <a:ea typeface="メイリオ" pitchFamily="34" charset="-122"/>
+                <a:cs typeface="メイリオ" pitchFamily="34" charset="-120"/>
+              </a:rPr>
+              <a:t>麻酔</a:t>
+            </a:r>
+            <a:endParaRPr lang="ja-JP" sz="1050" dirty="0"/>
+          </a:p>
+        </p:txBody>
+      </p:sp>
+      <p:sp>
+        <p:nvSpPr>
+          <p:cNvPr id="8" name="Text 6"/>
+          <p:cNvSpPr/>
+          <p:nvPr/>
+        </p:nvSpPr>
+        <p:spPr>
+          <a:xfrm>
+            <a:off x="11384280" y="54864"/>
+            <a:ext cx="621792" cy="585216"/>
+          </a:xfrm>
+          <a:prstGeom prst="roundRect">
+            <a:avLst>
+              <a:gd name="adj" fmla="val 7813"/>
+            </a:avLst>
+          </a:prstGeom>
+          <a:solidFill>
+            <a:srgbClr val="00A8AA"/>
+          </a:solidFill>
+          <a:ln/>
+        </p:spPr>
+        <p:txBody>
+          <a:bodyPr wrap="none" lIns="0" tIns="0" rIns="0" bIns="0" rtlCol="0" anchor="ctr"/>
+          <a:lstStyle/>
+          <a:p>
+            <a:pPr algn="ctr" indent="0" marL="0">
+              <a:buNone/>
+            </a:pPr>
+            <a:r>
+              <a:rPr lang="ja-JP" altLang="en-US" sz="1050" b="1" dirty="0">
+                <a:solidFill>
+                  <a:srgbClr val="FFFFFF"/>
+                </a:solidFill>
+                <a:latin typeface="メイリオ" pitchFamily="34" charset="0"/>
+                <a:ea typeface="メイリオ" pitchFamily="34" charset="-122"/>
+                <a:cs typeface="メイリオ" pitchFamily="34" charset="-120"/>
+              </a:rPr>
+              <a:t>まとめ</a:t>
+            </a:r>
+            <a:endParaRPr lang="ja-JP" sz="1050" dirty="0"/>
+          </a:p>
+        </p:txBody>
+      </p:sp>
+      <p:sp>
+        <p:nvSpPr>
+          <p:cNvPr id="9" name="Text 7"/>
+          <p:cNvSpPr txBox="1"/>
+          <p:nvPr/>
+        </p:nvSpPr>
+        <p:spPr>
+          <a:xfrm>
+            <a:off x="11247120" y="6446520"/>
+            <a:ext cx="731520" cy="320040"/>
+          </a:xfrm>
+          <a:prstGeom prst="rect">
+            <a:avLst/>
+          </a:prstGeom>
+          <a:noFill/>
+          <a:ln/>
+        </p:spPr>
+        <p:txBody>
+          <a:bodyPr wrap="square" lIns="0" tIns="0" rIns="0" bIns="0" rtlCol="0" anchor="b"/>
+          <a:lstStyle/>
+          <a:p>
+            <a:pPr algn="r" indent="0" marL="0">
+              <a:buNone/>
+            </a:pPr>
+            <a:r>
+              <a:rPr lang="ja-JP" altLang="en-US" sz="1200" dirty="0">
+                <a:solidFill>
+                  <a:srgbClr val="7F7F7F"/>
+                </a:solidFill>
+                <a:latin typeface="メイリオ" pitchFamily="34" charset="0"/>
+                <a:ea typeface="メイリオ" pitchFamily="34" charset="-122"/>
+                <a:cs typeface="メイリオ" pitchFamily="34" charset="-120"/>
+              </a:rPr>
+              <a:t>9</a:t>
+            </a:r>
+            <a:endParaRPr lang="ja-JP" sz="1200" dirty="0"/>
+          </a:p>
+        </p:txBody>
+      </p:sp>
+      <p:sp>
+        <p:nvSpPr>
+          <p:cNvPr id="10" name="Text 8"/>
+          <p:cNvSpPr txBox="1"/>
+          <p:nvPr/>
+        </p:nvSpPr>
+        <p:spPr>
+          <a:xfrm>
+            <a:off x="502920" y="5943600"/>
+            <a:ext cx="10607040" cy="777240"/>
+          </a:xfrm>
+          <a:prstGeom prst="rect">
+            <a:avLst/>
+          </a:prstGeom>
+          <a:noFill/>
+          <a:ln/>
+        </p:spPr>
+        <p:txBody>
+          <a:bodyPr wrap="square" lIns="0" tIns="0" rIns="0" bIns="0" rtlCol="0" anchor="b"/>
+          <a:lstStyle/>
+          <a:p>
+            <a:pPr algn="l" indent="0" marL="0">
+              <a:buNone/>
+            </a:pPr>
+            <a:r>
+              <a:rPr lang="ja-JP" altLang="en-US" sz="1600" dirty="0">
+                <a:solidFill>
+                  <a:srgbClr val="595959"/>
+                </a:solidFill>
+                <a:latin typeface="メイリオ" pitchFamily="34" charset="0"/>
+                <a:ea typeface="メイリオ" pitchFamily="34" charset="-122"/>
+                <a:cs typeface="メイリオ" pitchFamily="34" charset="-120"/>
+              </a:rPr>
+              <a:t>Berger M, et al. Anesth Analg 2018;127:1406-1413 / American Geriatrics Society.</a:t>
+            </a:r>
+            <a:endParaRPr lang="ja-JP" sz="1600" dirty="0"/>
+          </a:p>
+          <a:p>
+            <a:pPr algn="l" indent="0" marL="0">
+              <a:buNone/>
+            </a:pPr>
+            <a:r>
+              <a:rPr lang="ja-JP" altLang="en-US" sz="1600" dirty="0">
+                <a:solidFill>
+                  <a:srgbClr val="595959"/>
+                </a:solidFill>
+                <a:latin typeface="メイリオ" pitchFamily="34" charset="0"/>
+                <a:ea typeface="メイリオ" pitchFamily="34" charset="-122"/>
+                <a:cs typeface="メイリオ" pitchFamily="34" charset="-120"/>
+              </a:rPr>
+              <a:t>J Am Geriatr Soc 2015;63:142-150 / Aldecoa C, et al. Eur J Anaesthesiol 2024;41:81-108</a:t>
+            </a:r>
+            <a:endParaRPr lang="ja-JP" sz="1600" dirty="0"/>
+          </a:p>
+        </p:txBody>
+      </p:sp>
+      <p:sp>
+        <p:nvSpPr>
+          <p:cNvPr id="11" name="Text 9"/>
+          <p:cNvSpPr txBox="1"/>
+          <p:nvPr/>
+        </p:nvSpPr>
+        <p:spPr>
+          <a:xfrm>
+            <a:off x="502920" y="1828800"/>
+            <a:ext cx="11155680" cy="4087368"/>
+          </a:xfrm>
+          <a:prstGeom prst="rect">
+            <a:avLst/>
+          </a:prstGeom>
+          <a:noFill/>
+          <a:ln/>
+        </p:spPr>
+        <p:txBody>
+          <a:bodyPr wrap="square" lIns="0" tIns="0" rIns="0" bIns="0" rtlCol="0" anchor="t"/>
+          <a:lstStyle/>
+          <a:p>
+            <a:pPr algn="l" marL="355600" indent="-355600">
+              <a:spcAft>
+                <a:spcPts val="3200"/>
+              </a:spcAft>
+              <a:buClr>
+                <a:srgbClr val="262626"/>
+              </a:buClr>
+              <a:buSzPct val="100000"/>
+              <a:buChar char="•"/>
+            </a:pPr>
+            <a:r>
+              <a:rPr lang="ja-JP" altLang="en-US" sz="2400" dirty="0">
+                <a:solidFill>
+                  <a:srgbClr val="262626"/>
+                </a:solidFill>
+                <a:latin typeface="メイリオ" pitchFamily="34" charset="0"/>
+                <a:ea typeface="メイリオ" pitchFamily="34" charset="-122"/>
+                <a:cs typeface="メイリオ" pitchFamily="34" charset="-120"/>
+              </a:rPr>
+              <a:t>年齢だけでなく </a:t>
+            </a:r>
+            <a:r>
+              <a:rPr lang="ja-JP" altLang="en-US" sz="2400" b="1" dirty="0">
+                <a:solidFill>
+                  <a:srgbClr val="0072B2"/>
+                </a:solidFill>
+                <a:latin typeface="メイリオ" pitchFamily="34" charset="0"/>
+                <a:ea typeface="メイリオ" pitchFamily="34" charset="-122"/>
+                <a:cs typeface="メイリオ" pitchFamily="34" charset="-120"/>
+              </a:rPr>
+              <a:t>CFS を病前で</a:t>
+            </a:r>
+            <a:r>
+              <a:rPr lang="ja-JP" altLang="en-US" sz="2400" dirty="0">
+                <a:solidFill>
+                  <a:srgbClr val="262626"/>
+                </a:solidFill>
+                <a:latin typeface="メイリオ" pitchFamily="34" charset="0"/>
+                <a:ea typeface="メイリオ" pitchFamily="34" charset="-122"/>
+                <a:cs typeface="メイリオ" pitchFamily="34" charset="-120"/>
+              </a:rPr>
+              <a:t>。4 以上は注意、5 以上はフレイル</a:t>
+            </a:r>
+            <a:endParaRPr lang="ja-JP" sz="2400" dirty="0"/>
+          </a:p>
+          <a:p>
+            <a:pPr algn="l" marL="355600" indent="-355600">
+              <a:spcAft>
+                <a:spcPts val="3200"/>
+              </a:spcAft>
+              <a:buClr>
+                <a:srgbClr val="262626"/>
+              </a:buClr>
+              <a:buSzPct val="100000"/>
+              <a:buChar char="•"/>
+            </a:pPr>
+            <a:r>
+              <a:rPr lang="ja-JP" altLang="en-US" sz="2400" dirty="0">
+                <a:solidFill>
+                  <a:srgbClr val="262626"/>
+                </a:solidFill>
+                <a:latin typeface="メイリオ" pitchFamily="34" charset="0"/>
+                <a:ea typeface="メイリオ" pitchFamily="34" charset="-122"/>
+                <a:cs typeface="メイリオ" pitchFamily="34" charset="-120"/>
+              </a:rPr>
+              <a:t>65 歳超は</a:t>
+            </a:r>
+            <a:r>
+              <a:rPr lang="ja-JP" altLang="en-US" sz="2400" b="1" dirty="0">
+                <a:solidFill>
+                  <a:srgbClr val="0072B2"/>
+                </a:solidFill>
+                <a:latin typeface="メイリオ" pitchFamily="34" charset="0"/>
+                <a:ea typeface="メイリオ" pitchFamily="34" charset="-122"/>
+                <a:cs typeface="メイリオ" pitchFamily="34" charset="-120"/>
+              </a:rPr>
+              <a:t>全員 Mini-Cog</a:t>
+            </a:r>
+            <a:r>
+              <a:rPr lang="ja-JP" altLang="en-US" sz="2400" dirty="0">
+                <a:solidFill>
+                  <a:srgbClr val="262626"/>
+                </a:solidFill>
+                <a:latin typeface="メイリオ" pitchFamily="34" charset="0"/>
+                <a:ea typeface="メイリオ" pitchFamily="34" charset="-122"/>
+                <a:cs typeface="メイリオ" pitchFamily="34" charset="-120"/>
+              </a:rPr>
+              <a:t>。陽性なら家族に説明し能力を確かめる</a:t>
+            </a:r>
+            <a:endParaRPr lang="ja-JP" sz="2400" dirty="0"/>
+          </a:p>
+          <a:p>
+            <a:pPr algn="l" marL="355600" indent="-355600">
+              <a:spcAft>
+                <a:spcPts val="3200"/>
+              </a:spcAft>
+              <a:buClr>
+                <a:srgbClr val="262626"/>
+              </a:buClr>
+              <a:buSzPct val="100000"/>
+              <a:buChar char="•"/>
+            </a:pPr>
+            <a:r>
+              <a:rPr lang="ja-JP" altLang="en-US" sz="2400" dirty="0">
+                <a:solidFill>
+                  <a:srgbClr val="262626"/>
+                </a:solidFill>
+                <a:latin typeface="メイリオ" pitchFamily="34" charset="0"/>
+                <a:ea typeface="メイリオ" pitchFamily="34" charset="-122"/>
+                <a:cs typeface="メイリオ" pitchFamily="34" charset="-120"/>
+              </a:rPr>
+              <a:t>せん妄は大手術で 20〜40%、半数以上を見逃す。</a:t>
+            </a:r>
+            <a:r>
+              <a:rPr lang="ja-JP" altLang="en-US" sz="2400" b="1" dirty="0">
+                <a:solidFill>
+                  <a:srgbClr val="0072B2"/>
+                </a:solidFill>
+                <a:latin typeface="メイリオ" pitchFamily="34" charset="0"/>
+                <a:ea typeface="メイリオ" pitchFamily="34" charset="-122"/>
+                <a:cs typeface="メイリオ" pitchFamily="34" charset="-120"/>
+              </a:rPr>
+              <a:t>多因子介入で予防</a:t>
+            </a:r>
+            <a:endParaRPr lang="ja-JP" sz="2400" dirty="0"/>
+          </a:p>
+          <a:p>
+            <a:pPr algn="l" marL="355600" indent="-355600">
+              <a:spcAft>
+                <a:spcPts val="3200"/>
+              </a:spcAft>
+              <a:buClr>
+                <a:srgbClr val="262626"/>
+              </a:buClr>
+              <a:buSzPct val="100000"/>
+              <a:buChar char="•"/>
+            </a:pPr>
+            <a:r>
+              <a:rPr lang="ja-JP" altLang="en-US" sz="2400" dirty="0">
+                <a:solidFill>
+                  <a:srgbClr val="262626"/>
+                </a:solidFill>
+                <a:latin typeface="メイリオ" pitchFamily="34" charset="0"/>
+                <a:ea typeface="メイリオ" pitchFamily="34" charset="-122"/>
+                <a:cs typeface="メイリオ" pitchFamily="34" charset="-120"/>
+              </a:rPr>
+              <a:t>薬で</a:t>
+            </a:r>
+            <a:r>
+              <a:rPr lang="ja-JP" altLang="en-US" sz="2400" b="1" u="sng" dirty="0">
+                <a:solidFill>
+                  <a:srgbClr val="C00000"/>
+                </a:solidFill>
+                <a:latin typeface="メイリオ" pitchFamily="34" charset="0"/>
+                <a:ea typeface="メイリオ" pitchFamily="34" charset="-122"/>
+                <a:cs typeface="メイリオ" pitchFamily="34" charset="-120"/>
+              </a:rPr>
+              <a:t>予防しない</a:t>
+            </a:r>
+            <a:r>
+              <a:rPr lang="ja-JP" altLang="en-US" sz="2400" dirty="0">
+                <a:solidFill>
+                  <a:srgbClr val="262626"/>
+                </a:solidFill>
+                <a:latin typeface="メイリオ" pitchFamily="34" charset="0"/>
+                <a:ea typeface="メイリオ" pitchFamily="34" charset="-122"/>
+                <a:cs typeface="メイリオ" pitchFamily="34" charset="-120"/>
+              </a:rPr>
+              <a:t>。ベンゾジアゼピン・抗コリン薬・ペチジンを避ける</a:t>
+            </a:r>
+            <a:endParaRPr lang="ja-JP" sz="2400" dirty="0"/>
+          </a:p>
+          <a:p>
+            <a:pPr algn="l" marL="355600" indent="-355600">
+              <a:spcAft>
+                <a:spcPts val="3200"/>
+              </a:spcAft>
+              <a:buClr>
+                <a:srgbClr val="262626"/>
+              </a:buClr>
+              <a:buSzPct val="100000"/>
+              <a:buChar char="•"/>
+            </a:pPr>
+            <a:r>
+              <a:rPr lang="ja-JP" altLang="en-US" sz="2400" dirty="0">
+                <a:solidFill>
+                  <a:srgbClr val="262626"/>
+                </a:solidFill>
+                <a:latin typeface="メイリオ" pitchFamily="34" charset="0"/>
+                <a:ea typeface="メイリオ" pitchFamily="34" charset="-122"/>
+                <a:cs typeface="メイリオ" pitchFamily="34" charset="-120"/>
+              </a:rPr>
+              <a:t>MAC は </a:t>
+            </a:r>
+            <a:r>
+              <a:rPr lang="ja-JP" altLang="en-US" sz="2400" b="1" dirty="0">
+                <a:solidFill>
+                  <a:srgbClr val="0072B2"/>
+                </a:solidFill>
+                <a:latin typeface="メイリオ" pitchFamily="34" charset="0"/>
+                <a:ea typeface="メイリオ" pitchFamily="34" charset="-122"/>
+                <a:cs typeface="メイリオ" pitchFamily="34" charset="-120"/>
+              </a:rPr>
+              <a:t>10 歳で 6% 低下</a:t>
+            </a:r>
+            <a:r>
+              <a:rPr lang="ja-JP" altLang="en-US" sz="2400" dirty="0">
+                <a:solidFill>
+                  <a:srgbClr val="262626"/>
+                </a:solidFill>
+                <a:latin typeface="メイリオ" pitchFamily="34" charset="0"/>
+                <a:ea typeface="メイリオ" pitchFamily="34" charset="-122"/>
+                <a:cs typeface="メイリオ" pitchFamily="34" charset="-120"/>
+              </a:rPr>
+              <a:t>。相対的低血圧を避け、鎮静の少ない鎮痛</a:t>
+            </a:r>
+            <a:endParaRPr lang="ja-JP" sz="2400" dirty="0"/>
+          </a:p>
+        </p:txBody>
+      </p:sp>
+    </p:spTree>
+  </p:cSld>
+  <p:clrMapOvr>
+    <a:masterClrMapping/>
+  </p:clrMapOvr>
+</p:sld>
+</file>
+
 <file path=ppt/slides/slide2.xml><?xml version="1.0" encoding="utf-8"?>
 <p:sld xmlns:a="http://schemas.openxmlformats.org/drawingml/2006/main" xmlns:r="http://schemas.openxmlformats.org/officeDocument/2006/relationships" xmlns:p="http://schemas.openxmlformats.org/presentationml/2006/main">
   <p:cSld name="Slide 2">
@@ -2473,6 +3330,9 @@
               <a:spcAft>
                 <a:spcPts val="1000"/>
               </a:spcAft>
+              <a:buClr>
+                <a:srgbClr val="262626"/>
+              </a:buClr>
               <a:buSzPct val="100000"/>
               <a:buChar char="•"/>
             </a:pPr>
@@ -2516,6 +3376,9 @@
               <a:spcAft>
                 <a:spcPts val="1000"/>
               </a:spcAft>
+              <a:buClr>
+                <a:srgbClr val="262626"/>
+              </a:buClr>
               <a:buSzPct val="100000"/>
               <a:buChar char="•"/>
             </a:pPr>
@@ -2559,6 +3422,9 @@
               <a:spcAft>
                 <a:spcPts val="1000"/>
               </a:spcAft>
+              <a:buClr>
+                <a:srgbClr val="262626"/>
+              </a:buClr>
               <a:buSzPct val="100000"/>
               <a:buChar char="•"/>
             </a:pPr>
@@ -2602,6 +3468,9 @@
               <a:spcAft>
                 <a:spcPts val="1000"/>
               </a:spcAft>
+              <a:buClr>
+                <a:srgbClr val="262626"/>
+              </a:buClr>
               <a:buSzPct val="100000"/>
               <a:buChar char="•"/>
             </a:pPr>
@@ -2645,6 +3514,9 @@
               <a:spcAft>
                 <a:spcPts val="1000"/>
               </a:spcAft>
+              <a:buClr>
+                <a:srgbClr val="262626"/>
+              </a:buClr>
               <a:buSzPct val="100000"/>
               <a:buChar char="•"/>
             </a:pPr>
@@ -3210,7 +4082,7 @@
                 <a:ea typeface="メイリオ" pitchFamily="34" charset="-122"/>
                 <a:cs typeface="メイリオ" pitchFamily="34" charset="-120"/>
               </a:rPr>
-              <a:t>Rockwood K, Theou O. Can Geriatr J 2020;23:210-215/Satake S, Arai H. Geriatr Gerontol Int</a:t>
+              <a:t>Rockwood K, Theou O. Can Geriatr J 2020;23:210-215 / Satake S, Arai H.</a:t>
             </a:r>
             <a:endParaRPr lang="ja-JP" sz="1600" dirty="0"/>
           </a:p>
@@ -3227,7 +4099,7 @@
                 <a:ea typeface="メイリオ" pitchFamily="34" charset="-122"/>
                 <a:cs typeface="メイリオ" pitchFamily="34" charset="-120"/>
               </a:rPr>
-              <a:t>2020;20:992-993（改訂 J-CHS 基準）/Chow WB, et al. J Am Coll Surg 2012;215:453-466</a:t>
+              <a:t>Geriatr Gerontol Int 2020;20:992-993 / Chow WB, et al. J Am Coll Surg 2012;215:453-466</a:t>
             </a:r>
             <a:endParaRPr lang="ja-JP" sz="1600" dirty="0"/>
           </a:p>
@@ -3332,8 +4204,8 @@
         </p:nvSpPr>
         <p:spPr>
           <a:xfrm>
-            <a:off x="566928" y="1719072"/>
-            <a:ext cx="5353812" cy="420624"/>
+            <a:off x="685800" y="1792224"/>
+            <a:ext cx="5253228" cy="420624"/>
           </a:xfrm>
           <a:prstGeom prst="rect">
             <a:avLst/>
@@ -3371,14 +4243,14 @@
         </p:nvSpPr>
         <p:spPr>
           <a:xfrm>
-            <a:off x="594360" y="2258568"/>
+            <a:off x="685800" y="2319833"/>
             <a:ext cx="91440" cy="91440"/>
           </a:xfrm>
           <a:prstGeom prst="ellipse">
             <a:avLst/>
           </a:prstGeom>
           <a:solidFill>
-            <a:srgbClr val="0072B2"/>
+            <a:srgbClr val="262626"/>
           </a:solidFill>
           <a:ln/>
         </p:spPr>
@@ -3391,8 +4263,8 @@
         </p:nvSpPr>
         <p:spPr>
           <a:xfrm>
-            <a:off x="749808" y="2121408"/>
-            <a:ext cx="5170932" cy="374904"/>
+            <a:off x="832104" y="2182673"/>
+            <a:ext cx="5106924" cy="374904"/>
           </a:xfrm>
           <a:prstGeom prst="rect">
             <a:avLst/>
@@ -3452,14 +4324,14 @@
         </p:nvSpPr>
         <p:spPr>
           <a:xfrm>
-            <a:off x="594360" y="2891333"/>
+            <a:off x="685800" y="2697480"/>
             <a:ext cx="91440" cy="91440"/>
           </a:xfrm>
           <a:prstGeom prst="ellipse">
             <a:avLst/>
           </a:prstGeom>
           <a:solidFill>
-            <a:srgbClr val="0072B2"/>
+            <a:srgbClr val="262626"/>
           </a:solidFill>
           <a:ln/>
         </p:spPr>
@@ -3472,8 +4344,8 @@
         </p:nvSpPr>
         <p:spPr>
           <a:xfrm>
-            <a:off x="749808" y="2754173"/>
-            <a:ext cx="5170932" cy="374904"/>
+            <a:off x="832104" y="2560320"/>
+            <a:ext cx="5106924" cy="374904"/>
           </a:xfrm>
           <a:prstGeom prst="rect">
             <a:avLst/>
@@ -3511,8 +4383,8 @@
         </p:nvSpPr>
         <p:spPr>
           <a:xfrm>
-            <a:off x="749808" y="3088843"/>
-            <a:ext cx="5170932" cy="374904"/>
+            <a:off x="832104" y="2867558"/>
+            <a:ext cx="5106924" cy="374904"/>
           </a:xfrm>
           <a:prstGeom prst="rect">
             <a:avLst/>
@@ -3550,14 +4422,14 @@
         </p:nvSpPr>
         <p:spPr>
           <a:xfrm>
-            <a:off x="594360" y="3858768"/>
+            <a:off x="685800" y="3382366"/>
             <a:ext cx="91440" cy="91440"/>
           </a:xfrm>
           <a:prstGeom prst="ellipse">
             <a:avLst/>
           </a:prstGeom>
           <a:solidFill>
-            <a:srgbClr val="0072B2"/>
+            <a:srgbClr val="262626"/>
           </a:solidFill>
           <a:ln/>
         </p:spPr>
@@ -3570,8 +4442,8 @@
         </p:nvSpPr>
         <p:spPr>
           <a:xfrm>
-            <a:off x="749808" y="3721608"/>
-            <a:ext cx="5170932" cy="374904"/>
+            <a:off x="832104" y="3245206"/>
+            <a:ext cx="5106924" cy="374904"/>
           </a:xfrm>
           <a:prstGeom prst="rect">
             <a:avLst/>
@@ -3620,14 +4492,14 @@
         </p:nvSpPr>
         <p:spPr>
           <a:xfrm>
-            <a:off x="594360" y="4491533"/>
+            <a:off x="685800" y="3760013"/>
             <a:ext cx="91440" cy="91440"/>
           </a:xfrm>
           <a:prstGeom prst="ellipse">
             <a:avLst/>
           </a:prstGeom>
           <a:solidFill>
-            <a:srgbClr val="0072B2"/>
+            <a:srgbClr val="262626"/>
           </a:solidFill>
           <a:ln/>
         </p:spPr>
@@ -3640,8 +4512,8 @@
         </p:nvSpPr>
         <p:spPr>
           <a:xfrm>
-            <a:off x="749808" y="4354373"/>
-            <a:ext cx="5170932" cy="374904"/>
+            <a:off x="832104" y="3622853"/>
+            <a:ext cx="5106924" cy="374904"/>
           </a:xfrm>
           <a:prstGeom prst="rect">
             <a:avLst/>
@@ -3679,8 +4551,8 @@
         </p:nvSpPr>
         <p:spPr>
           <a:xfrm>
-            <a:off x="749808" y="4689043"/>
-            <a:ext cx="5170932" cy="374904"/>
+            <a:off x="832104" y="3930091"/>
+            <a:ext cx="5106924" cy="374904"/>
           </a:xfrm>
           <a:prstGeom prst="rect">
             <a:avLst/>
@@ -3740,8 +4612,8 @@
         </p:nvSpPr>
         <p:spPr>
           <a:xfrm>
-            <a:off x="6268212" y="1719072"/>
-            <a:ext cx="5353812" cy="420624"/>
+            <a:off x="6387084" y="1792224"/>
+            <a:ext cx="5253228" cy="420624"/>
           </a:xfrm>
           <a:prstGeom prst="rect">
             <a:avLst/>
@@ -3759,7 +4631,7 @@
             <a:r>
               <a:rPr lang="ja-JP" altLang="en-US" sz="2400" b="1" dirty="0">
                 <a:solidFill>
-                  <a:srgbClr val="D55E00"/>
+                  <a:srgbClr val="0072B2"/>
                 </a:solidFill>
                 <a:latin typeface="メイリオ" pitchFamily="34" charset="0"/>
                 <a:ea typeface="メイリオ" pitchFamily="34" charset="-122"/>
@@ -3779,14 +4651,14 @@
         </p:nvSpPr>
         <p:spPr>
           <a:xfrm>
-            <a:off x="6295644" y="2258568"/>
+            <a:off x="6387084" y="2319833"/>
             <a:ext cx="91440" cy="91440"/>
           </a:xfrm>
           <a:prstGeom prst="ellipse">
             <a:avLst/>
           </a:prstGeom>
           <a:solidFill>
-            <a:srgbClr val="D55E00"/>
+            <a:srgbClr val="262626"/>
           </a:solidFill>
           <a:ln/>
         </p:spPr>
@@ -3799,8 +4671,8 @@
         </p:nvSpPr>
         <p:spPr>
           <a:xfrm>
-            <a:off x="6451092" y="2121408"/>
-            <a:ext cx="5170932" cy="374904"/>
+            <a:off x="6533388" y="2182673"/>
+            <a:ext cx="5106924" cy="374904"/>
           </a:xfrm>
           <a:prstGeom prst="rect">
             <a:avLst/>
@@ -3838,14 +4710,14 @@
         </p:nvSpPr>
         <p:spPr>
           <a:xfrm>
-            <a:off x="6295644" y="2649017"/>
+            <a:off x="6387084" y="2697480"/>
             <a:ext cx="91440" cy="91440"/>
           </a:xfrm>
           <a:prstGeom prst="ellipse">
             <a:avLst/>
           </a:prstGeom>
           <a:solidFill>
-            <a:srgbClr val="D55E00"/>
+            <a:srgbClr val="262626"/>
           </a:solidFill>
           <a:ln/>
         </p:spPr>
@@ -3858,8 +4730,8 @@
         </p:nvSpPr>
         <p:spPr>
           <a:xfrm>
-            <a:off x="6451092" y="2511857"/>
-            <a:ext cx="5170932" cy="374904"/>
+            <a:off x="6533388" y="2560320"/>
+            <a:ext cx="5106924" cy="374904"/>
           </a:xfrm>
           <a:prstGeom prst="rect">
             <a:avLst/>
@@ -3897,14 +4769,14 @@
         </p:nvSpPr>
         <p:spPr>
           <a:xfrm>
-            <a:off x="6295644" y="3038551"/>
+            <a:off x="6387084" y="3075127"/>
             <a:ext cx="91440" cy="91440"/>
           </a:xfrm>
           <a:prstGeom prst="ellipse">
             <a:avLst/>
           </a:prstGeom>
           <a:solidFill>
-            <a:srgbClr val="D55E00"/>
+            <a:srgbClr val="262626"/>
           </a:solidFill>
           <a:ln/>
         </p:spPr>
@@ -3917,8 +4789,8 @@
         </p:nvSpPr>
         <p:spPr>
           <a:xfrm>
-            <a:off x="6451092" y="2901391"/>
-            <a:ext cx="5170932" cy="374904"/>
+            <a:off x="6533388" y="2937967"/>
+            <a:ext cx="5106924" cy="374904"/>
           </a:xfrm>
           <a:prstGeom prst="rect">
             <a:avLst/>
@@ -3956,8 +4828,8 @@
         </p:nvSpPr>
         <p:spPr>
           <a:xfrm>
-            <a:off x="6451092" y="3236976"/>
-            <a:ext cx="5170932" cy="374904"/>
+            <a:off x="6396228" y="3245206"/>
+            <a:ext cx="5244084" cy="374904"/>
           </a:xfrm>
           <a:prstGeom prst="rect">
             <a:avLst/>
@@ -4017,14 +4889,14 @@
         </p:nvSpPr>
         <p:spPr>
           <a:xfrm>
-            <a:off x="6295644" y="3764585"/>
+            <a:off x="6387084" y="3760013"/>
             <a:ext cx="91440" cy="91440"/>
           </a:xfrm>
           <a:prstGeom prst="ellipse">
             <a:avLst/>
           </a:prstGeom>
           <a:solidFill>
-            <a:srgbClr val="D55E00"/>
+            <a:srgbClr val="262626"/>
           </a:solidFill>
           <a:ln/>
         </p:spPr>
@@ -4037,8 +4909,8 @@
         </p:nvSpPr>
         <p:spPr>
           <a:xfrm>
-            <a:off x="6451092" y="3627425"/>
-            <a:ext cx="5170932" cy="374904"/>
+            <a:off x="6533388" y="3622853"/>
+            <a:ext cx="5106924" cy="374904"/>
           </a:xfrm>
           <a:prstGeom prst="rect">
             <a:avLst/>
@@ -4076,14 +4948,14 @@
         </p:nvSpPr>
         <p:spPr>
           <a:xfrm>
-            <a:off x="6295644" y="4154119"/>
+            <a:off x="6387084" y="4137660"/>
             <a:ext cx="91440" cy="91440"/>
           </a:xfrm>
           <a:prstGeom prst="ellipse">
             <a:avLst/>
           </a:prstGeom>
           <a:solidFill>
-            <a:srgbClr val="D55E00"/>
+            <a:srgbClr val="262626"/>
           </a:solidFill>
           <a:ln/>
         </p:spPr>
@@ -4096,8 +4968,8 @@
         </p:nvSpPr>
         <p:spPr>
           <a:xfrm>
-            <a:off x="6451092" y="4016959"/>
-            <a:ext cx="5170932" cy="374904"/>
+            <a:off x="6533388" y="4000500"/>
+            <a:ext cx="5106924" cy="374904"/>
           </a:xfrm>
           <a:prstGeom prst="rect">
             <a:avLst/>
@@ -4135,8 +5007,8 @@
         </p:nvSpPr>
         <p:spPr>
           <a:xfrm>
-            <a:off x="6451092" y="4352544"/>
-            <a:ext cx="5170932" cy="374904"/>
+            <a:off x="6533388" y="4307738"/>
+            <a:ext cx="5106924" cy="374904"/>
           </a:xfrm>
           <a:prstGeom prst="rect">
             <a:avLst/>
@@ -4174,8 +5046,8 @@
         </p:nvSpPr>
         <p:spPr>
           <a:xfrm>
-            <a:off x="6451092" y="4688129"/>
-            <a:ext cx="5170932" cy="374904"/>
+            <a:off x="6533388" y="4614977"/>
+            <a:ext cx="5106924" cy="374904"/>
           </a:xfrm>
           <a:prstGeom prst="rect">
             <a:avLst/>
@@ -4723,7 +5595,7 @@
         <p:spPr>
           <a:xfrm>
             <a:off x="502920" y="1664208"/>
-            <a:ext cx="5551322" cy="3474720"/>
+            <a:ext cx="5481828" cy="3474720"/>
           </a:xfrm>
           <a:prstGeom prst="roundRect">
             <a:avLst>
@@ -4744,8 +5616,8 @@
         </p:nvSpPr>
         <p:spPr>
           <a:xfrm>
-            <a:off x="566928" y="1719072"/>
-            <a:ext cx="5423306" cy="420624"/>
+            <a:off x="685800" y="1792224"/>
+            <a:ext cx="5253228" cy="420624"/>
           </a:xfrm>
           <a:prstGeom prst="rect">
             <a:avLst/>
@@ -4783,14 +5655,14 @@
         </p:nvSpPr>
         <p:spPr>
           <a:xfrm>
-            <a:off x="594360" y="2258568"/>
+            <a:off x="685800" y="2319833"/>
             <a:ext cx="91440" cy="91440"/>
           </a:xfrm>
           <a:prstGeom prst="ellipse">
             <a:avLst/>
           </a:prstGeom>
           <a:solidFill>
-            <a:srgbClr val="0072B2"/>
+            <a:srgbClr val="262626"/>
           </a:solidFill>
           <a:ln/>
         </p:spPr>
@@ -4803,8 +5675,8 @@
         </p:nvSpPr>
         <p:spPr>
           <a:xfrm>
-            <a:off x="749808" y="2121408"/>
-            <a:ext cx="5240426" cy="374904"/>
+            <a:off x="832104" y="2182673"/>
+            <a:ext cx="5106924" cy="374904"/>
           </a:xfrm>
           <a:prstGeom prst="rect">
             <a:avLst/>
@@ -4842,8 +5714,8 @@
         </p:nvSpPr>
         <p:spPr>
           <a:xfrm>
-            <a:off x="749808" y="2456993"/>
-            <a:ext cx="5240426" cy="374904"/>
+            <a:off x="832104" y="2489911"/>
+            <a:ext cx="5106924" cy="374904"/>
           </a:xfrm>
           <a:prstGeom prst="rect">
             <a:avLst/>
@@ -4881,8 +5753,8 @@
         </p:nvSpPr>
         <p:spPr>
           <a:xfrm>
-            <a:off x="749808" y="2791663"/>
-            <a:ext cx="5240426" cy="374904"/>
+            <a:off x="694944" y="2797150"/>
+            <a:ext cx="5244084" cy="374904"/>
           </a:xfrm>
           <a:prstGeom prst="rect">
             <a:avLst/>
@@ -4920,14 +5792,14 @@
         </p:nvSpPr>
         <p:spPr>
           <a:xfrm>
-            <a:off x="594360" y="3338474"/>
+            <a:off x="685800" y="3311957"/>
             <a:ext cx="91440" cy="91440"/>
           </a:xfrm>
           <a:prstGeom prst="ellipse">
             <a:avLst/>
           </a:prstGeom>
           <a:solidFill>
-            <a:srgbClr val="0072B2"/>
+            <a:srgbClr val="262626"/>
           </a:solidFill>
           <a:ln/>
         </p:spPr>
@@ -4940,8 +5812,8 @@
         </p:nvSpPr>
         <p:spPr>
           <a:xfrm>
-            <a:off x="749808" y="3201314"/>
-            <a:ext cx="5240426" cy="374904"/>
+            <a:off x="832104" y="3174797"/>
+            <a:ext cx="5106924" cy="374904"/>
           </a:xfrm>
           <a:prstGeom prst="rect">
             <a:avLst/>
@@ -4990,8 +5862,8 @@
         </p:nvSpPr>
         <p:spPr>
           <a:xfrm>
-            <a:off x="749808" y="3536899"/>
-            <a:ext cx="5240426" cy="374904"/>
+            <a:off x="832104" y="3482035"/>
+            <a:ext cx="5106924" cy="374904"/>
           </a:xfrm>
           <a:prstGeom prst="rect">
             <a:avLst/>
@@ -5040,14 +5912,14 @@
         </p:nvSpPr>
         <p:spPr>
           <a:xfrm>
-            <a:off x="594360" y="4082796"/>
+            <a:off x="685800" y="3996842"/>
             <a:ext cx="91440" cy="91440"/>
           </a:xfrm>
           <a:prstGeom prst="ellipse">
             <a:avLst/>
           </a:prstGeom>
           <a:solidFill>
-            <a:srgbClr val="0072B2"/>
+            <a:srgbClr val="262626"/>
           </a:solidFill>
           <a:ln/>
         </p:spPr>
@@ -5060,8 +5932,8 @@
         </p:nvSpPr>
         <p:spPr>
           <a:xfrm>
-            <a:off x="749808" y="3945636"/>
-            <a:ext cx="5240426" cy="374904"/>
+            <a:off x="832104" y="3859682"/>
+            <a:ext cx="5106924" cy="374904"/>
           </a:xfrm>
           <a:prstGeom prst="rect">
             <a:avLst/>
@@ -5099,8 +5971,8 @@
         </p:nvSpPr>
         <p:spPr>
           <a:xfrm>
-            <a:off x="749808" y="4281221"/>
-            <a:ext cx="5240426" cy="374904"/>
+            <a:off x="832104" y="4166921"/>
+            <a:ext cx="5106924" cy="374904"/>
           </a:xfrm>
           <a:prstGeom prst="rect">
             <a:avLst/>
@@ -5138,14 +6010,14 @@
         </p:nvSpPr>
         <p:spPr>
           <a:xfrm>
-            <a:off x="594360" y="4828032"/>
+            <a:off x="685800" y="4681728"/>
             <a:ext cx="91440" cy="91440"/>
           </a:xfrm>
           <a:prstGeom prst="ellipse">
             <a:avLst/>
           </a:prstGeom>
           <a:solidFill>
-            <a:srgbClr val="0072B2"/>
+            <a:srgbClr val="262626"/>
           </a:solidFill>
           <a:ln/>
         </p:spPr>
@@ -5158,8 +6030,8 @@
         </p:nvSpPr>
         <p:spPr>
           <a:xfrm>
-            <a:off x="749808" y="4690872"/>
-            <a:ext cx="5240426" cy="374904"/>
+            <a:off x="832104" y="4544568"/>
+            <a:ext cx="5106924" cy="374904"/>
           </a:xfrm>
           <a:prstGeom prst="rect">
             <a:avLst/>
@@ -5197,8 +6069,8 @@
         </p:nvSpPr>
         <p:spPr>
           <a:xfrm>
-            <a:off x="6273698" y="1664208"/>
-            <a:ext cx="5412334" cy="3474720"/>
+            <a:off x="6204204" y="1664208"/>
+            <a:ext cx="5481828" cy="3474720"/>
           </a:xfrm>
           <a:prstGeom prst="roundRect">
             <a:avLst>
@@ -5219,8 +6091,8 @@
         </p:nvSpPr>
         <p:spPr>
           <a:xfrm>
-            <a:off x="6337706" y="1719072"/>
-            <a:ext cx="5284318" cy="420624"/>
+            <a:off x="6387084" y="1792224"/>
+            <a:ext cx="5253228" cy="420624"/>
           </a:xfrm>
           <a:prstGeom prst="rect">
             <a:avLst/>
@@ -5238,7 +6110,7 @@
             <a:r>
               <a:rPr lang="ja-JP" altLang="en-US" sz="2400" b="1" dirty="0">
                 <a:solidFill>
-                  <a:srgbClr val="D55E00"/>
+                  <a:srgbClr val="0072B2"/>
                 </a:solidFill>
                 <a:latin typeface="メイリオ" pitchFamily="34" charset="0"/>
                 <a:ea typeface="メイリオ" pitchFamily="34" charset="-122"/>
@@ -5258,14 +6130,14 @@
         </p:nvSpPr>
         <p:spPr>
           <a:xfrm>
-            <a:off x="6365138" y="2258568"/>
+            <a:off x="6387084" y="2319833"/>
             <a:ext cx="91440" cy="91440"/>
           </a:xfrm>
           <a:prstGeom prst="ellipse">
             <a:avLst/>
           </a:prstGeom>
           <a:solidFill>
-            <a:srgbClr val="D55E00"/>
+            <a:srgbClr val="262626"/>
           </a:solidFill>
           <a:ln/>
         </p:spPr>
@@ -5278,8 +6150,8 @@
         </p:nvSpPr>
         <p:spPr>
           <a:xfrm>
-            <a:off x="6520586" y="2121408"/>
-            <a:ext cx="5101438" cy="374904"/>
+            <a:off x="6533388" y="2182673"/>
+            <a:ext cx="5106924" cy="374904"/>
           </a:xfrm>
           <a:prstGeom prst="rect">
             <a:avLst/>
@@ -5328,14 +6200,14 @@
         </p:nvSpPr>
         <p:spPr>
           <a:xfrm>
-            <a:off x="6365138" y="2649017"/>
+            <a:off x="6387084" y="2697480"/>
             <a:ext cx="91440" cy="91440"/>
           </a:xfrm>
           <a:prstGeom prst="ellipse">
             <a:avLst/>
           </a:prstGeom>
           <a:solidFill>
-            <a:srgbClr val="D55E00"/>
+            <a:srgbClr val="262626"/>
           </a:solidFill>
           <a:ln/>
         </p:spPr>
@@ -5348,8 +6220,8 @@
         </p:nvSpPr>
         <p:spPr>
           <a:xfrm>
-            <a:off x="6520586" y="2511857"/>
-            <a:ext cx="5101438" cy="374904"/>
+            <a:off x="6533388" y="2560320"/>
+            <a:ext cx="5106924" cy="374904"/>
           </a:xfrm>
           <a:prstGeom prst="rect">
             <a:avLst/>
@@ -5387,8 +6259,8 @@
         </p:nvSpPr>
         <p:spPr>
           <a:xfrm>
-            <a:off x="6520586" y="2846527"/>
-            <a:ext cx="5101438" cy="374904"/>
+            <a:off x="6533388" y="2867558"/>
+            <a:ext cx="5106924" cy="374904"/>
           </a:xfrm>
           <a:prstGeom prst="rect">
             <a:avLst/>
@@ -5426,14 +6298,14 @@
         </p:nvSpPr>
         <p:spPr>
           <a:xfrm>
-            <a:off x="6365138" y="3374136"/>
+            <a:off x="6387084" y="3382366"/>
             <a:ext cx="91440" cy="91440"/>
           </a:xfrm>
           <a:prstGeom prst="ellipse">
             <a:avLst/>
           </a:prstGeom>
           <a:solidFill>
-            <a:srgbClr val="D55E00"/>
+            <a:srgbClr val="262626"/>
           </a:solidFill>
           <a:ln/>
         </p:spPr>
@@ -5446,8 +6318,8 @@
         </p:nvSpPr>
         <p:spPr>
           <a:xfrm>
-            <a:off x="6520586" y="3236976"/>
-            <a:ext cx="5101438" cy="374904"/>
+            <a:off x="6533388" y="3245206"/>
+            <a:ext cx="5106924" cy="374904"/>
           </a:xfrm>
           <a:prstGeom prst="rect">
             <a:avLst/>
@@ -5485,8 +6357,8 @@
         </p:nvSpPr>
         <p:spPr>
           <a:xfrm>
-            <a:off x="6520586" y="3572561"/>
-            <a:ext cx="5101438" cy="374904"/>
+            <a:off x="6533388" y="3552444"/>
+            <a:ext cx="5106924" cy="374904"/>
           </a:xfrm>
           <a:prstGeom prst="rect">
             <a:avLst/>
@@ -5524,14 +6396,14 @@
         </p:nvSpPr>
         <p:spPr>
           <a:xfrm>
-            <a:off x="6365138" y="4099255"/>
+            <a:off x="6387084" y="4067251"/>
             <a:ext cx="91440" cy="91440"/>
           </a:xfrm>
           <a:prstGeom prst="ellipse">
             <a:avLst/>
           </a:prstGeom>
           <a:solidFill>
-            <a:srgbClr val="D55E00"/>
+            <a:srgbClr val="262626"/>
           </a:solidFill>
           <a:ln/>
         </p:spPr>
@@ -5544,8 +6416,8 @@
         </p:nvSpPr>
         <p:spPr>
           <a:xfrm>
-            <a:off x="6520586" y="3962095"/>
-            <a:ext cx="5101438" cy="374904"/>
+            <a:off x="6533388" y="3930091"/>
+            <a:ext cx="5106924" cy="374904"/>
           </a:xfrm>
           <a:prstGeom prst="rect">
             <a:avLst/>
@@ -5583,8 +6455,8 @@
         </p:nvSpPr>
         <p:spPr>
           <a:xfrm>
-            <a:off x="6520586" y="4297680"/>
-            <a:ext cx="5101438" cy="374904"/>
+            <a:off x="6533388" y="4237330"/>
+            <a:ext cx="5106924" cy="374904"/>
           </a:xfrm>
           <a:prstGeom prst="rect">
             <a:avLst/>
@@ -5622,14 +6494,14 @@
         </p:nvSpPr>
         <p:spPr>
           <a:xfrm>
-            <a:off x="6365138" y="4825289"/>
+            <a:off x="6387084" y="4752137"/>
             <a:ext cx="91440" cy="91440"/>
           </a:xfrm>
           <a:prstGeom prst="ellipse">
             <a:avLst/>
           </a:prstGeom>
           <a:solidFill>
-            <a:srgbClr val="D55E00"/>
+            <a:srgbClr val="262626"/>
           </a:solidFill>
           <a:ln/>
         </p:spPr>
@@ -5642,8 +6514,8 @@
         </p:nvSpPr>
         <p:spPr>
           <a:xfrm>
-            <a:off x="6520586" y="4688129"/>
-            <a:ext cx="5101438" cy="374904"/>
+            <a:off x="6533388" y="4614977"/>
+            <a:ext cx="5106924" cy="374904"/>
           </a:xfrm>
           <a:prstGeom prst="rect">
             <a:avLst/>
@@ -5740,7 +6612,7 @@
                 <a:ea typeface="メイリオ" pitchFamily="34" charset="-122"/>
                 <a:cs typeface="メイリオ" pitchFamily="34" charset="-120"/>
               </a:rPr>
-              <a:t>術後せん妄：リスクと予防</a:t>
+              <a:t>術後せん妄：リスク因子</a:t>
             </a:r>
             <a:endParaRPr lang="ja-JP" sz="4400" dirty="0"/>
           </a:p>
@@ -6107,7 +6979,7 @@
                 <a:ea typeface="メイリオ" pitchFamily="34" charset="-122"/>
                 <a:cs typeface="メイリオ" pitchFamily="34" charset="-120"/>
               </a:rPr>
-              <a:t>J Am Geriatr Soc 2015;63:142-150 / Hshieh TT, et al. JAMA Intern Med 2015;175:512-520</a:t>
+              <a:t>J Am Geriatr Soc 2015;63:142-150 / Witlox J, et al. JAMA 2010;304:443-451</a:t>
             </a:r>
             <a:endParaRPr lang="ja-JP" sz="1600" dirty="0"/>
           </a:p>
@@ -6116,17 +6988,280 @@
       <p:sp>
         <p:nvSpPr>
           <p:cNvPr id="11" name="Text 9"/>
+          <p:cNvSpPr txBox="1"/>
+          <p:nvPr/>
+        </p:nvSpPr>
+        <p:spPr>
+          <a:xfrm>
+            <a:off x="502920" y="1737360"/>
+            <a:ext cx="11155680" cy="2798064"/>
+          </a:xfrm>
+          <a:prstGeom prst="rect">
+            <a:avLst/>
+          </a:prstGeom>
+          <a:noFill/>
+          <a:ln/>
+        </p:spPr>
+        <p:txBody>
+          <a:bodyPr wrap="square" lIns="0" tIns="0" rIns="0" bIns="0" rtlCol="0" anchor="t"/>
+          <a:lstStyle/>
+          <a:p>
+            <a:pPr algn="l" marL="355600" indent="-355600">
+              <a:spcAft>
+                <a:spcPts val="1000"/>
+              </a:spcAft>
+              <a:buClr>
+                <a:srgbClr val="262626"/>
+              </a:buClr>
+              <a:buSzPct val="100000"/>
+              <a:buChar char="•"/>
+            </a:pPr>
+            <a:r>
+              <a:rPr lang="ja-JP" altLang="en-US" sz="2400" dirty="0">
+                <a:solidFill>
+                  <a:srgbClr val="262626"/>
+                </a:solidFill>
+                <a:latin typeface="メイリオ" pitchFamily="34" charset="0"/>
+                <a:ea typeface="メイリオ" pitchFamily="34" charset="-122"/>
+                <a:cs typeface="メイリオ" pitchFamily="34" charset="-120"/>
+              </a:rPr>
+              <a:t>高齢、ASA-PS 3 以上、Charlson 2 超、</a:t>
+            </a:r>
+            <a:r>
+              <a:rPr lang="ja-JP" altLang="en-US" sz="2400" b="1" dirty="0">
+                <a:solidFill>
+                  <a:srgbClr val="0072B2"/>
+                </a:solidFill>
+                <a:latin typeface="メイリオ" pitchFamily="34" charset="0"/>
+                <a:ea typeface="メイリオ" pitchFamily="34" charset="-122"/>
+                <a:cs typeface="メイリオ" pitchFamily="34" charset="-120"/>
+              </a:rPr>
+              <a:t>MMSE 25 未満</a:t>
+            </a:r>
+            <a:r>
+              <a:rPr lang="ja-JP" altLang="en-US" sz="2400" dirty="0">
+                <a:solidFill>
+                  <a:srgbClr val="262626"/>
+                </a:solidFill>
+                <a:latin typeface="メイリオ" pitchFamily="34" charset="0"/>
+                <a:ea typeface="メイリオ" pitchFamily="34" charset="-122"/>
+                <a:cs typeface="メイリオ" pitchFamily="34" charset="-120"/>
+              </a:rPr>
+              <a:t>（ESAIC）</a:t>
+            </a:r>
+            <a:endParaRPr lang="ja-JP" sz="2400" dirty="0"/>
+          </a:p>
+          <a:p>
+            <a:pPr algn="l" marL="355600" indent="-355600">
+              <a:spcAft>
+                <a:spcPts val="1000"/>
+              </a:spcAft>
+              <a:buClr>
+                <a:srgbClr val="262626"/>
+              </a:buClr>
+              <a:buSzPct val="100000"/>
+              <a:buChar char="•"/>
+            </a:pPr>
+            <a:r>
+              <a:rPr lang="ja-JP" altLang="en-US" sz="2400" b="1" dirty="0">
+                <a:solidFill>
+                  <a:srgbClr val="0072B2"/>
+                </a:solidFill>
+                <a:latin typeface="メイリオ" pitchFamily="34" charset="0"/>
+                <a:ea typeface="メイリオ" pitchFamily="34" charset="-122"/>
+                <a:cs typeface="メイリオ" pitchFamily="34" charset="-120"/>
+              </a:rPr>
+              <a:t>高齢者評価：</a:t>
+            </a:r>
+            <a:r>
+              <a:rPr lang="ja-JP" altLang="en-US" sz="2400" dirty="0">
+                <a:solidFill>
+                  <a:srgbClr val="262626"/>
+                </a:solidFill>
+                <a:latin typeface="メイリオ" pitchFamily="34" charset="0"/>
+                <a:ea typeface="メイリオ" pitchFamily="34" charset="-122"/>
+                <a:cs typeface="メイリオ" pitchFamily="34" charset="-120"/>
+              </a:rPr>
+              <a:t>フレイル、感覚障害、低栄養、多剤、貧血、社会的因子</a:t>
+            </a:r>
+            <a:endParaRPr lang="ja-JP" sz="2400" dirty="0"/>
+          </a:p>
+          <a:p>
+            <a:pPr algn="l" marL="355600" indent="-355600">
+              <a:spcAft>
+                <a:spcPts val="1000"/>
+              </a:spcAft>
+              <a:buClr>
+                <a:srgbClr val="262626"/>
+              </a:buClr>
+              <a:buSzPct val="100000"/>
+              <a:buChar char="•"/>
+            </a:pPr>
+            <a:r>
+              <a:rPr lang="ja-JP" altLang="en-US" sz="2400" b="1" dirty="0">
+                <a:solidFill>
+                  <a:srgbClr val="0072B2"/>
+                </a:solidFill>
+                <a:latin typeface="メイリオ" pitchFamily="34" charset="0"/>
+                <a:ea typeface="メイリオ" pitchFamily="34" charset="-122"/>
+                <a:cs typeface="メイリオ" pitchFamily="34" charset="-120"/>
+              </a:rPr>
+              <a:t>国内の加算：</a:t>
+            </a:r>
+            <a:r>
+              <a:rPr lang="ja-JP" altLang="en-US" sz="2400" dirty="0">
+                <a:solidFill>
+                  <a:srgbClr val="262626"/>
+                </a:solidFill>
+                <a:latin typeface="メイリオ" pitchFamily="34" charset="0"/>
+                <a:ea typeface="メイリオ" pitchFamily="34" charset="-122"/>
+                <a:cs typeface="メイリオ" pitchFamily="34" charset="-120"/>
+              </a:rPr>
+              <a:t>せん妄の既往、アルコール多飲、ベンゾジアゼピン</a:t>
+            </a:r>
+            <a:endParaRPr lang="ja-JP" sz="2400" dirty="0"/>
+          </a:p>
+          <a:p>
+            <a:pPr algn="l" marL="355600" indent="-355600">
+              <a:spcAft>
+                <a:spcPts val="1000"/>
+              </a:spcAft>
+              <a:buClr>
+                <a:srgbClr val="262626"/>
+              </a:buClr>
+              <a:buSzPct val="100000"/>
+              <a:buChar char="•"/>
+            </a:pPr>
+            <a:r>
+              <a:rPr lang="ja-JP" altLang="en-US" sz="2400" dirty="0">
+                <a:solidFill>
+                  <a:srgbClr val="262626"/>
+                </a:solidFill>
+                <a:latin typeface="メイリオ" pitchFamily="34" charset="0"/>
+                <a:ea typeface="メイリオ" pitchFamily="34" charset="-122"/>
+                <a:cs typeface="メイリオ" pitchFamily="34" charset="-120"/>
+              </a:rPr>
+              <a:t>全身麻酔の手術は</a:t>
+            </a:r>
+            <a:r>
+              <a:rPr lang="ja-JP" altLang="en-US" sz="2400" b="1" dirty="0">
+                <a:solidFill>
+                  <a:srgbClr val="0072B2"/>
+                </a:solidFill>
+                <a:latin typeface="メイリオ" pitchFamily="34" charset="0"/>
+                <a:ea typeface="メイリオ" pitchFamily="34" charset="-122"/>
+                <a:cs typeface="メイリオ" pitchFamily="34" charset="-120"/>
+              </a:rPr>
+              <a:t>年齢を問わず対象</a:t>
+            </a:r>
+            <a:r>
+              <a:rPr lang="ja-JP" altLang="en-US" sz="2400" dirty="0">
+                <a:solidFill>
+                  <a:srgbClr val="262626"/>
+                </a:solidFill>
+                <a:latin typeface="メイリオ" pitchFamily="34" charset="0"/>
+                <a:ea typeface="メイリオ" pitchFamily="34" charset="-122"/>
+                <a:cs typeface="メイリオ" pitchFamily="34" charset="-120"/>
+              </a:rPr>
+              <a:t>（1 項目以上でハイリスク）</a:t>
+            </a:r>
+            <a:endParaRPr lang="ja-JP" sz="2400" dirty="0"/>
+          </a:p>
+          <a:p>
+            <a:pPr algn="l" marL="355600" indent="-355600">
+              <a:spcAft>
+                <a:spcPts val="1000"/>
+              </a:spcAft>
+              <a:buClr>
+                <a:srgbClr val="262626"/>
+              </a:buClr>
+              <a:buSzPct val="100000"/>
+              <a:buChar char="•"/>
+            </a:pPr>
+            <a:r>
+              <a:rPr lang="ja-JP" altLang="en-US" sz="2400" dirty="0">
+                <a:solidFill>
+                  <a:srgbClr val="262626"/>
+                </a:solidFill>
+                <a:latin typeface="メイリオ" pitchFamily="34" charset="0"/>
+                <a:ea typeface="メイリオ" pitchFamily="34" charset="-122"/>
+                <a:cs typeface="メイリオ" pitchFamily="34" charset="-120"/>
+              </a:rPr>
+              <a:t>骨折 </a:t>
+            </a:r>
+            <a:r>
+              <a:rPr lang="ja-JP" altLang="en-US" sz="2400" b="1" dirty="0">
+                <a:solidFill>
+                  <a:srgbClr val="0072B2"/>
+                </a:solidFill>
+                <a:latin typeface="メイリオ" pitchFamily="34" charset="0"/>
+                <a:ea typeface="メイリオ" pitchFamily="34" charset="-122"/>
+                <a:cs typeface="メイリオ" pitchFamily="34" charset="-120"/>
+              </a:rPr>
+              <a:t>35〜65%</a:t>
+            </a:r>
+            <a:r>
+              <a:rPr lang="ja-JP" altLang="en-US" sz="2400" dirty="0">
+                <a:solidFill>
+                  <a:srgbClr val="262626"/>
+                </a:solidFill>
+                <a:latin typeface="メイリオ" pitchFamily="34" charset="0"/>
+                <a:ea typeface="メイリオ" pitchFamily="34" charset="-122"/>
+                <a:cs typeface="メイリオ" pitchFamily="34" charset="-120"/>
+              </a:rPr>
+              <a:t>、大手術 </a:t>
+            </a:r>
+            <a:r>
+              <a:rPr lang="ja-JP" altLang="en-US" sz="2400" b="1" dirty="0">
+                <a:solidFill>
+                  <a:srgbClr val="0072B2"/>
+                </a:solidFill>
+                <a:latin typeface="メイリオ" pitchFamily="34" charset="0"/>
+                <a:ea typeface="メイリオ" pitchFamily="34" charset="-122"/>
+                <a:cs typeface="メイリオ" pitchFamily="34" charset="-120"/>
+              </a:rPr>
+              <a:t>20〜40%</a:t>
+            </a:r>
+            <a:r>
+              <a:rPr lang="ja-JP" altLang="en-US" sz="2400" dirty="0">
+                <a:solidFill>
+                  <a:srgbClr val="262626"/>
+                </a:solidFill>
+                <a:latin typeface="メイリオ" pitchFamily="34" charset="0"/>
+                <a:ea typeface="メイリオ" pitchFamily="34" charset="-122"/>
+                <a:cs typeface="メイリオ" pitchFamily="34" charset="-120"/>
+              </a:rPr>
+              <a:t> に起き、</a:t>
+            </a:r>
+            <a:r>
+              <a:rPr lang="ja-JP" altLang="en-US" sz="2400" b="1" u="sng" dirty="0">
+                <a:solidFill>
+                  <a:srgbClr val="C00000"/>
+                </a:solidFill>
+                <a:latin typeface="メイリオ" pitchFamily="34" charset="0"/>
+                <a:ea typeface="メイリオ" pitchFamily="34" charset="-122"/>
+                <a:cs typeface="メイリオ" pitchFamily="34" charset="-120"/>
+              </a:rPr>
+              <a:t>半数以上が見逃される</a:t>
+            </a:r>
+            <a:endParaRPr lang="ja-JP" sz="2400" dirty="0"/>
+          </a:p>
+        </p:txBody>
+      </p:sp>
+      <p:sp>
+        <p:nvSpPr>
+          <p:cNvPr id="12" name="Text 10"/>
           <p:cNvSpPr/>
           <p:nvPr/>
         </p:nvSpPr>
         <p:spPr>
           <a:xfrm>
-            <a:off x="502920" y="5468112"/>
-            <a:ext cx="11183112" cy="420624"/>
+            <a:off x="502920" y="4754880"/>
+            <a:ext cx="11183112" cy="1097280"/>
           </a:xfrm>
           <a:prstGeom prst="roundRect">
             <a:avLst>
-              <a:gd name="adj" fmla="val 21739"/>
+              <a:gd name="adj" fmla="val 8333"/>
             </a:avLst>
           </a:prstGeom>
           <a:solidFill>
@@ -6146,79 +7281,7 @@
               <a:buNone/>
             </a:pPr>
             <a:r>
-              <a:rPr lang="ja-JP" altLang="en-US" sz="2200" b="1" u="sng" dirty="0">
-                <a:solidFill>
-                  <a:srgbClr val="C00000"/>
-                </a:solidFill>
-                <a:latin typeface="メイリオ" pitchFamily="34" charset="0"/>
-                <a:ea typeface="メイリオ" pitchFamily="34" charset="-122"/>
-                <a:cs typeface="メイリオ" pitchFamily="34" charset="-120"/>
-              </a:rPr>
-              <a:t>半数以上が見逃される</a:t>
-            </a:r>
-            <a:r>
-              <a:rPr lang="ja-JP" altLang="en-US" sz="2200" b="1" dirty="0">
-                <a:solidFill>
-                  <a:srgbClr val="262626"/>
-                </a:solidFill>
-                <a:latin typeface="メイリオ" pitchFamily="34" charset="0"/>
-                <a:ea typeface="メイリオ" pitchFamily="34" charset="-122"/>
-                <a:cs typeface="メイリオ" pitchFamily="34" charset="-120"/>
-              </a:rPr>
-              <a:t>（低活動型）。回復室を出る前と病棟でスクリーニング</a:t>
-            </a:r>
-            <a:endParaRPr lang="ja-JP" sz="2200" dirty="0"/>
-          </a:p>
-        </p:txBody>
-      </p:sp>
-      <p:sp>
-        <p:nvSpPr>
-          <p:cNvPr id="12" name="Shape 10"/>
-          <p:cNvSpPr/>
-          <p:nvPr/>
-        </p:nvSpPr>
-        <p:spPr>
-          <a:xfrm>
-            <a:off x="502920" y="1664208"/>
-            <a:ext cx="5319979" cy="3584448"/>
-          </a:xfrm>
-          <a:prstGeom prst="roundRect">
-            <a:avLst>
-              <a:gd name="adj" fmla="val 2041"/>
-            </a:avLst>
-          </a:prstGeom>
-          <a:solidFill>
-            <a:srgbClr val="F2F2F2"/>
-          </a:solidFill>
-          <a:ln/>
-        </p:spPr>
-      </p:sp>
-      <p:sp>
-        <p:nvSpPr>
-          <p:cNvPr id="13" name="Text 11"/>
-          <p:cNvSpPr txBox="1"/>
-          <p:nvPr/>
-        </p:nvSpPr>
-        <p:spPr>
-          <a:xfrm>
-            <a:off x="566928" y="1700784"/>
-            <a:ext cx="5191963" cy="420624"/>
-          </a:xfrm>
-          <a:prstGeom prst="rect">
-            <a:avLst/>
-          </a:prstGeom>
-          <a:noFill/>
-          <a:ln/>
-        </p:spPr>
-        <p:txBody>
-          <a:bodyPr wrap="square" lIns="0" tIns="0" rIns="0" bIns="0" rtlCol="0" anchor="t"/>
-          <a:lstStyle/>
-          <a:p>
-            <a:pPr algn="l" indent="0" marL="0">
-              <a:buNone/>
-            </a:pPr>
-            <a:r>
-              <a:rPr lang="ja-JP" altLang="en-US" sz="2400" b="1" dirty="0">
+              <a:rPr lang="ja-JP" altLang="en-US" sz="2800" b="1" dirty="0">
                 <a:solidFill>
                   <a:srgbClr val="0072B2"/>
                 </a:solidFill>
@@ -6226,1109 +7289,37 @@
                 <a:ea typeface="メイリオ" pitchFamily="34" charset="-122"/>
                 <a:cs typeface="メイリオ" pitchFamily="34" charset="-120"/>
               </a:rPr>
-              <a:t>リスク因子</a:t>
-            </a:r>
-            <a:endParaRPr lang="ja-JP" sz="2400" dirty="0"/>
-          </a:p>
-        </p:txBody>
-      </p:sp>
-      <p:sp>
-        <p:nvSpPr>
-          <p:cNvPr id="14" name="Shape 12"/>
-          <p:cNvSpPr/>
-          <p:nvPr/>
-        </p:nvSpPr>
-        <p:spPr>
-          <a:xfrm>
-            <a:off x="594360" y="2173529"/>
-            <a:ext cx="91440" cy="91440"/>
-          </a:xfrm>
-          <a:prstGeom prst="ellipse">
-            <a:avLst/>
-          </a:prstGeom>
-          <a:solidFill>
-            <a:srgbClr val="0072B2"/>
-          </a:solidFill>
-          <a:ln/>
-        </p:spPr>
-      </p:sp>
-      <p:sp>
-        <p:nvSpPr>
-          <p:cNvPr id="15" name="Text 13"/>
-          <p:cNvSpPr txBox="1"/>
-          <p:nvPr/>
-        </p:nvSpPr>
-        <p:spPr>
-          <a:xfrm>
-            <a:off x="749808" y="2045513"/>
-            <a:ext cx="5009083" cy="374904"/>
-          </a:xfrm>
-          <a:prstGeom prst="rect">
-            <a:avLst/>
-          </a:prstGeom>
-          <a:noFill/>
-          <a:ln/>
-        </p:spPr>
-        <p:txBody>
-          <a:bodyPr wrap="square" lIns="0" tIns="0" rIns="0" bIns="0" rtlCol="0" anchor="t"/>
-          <a:lstStyle/>
-          <a:p>
-            <a:pPr algn="l" indent="0" marL="0">
-              <a:buNone/>
-            </a:pPr>
-            <a:r>
-              <a:rPr lang="ja-JP" altLang="en-US" sz="2200" dirty="0">
-                <a:solidFill>
-                  <a:srgbClr val="262626"/>
-                </a:solidFill>
-                <a:latin typeface="メイリオ" pitchFamily="34" charset="0"/>
-                <a:ea typeface="メイリオ" pitchFamily="34" charset="-122"/>
-                <a:cs typeface="メイリオ" pitchFamily="34" charset="-120"/>
-              </a:rPr>
-              <a:t>高齢、ASA-PS 3 以上、</a:t>
-            </a:r>
-            <a:endParaRPr lang="ja-JP" sz="2200" dirty="0"/>
-          </a:p>
-        </p:txBody>
-      </p:sp>
-      <p:sp>
-        <p:nvSpPr>
-          <p:cNvPr id="16" name="Text 14"/>
-          <p:cNvSpPr txBox="1"/>
-          <p:nvPr/>
-        </p:nvSpPr>
-        <p:spPr>
-          <a:xfrm>
-            <a:off x="749808" y="2352751"/>
-            <a:ext cx="5009083" cy="374904"/>
-          </a:xfrm>
-          <a:prstGeom prst="rect">
-            <a:avLst/>
-          </a:prstGeom>
-          <a:noFill/>
-          <a:ln/>
-        </p:spPr>
-        <p:txBody>
-          <a:bodyPr wrap="square" lIns="0" tIns="0" rIns="0" bIns="0" rtlCol="0" anchor="t"/>
-          <a:lstStyle/>
-          <a:p>
-            <a:pPr algn="l" indent="0" marL="0">
-              <a:buNone/>
-            </a:pPr>
-            <a:r>
-              <a:rPr lang="ja-JP" altLang="en-US" sz="2200" dirty="0">
-                <a:solidFill>
-                  <a:srgbClr val="262626"/>
-                </a:solidFill>
-                <a:latin typeface="メイリオ" pitchFamily="34" charset="0"/>
-                <a:ea typeface="メイリオ" pitchFamily="34" charset="-122"/>
-                <a:cs typeface="メイリオ" pitchFamily="34" charset="-120"/>
-              </a:rPr>
-              <a:t>Charlson 2 超、</a:t>
-            </a:r>
-            <a:endParaRPr lang="ja-JP" sz="2200" dirty="0"/>
-          </a:p>
-        </p:txBody>
-      </p:sp>
-      <p:sp>
-        <p:nvSpPr>
-          <p:cNvPr id="17" name="Text 15"/>
-          <p:cNvSpPr txBox="1"/>
-          <p:nvPr/>
-        </p:nvSpPr>
-        <p:spPr>
-          <a:xfrm>
-            <a:off x="749808" y="2659990"/>
-            <a:ext cx="5009083" cy="374904"/>
-          </a:xfrm>
-          <a:prstGeom prst="rect">
-            <a:avLst/>
-          </a:prstGeom>
-          <a:noFill/>
-          <a:ln/>
-        </p:spPr>
-        <p:txBody>
-          <a:bodyPr wrap="square" lIns="0" tIns="0" rIns="0" bIns="0" rtlCol="0" anchor="t"/>
-          <a:lstStyle/>
-          <a:p>
-            <a:pPr algn="l" indent="0" marL="0">
-              <a:buNone/>
-            </a:pPr>
-            <a:r>
-              <a:rPr lang="ja-JP" altLang="en-US" sz="2200" dirty="0">
-                <a:solidFill>
-                  <a:srgbClr val="262626"/>
-                </a:solidFill>
-                <a:latin typeface="メイリオ" pitchFamily="34" charset="0"/>
-                <a:ea typeface="メイリオ" pitchFamily="34" charset="-122"/>
-                <a:cs typeface="メイリオ" pitchFamily="34" charset="-120"/>
-              </a:rPr>
-              <a:t>MMSE 25 未満（ESAIC）</a:t>
-            </a:r>
-            <a:endParaRPr lang="ja-JP" sz="2200" dirty="0"/>
-          </a:p>
-        </p:txBody>
-      </p:sp>
-      <p:sp>
-        <p:nvSpPr>
-          <p:cNvPr id="18" name="Shape 16"/>
-          <p:cNvSpPr/>
-          <p:nvPr/>
-        </p:nvSpPr>
-        <p:spPr>
-          <a:xfrm>
-            <a:off x="594360" y="3096158"/>
-            <a:ext cx="91440" cy="91440"/>
-          </a:xfrm>
-          <a:prstGeom prst="ellipse">
-            <a:avLst/>
-          </a:prstGeom>
-          <a:solidFill>
-            <a:srgbClr val="0072B2"/>
-          </a:solidFill>
-          <a:ln/>
-        </p:spPr>
-      </p:sp>
-      <p:sp>
-        <p:nvSpPr>
-          <p:cNvPr id="19" name="Text 17"/>
-          <p:cNvSpPr txBox="1"/>
-          <p:nvPr/>
-        </p:nvSpPr>
-        <p:spPr>
-          <a:xfrm>
-            <a:off x="749808" y="2968142"/>
-            <a:ext cx="5009083" cy="374904"/>
-          </a:xfrm>
-          <a:prstGeom prst="rect">
-            <a:avLst/>
-          </a:prstGeom>
-          <a:noFill/>
-          <a:ln/>
-        </p:spPr>
-        <p:txBody>
-          <a:bodyPr wrap="square" lIns="0" tIns="0" rIns="0" bIns="0" rtlCol="0" anchor="t"/>
-          <a:lstStyle/>
-          <a:p>
-            <a:pPr algn="l" indent="0" marL="0">
-              <a:buNone/>
-            </a:pPr>
-            <a:r>
-              <a:rPr lang="ja-JP" altLang="en-US" sz="2200" dirty="0">
-                <a:solidFill>
-                  <a:srgbClr val="262626"/>
-                </a:solidFill>
-                <a:latin typeface="メイリオ" pitchFamily="34" charset="0"/>
-                <a:ea typeface="メイリオ" pitchFamily="34" charset="-122"/>
-                <a:cs typeface="メイリオ" pitchFamily="34" charset="-120"/>
-              </a:rPr>
-              <a:t>フレイル、感覚障害、低栄養、</a:t>
-            </a:r>
-            <a:endParaRPr lang="ja-JP" sz="2200" dirty="0"/>
-          </a:p>
-        </p:txBody>
-      </p:sp>
-      <p:sp>
-        <p:nvSpPr>
-          <p:cNvPr id="20" name="Text 18"/>
-          <p:cNvSpPr txBox="1"/>
-          <p:nvPr/>
-        </p:nvSpPr>
-        <p:spPr>
-          <a:xfrm>
-            <a:off x="749808" y="3275381"/>
-            <a:ext cx="5009083" cy="374904"/>
-          </a:xfrm>
-          <a:prstGeom prst="rect">
-            <a:avLst/>
-          </a:prstGeom>
-          <a:noFill/>
-          <a:ln/>
-        </p:spPr>
-        <p:txBody>
-          <a:bodyPr wrap="square" lIns="0" tIns="0" rIns="0" bIns="0" rtlCol="0" anchor="t"/>
-          <a:lstStyle/>
-          <a:p>
-            <a:pPr algn="l" indent="0" marL="0">
-              <a:buNone/>
-            </a:pPr>
-            <a:r>
-              <a:rPr lang="ja-JP" altLang="en-US" sz="2200" dirty="0">
-                <a:solidFill>
-                  <a:srgbClr val="262626"/>
-                </a:solidFill>
-                <a:latin typeface="メイリオ" pitchFamily="34" charset="0"/>
-                <a:ea typeface="メイリオ" pitchFamily="34" charset="-122"/>
-                <a:cs typeface="メイリオ" pitchFamily="34" charset="-120"/>
-              </a:rPr>
-              <a:t>多剤、貧血、社会的因子</a:t>
-            </a:r>
-            <a:endParaRPr lang="ja-JP" sz="2200" dirty="0"/>
-          </a:p>
-        </p:txBody>
-      </p:sp>
-      <p:sp>
-        <p:nvSpPr>
-          <p:cNvPr id="21" name="Shape 19"/>
-          <p:cNvSpPr/>
-          <p:nvPr/>
-        </p:nvSpPr>
-        <p:spPr>
-          <a:xfrm>
-            <a:off x="594360" y="3711550"/>
-            <a:ext cx="91440" cy="91440"/>
-          </a:xfrm>
-          <a:prstGeom prst="ellipse">
-            <a:avLst/>
-          </a:prstGeom>
-          <a:solidFill>
-            <a:srgbClr val="0072B2"/>
-          </a:solidFill>
-          <a:ln/>
-        </p:spPr>
-      </p:sp>
-      <p:sp>
-        <p:nvSpPr>
-          <p:cNvPr id="22" name="Text 20"/>
-          <p:cNvSpPr txBox="1"/>
-          <p:nvPr/>
-        </p:nvSpPr>
-        <p:spPr>
-          <a:xfrm>
-            <a:off x="749808" y="3583534"/>
-            <a:ext cx="5009083" cy="374904"/>
-          </a:xfrm>
-          <a:prstGeom prst="rect">
-            <a:avLst/>
-          </a:prstGeom>
-          <a:noFill/>
-          <a:ln/>
-        </p:spPr>
-        <p:txBody>
-          <a:bodyPr wrap="square" lIns="0" tIns="0" rIns="0" bIns="0" rtlCol="0" anchor="t"/>
-          <a:lstStyle/>
-          <a:p>
-            <a:pPr algn="l" indent="0" marL="0">
-              <a:buNone/>
-            </a:pPr>
-            <a:r>
-              <a:rPr lang="ja-JP" altLang="en-US" sz="2200" dirty="0">
-                <a:solidFill>
-                  <a:srgbClr val="262626"/>
-                </a:solidFill>
-                <a:latin typeface="メイリオ" pitchFamily="34" charset="0"/>
-                <a:ea typeface="メイリオ" pitchFamily="34" charset="-122"/>
-                <a:cs typeface="メイリオ" pitchFamily="34" charset="-120"/>
-              </a:rPr>
-              <a:t>せん妄の既往、アルコール多飲、</a:t>
-            </a:r>
-            <a:endParaRPr lang="ja-JP" sz="2200" dirty="0"/>
-          </a:p>
-        </p:txBody>
-      </p:sp>
-      <p:sp>
-        <p:nvSpPr>
-          <p:cNvPr id="23" name="Text 21"/>
-          <p:cNvSpPr txBox="1"/>
-          <p:nvPr/>
-        </p:nvSpPr>
-        <p:spPr>
-          <a:xfrm>
-            <a:off x="749808" y="3890772"/>
-            <a:ext cx="5009083" cy="374904"/>
-          </a:xfrm>
-          <a:prstGeom prst="rect">
-            <a:avLst/>
-          </a:prstGeom>
-          <a:noFill/>
-          <a:ln/>
-        </p:spPr>
-        <p:txBody>
-          <a:bodyPr wrap="square" lIns="0" tIns="0" rIns="0" bIns="0" rtlCol="0" anchor="t"/>
-          <a:lstStyle/>
-          <a:p>
-            <a:pPr algn="l" indent="0" marL="0">
-              <a:buNone/>
-            </a:pPr>
-            <a:r>
-              <a:rPr lang="ja-JP" altLang="en-US" sz="2200" dirty="0">
-                <a:solidFill>
-                  <a:srgbClr val="262626"/>
-                </a:solidFill>
-                <a:latin typeface="メイリオ" pitchFamily="34" charset="0"/>
-                <a:ea typeface="メイリオ" pitchFamily="34" charset="-122"/>
-                <a:cs typeface="メイリオ" pitchFamily="34" charset="-120"/>
-              </a:rPr>
-              <a:t>ベンゾジアゼピン、全身麻酔の手術</a:t>
-            </a:r>
-            <a:endParaRPr lang="ja-JP" sz="2200" dirty="0"/>
-          </a:p>
-        </p:txBody>
-      </p:sp>
-      <p:sp>
-        <p:nvSpPr>
-          <p:cNvPr id="24" name="Text 22"/>
-          <p:cNvSpPr txBox="1"/>
-          <p:nvPr/>
-        </p:nvSpPr>
-        <p:spPr>
-          <a:xfrm>
-            <a:off x="749808" y="4198010"/>
-            <a:ext cx="5009083" cy="374904"/>
-          </a:xfrm>
-          <a:prstGeom prst="rect">
-            <a:avLst/>
-          </a:prstGeom>
-          <a:noFill/>
-          <a:ln/>
-        </p:spPr>
-        <p:txBody>
-          <a:bodyPr wrap="square" lIns="0" tIns="0" rIns="0" bIns="0" rtlCol="0" anchor="t"/>
-          <a:lstStyle/>
-          <a:p>
-            <a:pPr algn="l" indent="0" marL="0">
-              <a:buNone/>
-            </a:pPr>
-            <a:r>
-              <a:rPr lang="ja-JP" altLang="en-US" sz="2200" dirty="0">
-                <a:solidFill>
-                  <a:srgbClr val="262626"/>
-                </a:solidFill>
-                <a:latin typeface="メイリオ" pitchFamily="34" charset="0"/>
-                <a:ea typeface="メイリオ" pitchFamily="34" charset="-122"/>
-                <a:cs typeface="メイリオ" pitchFamily="34" charset="-120"/>
-              </a:rPr>
-              <a:t>（国内の加算）</a:t>
-            </a:r>
-            <a:endParaRPr lang="ja-JP" sz="2200" dirty="0"/>
-          </a:p>
-        </p:txBody>
-      </p:sp>
-      <p:sp>
-        <p:nvSpPr>
-          <p:cNvPr id="25" name="Shape 23"/>
-          <p:cNvSpPr/>
-          <p:nvPr/>
-        </p:nvSpPr>
-        <p:spPr>
-          <a:xfrm>
-            <a:off x="594360" y="4635094"/>
-            <a:ext cx="91440" cy="91440"/>
-          </a:xfrm>
-          <a:prstGeom prst="ellipse">
-            <a:avLst/>
-          </a:prstGeom>
-          <a:solidFill>
-            <a:srgbClr val="0072B2"/>
-          </a:solidFill>
-          <a:ln/>
-        </p:spPr>
-      </p:sp>
-      <p:sp>
-        <p:nvSpPr>
-          <p:cNvPr id="26" name="Text 24"/>
-          <p:cNvSpPr txBox="1"/>
-          <p:nvPr/>
-        </p:nvSpPr>
-        <p:spPr>
-          <a:xfrm>
-            <a:off x="749808" y="4507078"/>
-            <a:ext cx="5009083" cy="374904"/>
-          </a:xfrm>
-          <a:prstGeom prst="rect">
-            <a:avLst/>
-          </a:prstGeom>
-          <a:noFill/>
-          <a:ln/>
-        </p:spPr>
-        <p:txBody>
-          <a:bodyPr wrap="square" lIns="0" tIns="0" rIns="0" bIns="0" rtlCol="0" anchor="t"/>
-          <a:lstStyle/>
-          <a:p>
-            <a:pPr algn="l" indent="0" marL="0">
-              <a:buNone/>
-            </a:pPr>
-            <a:r>
-              <a:rPr lang="ja-JP" altLang="en-US" sz="2200" dirty="0">
-                <a:solidFill>
-                  <a:srgbClr val="262626"/>
-                </a:solidFill>
-                <a:latin typeface="メイリオ" pitchFamily="34" charset="0"/>
-                <a:ea typeface="メイリオ" pitchFamily="34" charset="-122"/>
-                <a:cs typeface="メイリオ" pitchFamily="34" charset="-120"/>
-              </a:rPr>
-              <a:t>大腿骨近位部骨折 </a:t>
-            </a:r>
-            <a:r>
-              <a:rPr lang="ja-JP" altLang="en-US" sz="2200" b="1" dirty="0">
-                <a:solidFill>
-                  <a:srgbClr val="D55E00"/>
-                </a:solidFill>
-                <a:latin typeface="メイリオ" pitchFamily="34" charset="0"/>
-                <a:ea typeface="メイリオ" pitchFamily="34" charset="-122"/>
-                <a:cs typeface="メイリオ" pitchFamily="34" charset="-120"/>
-              </a:rPr>
-              <a:t>35〜65%</a:t>
-            </a:r>
-            <a:r>
-              <a:rPr lang="ja-JP" altLang="en-US" sz="2200" dirty="0">
-                <a:solidFill>
-                  <a:srgbClr val="262626"/>
-                </a:solidFill>
-                <a:latin typeface="メイリオ" pitchFamily="34" charset="0"/>
-                <a:ea typeface="メイリオ" pitchFamily="34" charset="-122"/>
-                <a:cs typeface="メイリオ" pitchFamily="34" charset="-120"/>
-              </a:rPr>
-              <a:t>、</a:t>
-            </a:r>
-            <a:endParaRPr lang="ja-JP" sz="2200" dirty="0"/>
-          </a:p>
-        </p:txBody>
-      </p:sp>
-      <p:sp>
-        <p:nvSpPr>
-          <p:cNvPr id="27" name="Text 25"/>
-          <p:cNvSpPr txBox="1"/>
-          <p:nvPr/>
-        </p:nvSpPr>
-        <p:spPr>
-          <a:xfrm>
-            <a:off x="749808" y="4814316"/>
-            <a:ext cx="5009083" cy="374904"/>
-          </a:xfrm>
-          <a:prstGeom prst="rect">
-            <a:avLst/>
-          </a:prstGeom>
-          <a:noFill/>
-          <a:ln/>
-        </p:spPr>
-        <p:txBody>
-          <a:bodyPr wrap="square" lIns="0" tIns="0" rIns="0" bIns="0" rtlCol="0" anchor="t"/>
-          <a:lstStyle/>
-          <a:p>
-            <a:pPr algn="l" indent="0" marL="0">
-              <a:buNone/>
-            </a:pPr>
-            <a:r>
-              <a:rPr lang="ja-JP" altLang="en-US" sz="2200" dirty="0">
-                <a:solidFill>
-                  <a:srgbClr val="262626"/>
-                </a:solidFill>
-                <a:latin typeface="メイリオ" pitchFamily="34" charset="0"/>
-                <a:ea typeface="メイリオ" pitchFamily="34" charset="-122"/>
-                <a:cs typeface="メイリオ" pitchFamily="34" charset="-120"/>
-              </a:rPr>
-              <a:t>大手術 </a:t>
-            </a:r>
-            <a:r>
-              <a:rPr lang="ja-JP" altLang="en-US" sz="2200" b="1" dirty="0">
-                <a:solidFill>
-                  <a:srgbClr val="D55E00"/>
-                </a:solidFill>
-                <a:latin typeface="メイリオ" pitchFamily="34" charset="0"/>
-                <a:ea typeface="メイリオ" pitchFamily="34" charset="-122"/>
-                <a:cs typeface="メイリオ" pitchFamily="34" charset="-120"/>
-              </a:rPr>
-              <a:t>20〜40%</a:t>
-            </a:r>
-            <a:endParaRPr lang="ja-JP" sz="2200" dirty="0"/>
-          </a:p>
-        </p:txBody>
-      </p:sp>
-      <p:sp>
-        <p:nvSpPr>
-          <p:cNvPr id="28" name="Shape 26"/>
-          <p:cNvSpPr/>
-          <p:nvPr/>
-        </p:nvSpPr>
-        <p:spPr>
-          <a:xfrm>
-            <a:off x="6042355" y="1664208"/>
-            <a:ext cx="5643677" cy="3584448"/>
-          </a:xfrm>
-          <a:prstGeom prst="roundRect">
-            <a:avLst>
-              <a:gd name="adj" fmla="val 2041"/>
-            </a:avLst>
-          </a:prstGeom>
-          <a:solidFill>
-            <a:srgbClr val="F2F2F2"/>
-          </a:solidFill>
-          <a:ln/>
-        </p:spPr>
-      </p:sp>
-      <p:sp>
-        <p:nvSpPr>
-          <p:cNvPr id="29" name="Text 27"/>
-          <p:cNvSpPr txBox="1"/>
-          <p:nvPr/>
-        </p:nvSpPr>
-        <p:spPr>
-          <a:xfrm>
-            <a:off x="6106363" y="1700784"/>
-            <a:ext cx="5515661" cy="420624"/>
-          </a:xfrm>
-          <a:prstGeom prst="rect">
-            <a:avLst/>
-          </a:prstGeom>
-          <a:noFill/>
-          <a:ln/>
-        </p:spPr>
-        <p:txBody>
-          <a:bodyPr wrap="square" lIns="0" tIns="0" rIns="0" bIns="0" rtlCol="0" anchor="t"/>
-          <a:lstStyle/>
-          <a:p>
-            <a:pPr algn="l" indent="0" marL="0">
-              <a:buNone/>
-            </a:pPr>
-            <a:r>
-              <a:rPr lang="ja-JP" altLang="en-US" sz="2400" b="1" dirty="0">
-                <a:solidFill>
-                  <a:srgbClr val="D55E00"/>
-                </a:solidFill>
-                <a:latin typeface="メイリオ" pitchFamily="34" charset="0"/>
-                <a:ea typeface="メイリオ" pitchFamily="34" charset="-122"/>
-                <a:cs typeface="メイリオ" pitchFamily="34" charset="-120"/>
-              </a:rPr>
-              <a:t>予防（AGS 2015・ESAIC 2024）</a:t>
-            </a:r>
-            <a:endParaRPr lang="ja-JP" sz="2400" dirty="0"/>
-          </a:p>
-        </p:txBody>
-      </p:sp>
-      <p:sp>
-        <p:nvSpPr>
-          <p:cNvPr id="30" name="Shape 28"/>
-          <p:cNvSpPr/>
-          <p:nvPr/>
-        </p:nvSpPr>
-        <p:spPr>
-          <a:xfrm>
-            <a:off x="6133795" y="2173529"/>
-            <a:ext cx="91440" cy="91440"/>
-          </a:xfrm>
-          <a:prstGeom prst="ellipse">
-            <a:avLst/>
-          </a:prstGeom>
-          <a:solidFill>
-            <a:srgbClr val="D55E00"/>
-          </a:solidFill>
-          <a:ln/>
-        </p:spPr>
-      </p:sp>
-      <p:sp>
-        <p:nvSpPr>
-          <p:cNvPr id="31" name="Text 29"/>
-          <p:cNvSpPr txBox="1"/>
-          <p:nvPr/>
-        </p:nvSpPr>
-        <p:spPr>
-          <a:xfrm>
-            <a:off x="6289243" y="2045513"/>
-            <a:ext cx="5332781" cy="374904"/>
-          </a:xfrm>
-          <a:prstGeom prst="rect">
-            <a:avLst/>
-          </a:prstGeom>
-          <a:noFill/>
-          <a:ln/>
-        </p:spPr>
-        <p:txBody>
-          <a:bodyPr wrap="square" lIns="0" tIns="0" rIns="0" bIns="0" rtlCol="0" anchor="t"/>
-          <a:lstStyle/>
-          <a:p>
-            <a:pPr algn="l" indent="0" marL="0">
-              <a:buNone/>
-            </a:pPr>
-            <a:r>
-              <a:rPr lang="ja-JP" altLang="en-US" sz="2200" b="1" dirty="0">
-                <a:solidFill>
-                  <a:srgbClr val="D55E00"/>
-                </a:solidFill>
-                <a:latin typeface="メイリオ" pitchFamily="34" charset="0"/>
-                <a:ea typeface="メイリオ" pitchFamily="34" charset="-122"/>
-                <a:cs typeface="メイリオ" pitchFamily="34" charset="-120"/>
-              </a:rPr>
-              <a:t>多因子の非薬物的介入</a:t>
-            </a:r>
-            <a:r>
-              <a:rPr lang="ja-JP" altLang="en-US" sz="2200" dirty="0">
-                <a:solidFill>
-                  <a:srgbClr val="262626"/>
-                </a:solidFill>
-                <a:latin typeface="メイリオ" pitchFamily="34" charset="0"/>
-                <a:ea typeface="メイリオ" pitchFamily="34" charset="-122"/>
-                <a:cs typeface="メイリオ" pitchFamily="34" charset="-120"/>
-              </a:rPr>
-              <a:t>（強い推奨）：</a:t>
-            </a:r>
-            <a:endParaRPr lang="ja-JP" sz="2200" dirty="0"/>
-          </a:p>
-        </p:txBody>
-      </p:sp>
-      <p:sp>
-        <p:nvSpPr>
-          <p:cNvPr id="32" name="Text 30"/>
-          <p:cNvSpPr txBox="1"/>
-          <p:nvPr/>
-        </p:nvSpPr>
-        <p:spPr>
-          <a:xfrm>
-            <a:off x="6289243" y="2352751"/>
-            <a:ext cx="5332781" cy="374904"/>
-          </a:xfrm>
-          <a:prstGeom prst="rect">
-            <a:avLst/>
-          </a:prstGeom>
-          <a:noFill/>
-          <a:ln/>
-        </p:spPr>
-        <p:txBody>
-          <a:bodyPr wrap="square" lIns="0" tIns="0" rIns="0" bIns="0" rtlCol="0" anchor="t"/>
-          <a:lstStyle/>
-          <a:p>
-            <a:pPr algn="l" indent="0" marL="0">
-              <a:buNone/>
-            </a:pPr>
-            <a:r>
-              <a:rPr lang="ja-JP" altLang="en-US" sz="2200" dirty="0">
-                <a:solidFill>
-                  <a:srgbClr val="262626"/>
-                </a:solidFill>
-                <a:latin typeface="メイリオ" pitchFamily="34" charset="0"/>
-                <a:ea typeface="メイリオ" pitchFamily="34" charset="-122"/>
-                <a:cs typeface="メイリオ" pitchFamily="34" charset="-120"/>
-              </a:rPr>
-              <a:t>見当識、睡眠、早期離床、</a:t>
-            </a:r>
-            <a:endParaRPr lang="ja-JP" sz="2200" dirty="0"/>
-          </a:p>
-        </p:txBody>
-      </p:sp>
-      <p:sp>
-        <p:nvSpPr>
-          <p:cNvPr id="33" name="Text 31"/>
-          <p:cNvSpPr txBox="1"/>
-          <p:nvPr/>
-        </p:nvSpPr>
-        <p:spPr>
-          <a:xfrm>
-            <a:off x="6289243" y="2659990"/>
-            <a:ext cx="5332781" cy="374904"/>
-          </a:xfrm>
-          <a:prstGeom prst="rect">
-            <a:avLst/>
-          </a:prstGeom>
-          <a:noFill/>
-          <a:ln/>
-        </p:spPr>
-        <p:txBody>
-          <a:bodyPr wrap="square" lIns="0" tIns="0" rIns="0" bIns="0" rtlCol="0" anchor="t"/>
-          <a:lstStyle/>
-          <a:p>
-            <a:pPr algn="l" indent="0" marL="0">
-              <a:buNone/>
-            </a:pPr>
-            <a:r>
-              <a:rPr lang="ja-JP" altLang="en-US" sz="2200" dirty="0">
-                <a:solidFill>
-                  <a:srgbClr val="262626"/>
-                </a:solidFill>
-                <a:latin typeface="メイリオ" pitchFamily="34" charset="0"/>
-                <a:ea typeface="メイリオ" pitchFamily="34" charset="-122"/>
-                <a:cs typeface="メイリオ" pitchFamily="34" charset="-120"/>
-              </a:rPr>
-              <a:t>眼鏡・補聴器、水分・栄養、鎮痛、</a:t>
-            </a:r>
-            <a:endParaRPr lang="ja-JP" sz="2200" dirty="0"/>
-          </a:p>
-        </p:txBody>
-      </p:sp>
-      <p:sp>
-        <p:nvSpPr>
-          <p:cNvPr id="34" name="Text 32"/>
-          <p:cNvSpPr txBox="1"/>
-          <p:nvPr/>
-        </p:nvSpPr>
-        <p:spPr>
-          <a:xfrm>
-            <a:off x="6289243" y="2967228"/>
-            <a:ext cx="5332781" cy="374904"/>
-          </a:xfrm>
-          <a:prstGeom prst="rect">
-            <a:avLst/>
-          </a:prstGeom>
-          <a:noFill/>
-          <a:ln/>
-        </p:spPr>
-        <p:txBody>
-          <a:bodyPr wrap="square" lIns="0" tIns="0" rIns="0" bIns="0" rtlCol="0" anchor="t"/>
-          <a:lstStyle/>
-          <a:p>
-            <a:pPr algn="l" indent="0" marL="0">
-              <a:buNone/>
-            </a:pPr>
-            <a:r>
-              <a:rPr lang="ja-JP" altLang="en-US" sz="2200" dirty="0">
-                <a:solidFill>
-                  <a:srgbClr val="262626"/>
-                </a:solidFill>
-                <a:latin typeface="メイリオ" pitchFamily="34" charset="0"/>
-                <a:ea typeface="メイリオ" pitchFamily="34" charset="-122"/>
-                <a:cs typeface="メイリオ" pitchFamily="34" charset="-120"/>
-              </a:rPr>
-              <a:t>薬の見直し、酸素化、便秘</a:t>
-            </a:r>
-            <a:endParaRPr lang="ja-JP" sz="2200" dirty="0"/>
-          </a:p>
-        </p:txBody>
-      </p:sp>
-      <p:sp>
-        <p:nvSpPr>
-          <p:cNvPr id="35" name="Shape 33"/>
-          <p:cNvSpPr/>
-          <p:nvPr/>
-        </p:nvSpPr>
-        <p:spPr>
-          <a:xfrm>
-            <a:off x="6133795" y="3403397"/>
-            <a:ext cx="91440" cy="91440"/>
-          </a:xfrm>
-          <a:prstGeom prst="ellipse">
-            <a:avLst/>
-          </a:prstGeom>
-          <a:solidFill>
-            <a:srgbClr val="D55E00"/>
-          </a:solidFill>
-          <a:ln/>
-        </p:spPr>
-      </p:sp>
-      <p:sp>
-        <p:nvSpPr>
-          <p:cNvPr id="36" name="Text 34"/>
-          <p:cNvSpPr txBox="1"/>
-          <p:nvPr/>
-        </p:nvSpPr>
-        <p:spPr>
-          <a:xfrm>
-            <a:off x="6289243" y="3275381"/>
-            <a:ext cx="5332781" cy="374904"/>
-          </a:xfrm>
-          <a:prstGeom prst="rect">
-            <a:avLst/>
-          </a:prstGeom>
-          <a:noFill/>
-          <a:ln/>
-        </p:spPr>
-        <p:txBody>
-          <a:bodyPr wrap="square" lIns="0" tIns="0" rIns="0" bIns="0" rtlCol="0" anchor="t"/>
-          <a:lstStyle/>
-          <a:p>
-            <a:pPr algn="l" indent="0" marL="0">
-              <a:buNone/>
-            </a:pPr>
-            <a:r>
-              <a:rPr lang="ja-JP" altLang="en-US" sz="2200" dirty="0">
-                <a:solidFill>
-                  <a:srgbClr val="262626"/>
-                </a:solidFill>
-                <a:latin typeface="メイリオ" pitchFamily="34" charset="0"/>
-                <a:ea typeface="メイリオ" pitchFamily="34" charset="-122"/>
-                <a:cs typeface="メイリオ" pitchFamily="34" charset="-120"/>
-              </a:rPr>
-              <a:t>せん妄のオッズ </a:t>
-            </a:r>
-            <a:r>
-              <a:rPr lang="ja-JP" altLang="en-US" sz="2200" b="1" dirty="0">
-                <a:solidFill>
-                  <a:srgbClr val="D55E00"/>
-                </a:solidFill>
-                <a:latin typeface="メイリオ" pitchFamily="34" charset="0"/>
-                <a:ea typeface="メイリオ" pitchFamily="34" charset="-122"/>
-                <a:cs typeface="メイリオ" pitchFamily="34" charset="-120"/>
-              </a:rPr>
-              <a:t>44% 減</a:t>
-            </a:r>
-            <a:r>
-              <a:rPr lang="ja-JP" altLang="en-US" sz="2200" dirty="0">
-                <a:solidFill>
-                  <a:srgbClr val="262626"/>
-                </a:solidFill>
-                <a:latin typeface="メイリオ" pitchFamily="34" charset="0"/>
-                <a:ea typeface="メイリオ" pitchFamily="34" charset="-122"/>
-                <a:cs typeface="メイリオ" pitchFamily="34" charset="-120"/>
-              </a:rPr>
-              <a:t>（メタ解析）</a:t>
-            </a:r>
-            <a:endParaRPr lang="ja-JP" sz="2200" dirty="0"/>
-          </a:p>
-        </p:txBody>
-      </p:sp>
-      <p:sp>
-        <p:nvSpPr>
-          <p:cNvPr id="37" name="Shape 35"/>
-          <p:cNvSpPr/>
-          <p:nvPr/>
-        </p:nvSpPr>
-        <p:spPr>
-          <a:xfrm>
-            <a:off x="6133795" y="3711550"/>
-            <a:ext cx="91440" cy="91440"/>
-          </a:xfrm>
-          <a:prstGeom prst="ellipse">
-            <a:avLst/>
-          </a:prstGeom>
-          <a:solidFill>
-            <a:srgbClr val="D55E00"/>
-          </a:solidFill>
-          <a:ln/>
-        </p:spPr>
-      </p:sp>
-      <p:sp>
-        <p:nvSpPr>
-          <p:cNvPr id="38" name="Text 36"/>
-          <p:cNvSpPr txBox="1"/>
-          <p:nvPr/>
-        </p:nvSpPr>
-        <p:spPr>
-          <a:xfrm>
-            <a:off x="6289243" y="3583534"/>
-            <a:ext cx="5332781" cy="374904"/>
-          </a:xfrm>
-          <a:prstGeom prst="rect">
-            <a:avLst/>
-          </a:prstGeom>
-          <a:noFill/>
-          <a:ln/>
-        </p:spPr>
-        <p:txBody>
-          <a:bodyPr wrap="square" lIns="0" tIns="0" rIns="0" bIns="0" rtlCol="0" anchor="t"/>
-          <a:lstStyle/>
-          <a:p>
-            <a:pPr algn="l" indent="0" marL="0">
-              <a:buNone/>
-            </a:pPr>
-            <a:r>
-              <a:rPr lang="ja-JP" altLang="en-US" sz="2200" dirty="0">
-                <a:solidFill>
-                  <a:srgbClr val="262626"/>
-                </a:solidFill>
-                <a:latin typeface="メイリオ" pitchFamily="34" charset="0"/>
-                <a:ea typeface="メイリオ" pitchFamily="34" charset="-122"/>
-                <a:cs typeface="メイリオ" pitchFamily="34" charset="-120"/>
-              </a:rPr>
-              <a:t>老年科医の関与 </a:t>
-            </a:r>
-            <a:r>
-              <a:rPr lang="ja-JP" altLang="en-US" sz="2200" b="1" dirty="0">
-                <a:solidFill>
-                  <a:srgbClr val="D55E00"/>
-                </a:solidFill>
-                <a:latin typeface="メイリオ" pitchFamily="34" charset="0"/>
-                <a:ea typeface="メイリオ" pitchFamily="34" charset="-122"/>
-                <a:cs typeface="メイリオ" pitchFamily="34" charset="-120"/>
-              </a:rPr>
-              <a:t>32% 対 50%</a:t>
-            </a:r>
-            <a:r>
-              <a:rPr lang="ja-JP" altLang="en-US" sz="2200" dirty="0">
-                <a:solidFill>
-                  <a:srgbClr val="262626"/>
-                </a:solidFill>
-                <a:latin typeface="メイリオ" pitchFamily="34" charset="0"/>
-                <a:ea typeface="メイリオ" pitchFamily="34" charset="-122"/>
-                <a:cs typeface="メイリオ" pitchFamily="34" charset="-120"/>
-              </a:rPr>
-              <a:t>（骨折）</a:t>
-            </a:r>
-            <a:endParaRPr lang="ja-JP" sz="2200" dirty="0"/>
-          </a:p>
-        </p:txBody>
-      </p:sp>
-      <p:sp>
-        <p:nvSpPr>
-          <p:cNvPr id="39" name="Shape 37"/>
-          <p:cNvSpPr/>
-          <p:nvPr/>
-        </p:nvSpPr>
-        <p:spPr>
-          <a:xfrm>
-            <a:off x="6133795" y="4019702"/>
-            <a:ext cx="91440" cy="91440"/>
-          </a:xfrm>
-          <a:prstGeom prst="ellipse">
-            <a:avLst/>
-          </a:prstGeom>
-          <a:solidFill>
-            <a:srgbClr val="D55E00"/>
-          </a:solidFill>
-          <a:ln/>
-        </p:spPr>
-      </p:sp>
-      <p:sp>
-        <p:nvSpPr>
-          <p:cNvPr id="40" name="Text 38"/>
-          <p:cNvSpPr txBox="1"/>
-          <p:nvPr/>
-        </p:nvSpPr>
-        <p:spPr>
-          <a:xfrm>
-            <a:off x="6289243" y="3891686"/>
-            <a:ext cx="5332781" cy="374904"/>
-          </a:xfrm>
-          <a:prstGeom prst="rect">
-            <a:avLst/>
-          </a:prstGeom>
-          <a:noFill/>
-          <a:ln/>
-        </p:spPr>
-        <p:txBody>
-          <a:bodyPr wrap="square" lIns="0" tIns="0" rIns="0" bIns="0" rtlCol="0" anchor="t"/>
-          <a:lstStyle/>
-          <a:p>
-            <a:pPr algn="l" indent="0" marL="0">
-              <a:buNone/>
-            </a:pPr>
-            <a:r>
-              <a:rPr lang="ja-JP" altLang="en-US" sz="2200" b="1" u="sng" dirty="0">
-                <a:solidFill>
-                  <a:srgbClr val="C00000"/>
-                </a:solidFill>
-                <a:latin typeface="メイリオ" pitchFamily="34" charset="0"/>
-                <a:ea typeface="メイリオ" pitchFamily="34" charset="-122"/>
-                <a:cs typeface="メイリオ" pitchFamily="34" charset="-120"/>
-              </a:rPr>
-              <a:t>予防薬は勧めない</a:t>
-            </a:r>
-            <a:r>
-              <a:rPr lang="ja-JP" altLang="en-US" sz="2200" dirty="0">
-                <a:solidFill>
-                  <a:srgbClr val="262626"/>
-                </a:solidFill>
-                <a:latin typeface="メイリオ" pitchFamily="34" charset="0"/>
-                <a:ea typeface="メイリオ" pitchFamily="34" charset="-122"/>
-                <a:cs typeface="メイリオ" pitchFamily="34" charset="-120"/>
-              </a:rPr>
-              <a:t>（ESAIC 弱）。</a:t>
-            </a:r>
-            <a:endParaRPr lang="ja-JP" sz="2200" dirty="0"/>
-          </a:p>
-        </p:txBody>
-      </p:sp>
-      <p:sp>
-        <p:nvSpPr>
-          <p:cNvPr id="41" name="Text 39"/>
-          <p:cNvSpPr txBox="1"/>
-          <p:nvPr/>
-        </p:nvSpPr>
-        <p:spPr>
-          <a:xfrm>
-            <a:off x="6289243" y="4198925"/>
-            <a:ext cx="5332781" cy="374904"/>
-          </a:xfrm>
-          <a:prstGeom prst="rect">
-            <a:avLst/>
-          </a:prstGeom>
-          <a:noFill/>
-          <a:ln/>
-        </p:spPr>
-        <p:txBody>
-          <a:bodyPr wrap="square" lIns="0" tIns="0" rIns="0" bIns="0" rtlCol="0" anchor="t"/>
-          <a:lstStyle/>
-          <a:p>
-            <a:pPr algn="l" indent="0" marL="0">
-              <a:buNone/>
-            </a:pPr>
-            <a:r>
-              <a:rPr lang="ja-JP" altLang="en-US" sz="2200" dirty="0">
-                <a:solidFill>
-                  <a:srgbClr val="262626"/>
-                </a:solidFill>
-                <a:latin typeface="メイリオ" pitchFamily="34" charset="0"/>
-                <a:ea typeface="メイリオ" pitchFamily="34" charset="-122"/>
-                <a:cs typeface="メイリオ" pitchFamily="34" charset="-120"/>
-              </a:rPr>
-              <a:t>抗精神病薬は根拠不十分、</a:t>
-            </a:r>
-            <a:endParaRPr lang="ja-JP" sz="2200" dirty="0"/>
-          </a:p>
-        </p:txBody>
-      </p:sp>
-      <p:sp>
-        <p:nvSpPr>
-          <p:cNvPr id="42" name="Text 40"/>
-          <p:cNvSpPr txBox="1"/>
-          <p:nvPr/>
-        </p:nvSpPr>
-        <p:spPr>
-          <a:xfrm>
-            <a:off x="6289243" y="4507078"/>
-            <a:ext cx="5332781" cy="374904"/>
-          </a:xfrm>
-          <a:prstGeom prst="rect">
-            <a:avLst/>
-          </a:prstGeom>
-          <a:noFill/>
-          <a:ln/>
-        </p:spPr>
-        <p:txBody>
-          <a:bodyPr wrap="square" lIns="0" tIns="0" rIns="0" bIns="0" rtlCol="0" anchor="t"/>
-          <a:lstStyle/>
-          <a:p>
-            <a:pPr algn="l" indent="0" marL="0">
-              <a:buNone/>
-            </a:pPr>
-            <a:r>
-              <a:rPr lang="ja-JP" altLang="en-US" sz="2200" dirty="0">
-                <a:solidFill>
-                  <a:srgbClr val="262626"/>
-                </a:solidFill>
-                <a:latin typeface="メイリオ" pitchFamily="34" charset="0"/>
-                <a:ea typeface="メイリオ" pitchFamily="34" charset="-122"/>
-                <a:cs typeface="メイリオ" pitchFamily="34" charset="-120"/>
-              </a:rPr>
-              <a:t>コリンエステラーゼ阻害薬は</a:t>
-            </a:r>
-            <a:endParaRPr lang="ja-JP" sz="2200" dirty="0"/>
-          </a:p>
-        </p:txBody>
-      </p:sp>
-      <p:sp>
-        <p:nvSpPr>
-          <p:cNvPr id="43" name="Text 41"/>
-          <p:cNvSpPr txBox="1"/>
-          <p:nvPr/>
-        </p:nvSpPr>
-        <p:spPr>
-          <a:xfrm>
-            <a:off x="6289243" y="4814316"/>
-            <a:ext cx="5332781" cy="374904"/>
-          </a:xfrm>
-          <a:prstGeom prst="rect">
-            <a:avLst/>
-          </a:prstGeom>
-          <a:noFill/>
-          <a:ln/>
-        </p:spPr>
-        <p:txBody>
-          <a:bodyPr wrap="square" lIns="0" tIns="0" rIns="0" bIns="0" rtlCol="0" anchor="t"/>
-          <a:lstStyle/>
-          <a:p>
-            <a:pPr algn="l" indent="0" marL="0">
-              <a:buNone/>
-            </a:pPr>
-            <a:r>
-              <a:rPr lang="ja-JP" altLang="en-US" sz="2200" dirty="0">
-                <a:solidFill>
-                  <a:srgbClr val="262626"/>
-                </a:solidFill>
-                <a:latin typeface="メイリオ" pitchFamily="34" charset="0"/>
-                <a:ea typeface="メイリオ" pitchFamily="34" charset="-122"/>
-                <a:cs typeface="メイリオ" pitchFamily="34" charset="-120"/>
-              </a:rPr>
-              <a:t>始めない（AGS 強）</a:t>
-            </a:r>
-            <a:endParaRPr lang="ja-JP" sz="2200" dirty="0"/>
+              <a:t>低活動型</a:t>
+            </a:r>
+            <a:r>
+              <a:rPr lang="ja-JP" altLang="en-US" sz="2800" b="1" dirty="0">
+                <a:solidFill>
+                  <a:srgbClr val="262626"/>
+                </a:solidFill>
+                <a:latin typeface="メイリオ" pitchFamily="34" charset="0"/>
+                <a:ea typeface="メイリオ" pitchFamily="34" charset="-122"/>
+                <a:cs typeface="メイリオ" pitchFamily="34" charset="-120"/>
+              </a:rPr>
+              <a:t>は見逃される。</a:t>
+            </a:r>
+            <a:endParaRPr lang="ja-JP" sz="2800" dirty="0"/>
+          </a:p>
+          <a:p>
+            <a:pPr algn="ctr" indent="0" marL="0">
+              <a:buNone/>
+            </a:pPr>
+            <a:r>
+              <a:rPr lang="ja-JP" altLang="en-US" sz="2800" b="1" dirty="0">
+                <a:solidFill>
+                  <a:srgbClr val="262626"/>
+                </a:solidFill>
+                <a:latin typeface="メイリオ" pitchFamily="34" charset="0"/>
+                <a:ea typeface="メイリオ" pitchFamily="34" charset="-122"/>
+                <a:cs typeface="メイリオ" pitchFamily="34" charset="-120"/>
+              </a:rPr>
+              <a:t>回復室を出る前と病棟でスクリーニングする</a:t>
+            </a:r>
+            <a:endParaRPr lang="ja-JP" sz="2800" dirty="0"/>
           </a:p>
         </p:txBody>
       </p:sp>
@@ -7399,7 +7390,7 @@
                 <a:ea typeface="メイリオ" pitchFamily="34" charset="-122"/>
                 <a:cs typeface="メイリオ" pitchFamily="34" charset="-120"/>
               </a:rPr>
-              <a:t>避ける薬と麻酔の調節</a:t>
+              <a:t>術後せん妄：予防</a:t>
             </a:r>
             <a:endParaRPr lang="ja-JP" sz="4400" dirty="0"/>
           </a:p>
@@ -7548,7 +7539,7 @@
             </a:avLst>
           </a:prstGeom>
           <a:solidFill>
-            <a:srgbClr val="D9D9D9"/>
+            <a:srgbClr val="00A8AA"/>
           </a:solidFill>
           <a:ln/>
         </p:spPr>
@@ -7560,9 +7551,9 @@
               <a:buNone/>
             </a:pPr>
             <a:r>
-              <a:rPr lang="ja-JP" altLang="en-US" sz="1050" dirty="0">
-                <a:solidFill>
-                  <a:srgbClr val="404040"/>
+              <a:rPr lang="ja-JP" altLang="en-US" sz="1050" b="1" dirty="0">
+                <a:solidFill>
+                  <a:srgbClr val="FFFFFF"/>
                 </a:solidFill>
                 <a:latin typeface="メイリオ" pitchFamily="34" charset="0"/>
                 <a:ea typeface="メイリオ" pitchFamily="34" charset="-122"/>
@@ -7591,7 +7582,7 @@
             </a:avLst>
           </a:prstGeom>
           <a:solidFill>
-            <a:srgbClr val="00A8AA"/>
+            <a:srgbClr val="D9D9D9"/>
           </a:solidFill>
           <a:ln/>
         </p:spPr>
@@ -7603,9 +7594,9 @@
               <a:buNone/>
             </a:pPr>
             <a:r>
-              <a:rPr lang="ja-JP" altLang="en-US" sz="1050" b="1" dirty="0">
-                <a:solidFill>
-                  <a:srgbClr val="FFFFFF"/>
+              <a:rPr lang="ja-JP" altLang="en-US" sz="1050" dirty="0">
+                <a:solidFill>
+                  <a:srgbClr val="404040"/>
                 </a:solidFill>
                 <a:latin typeface="メイリオ" pitchFamily="34" charset="0"/>
                 <a:ea typeface="メイリオ" pitchFamily="34" charset="-122"/>
@@ -7620,9 +7611,9 @@
               <a:buNone/>
             </a:pPr>
             <a:r>
-              <a:rPr lang="ja-JP" altLang="en-US" sz="1050" b="1" dirty="0">
-                <a:solidFill>
-                  <a:srgbClr val="FFFFFF"/>
+              <a:rPr lang="ja-JP" altLang="en-US" sz="1050" dirty="0">
+                <a:solidFill>
+                  <a:srgbClr val="404040"/>
                 </a:solidFill>
                 <a:latin typeface="メイリオ" pitchFamily="34" charset="0"/>
                 <a:ea typeface="メイリオ" pitchFamily="34" charset="-122"/>
@@ -7749,7 +7740,7 @@
                 <a:ea typeface="メイリオ" pitchFamily="34" charset="-122"/>
                 <a:cs typeface="メイリオ" pitchFamily="34" charset="-120"/>
               </a:rPr>
-              <a:t>2023 AGS Beers Criteria Update Expert Panel. J Am Geriatr Soc 2023;71:2052-2081 / Berger</a:t>
+              <a:t>American Geriatrics Society. J Am Geriatr Soc 2015;63:142-150 / Aldecoa C, et al.</a:t>
             </a:r>
             <a:endParaRPr lang="ja-JP" sz="1600" dirty="0"/>
           </a:p>
@@ -7766,7 +7757,7 @@
                 <a:ea typeface="メイリオ" pitchFamily="34" charset="-122"/>
                 <a:cs typeface="メイリオ" pitchFamily="34" charset="-120"/>
               </a:rPr>
-              <a:t>M, et al. Anesth Analg 2018;127:1406-1413 / Mapleson WW. Br J Anaesth 1996;76:179-185</a:t>
+              <a:t>Eur J Anaesthesiol 2024;41:81-108 / Hshieh TT, et al. JAMA Intern Med 2015;175:512-520</a:t>
             </a:r>
             <a:endParaRPr lang="ja-JP" sz="1600" dirty="0"/>
           </a:p>
@@ -7774,18 +7765,272 @@
       </p:sp>
       <p:sp>
         <p:nvSpPr>
-          <p:cNvPr id="11" name="Shape 9"/>
+          <p:cNvPr id="11" name="Text 9"/>
+          <p:cNvSpPr txBox="1"/>
+          <p:nvPr/>
+        </p:nvSpPr>
+        <p:spPr>
+          <a:xfrm>
+            <a:off x="502920" y="1691640"/>
+            <a:ext cx="11155680" cy="3383280"/>
+          </a:xfrm>
+          <a:prstGeom prst="rect">
+            <a:avLst/>
+          </a:prstGeom>
+          <a:noFill/>
+          <a:ln/>
+        </p:spPr>
+        <p:txBody>
+          <a:bodyPr wrap="square" lIns="0" tIns="0" rIns="0" bIns="0" rtlCol="0" anchor="t"/>
+          <a:lstStyle/>
+          <a:p>
+            <a:pPr algn="l" marL="355600" indent="-355600">
+              <a:spcAft>
+                <a:spcPts val="1000"/>
+              </a:spcAft>
+              <a:buClr>
+                <a:srgbClr val="262626"/>
+              </a:buClr>
+              <a:buSzPct val="100000"/>
+              <a:buChar char="•"/>
+            </a:pPr>
+            <a:r>
+              <a:rPr lang="ja-JP" altLang="en-US" sz="2400" b="1" dirty="0">
+                <a:solidFill>
+                  <a:srgbClr val="0072B2"/>
+                </a:solidFill>
+                <a:latin typeface="メイリオ" pitchFamily="34" charset="0"/>
+                <a:ea typeface="メイリオ" pitchFamily="34" charset="-122"/>
+                <a:cs typeface="メイリオ" pitchFamily="34" charset="-120"/>
+              </a:rPr>
+              <a:t>多因子の非薬物的介入</a:t>
+            </a:r>
+            <a:r>
+              <a:rPr lang="ja-JP" altLang="en-US" sz="2400" dirty="0">
+                <a:solidFill>
+                  <a:srgbClr val="262626"/>
+                </a:solidFill>
+                <a:latin typeface="メイリオ" pitchFamily="34" charset="0"/>
+                <a:ea typeface="メイリオ" pitchFamily="34" charset="-122"/>
+                <a:cs typeface="メイリオ" pitchFamily="34" charset="-120"/>
+              </a:rPr>
+              <a:t>（AGS 2015・ESAIC 2024 とも強い推奨）</a:t>
+            </a:r>
+            <a:endParaRPr lang="ja-JP" sz="2400" dirty="0"/>
+          </a:p>
+          <a:p>
+            <a:pPr algn="l" marL="355600" indent="-355600">
+              <a:spcAft>
+                <a:spcPts val="1000"/>
+              </a:spcAft>
+              <a:buClr>
+                <a:srgbClr val="262626"/>
+              </a:buClr>
+              <a:buSzPct val="100000"/>
+              <a:buChar char="•"/>
+            </a:pPr>
+            <a:r>
+              <a:rPr lang="ja-JP" altLang="en-US" sz="2400" dirty="0">
+                <a:solidFill>
+                  <a:srgbClr val="262626"/>
+                </a:solidFill>
+                <a:latin typeface="メイリオ" pitchFamily="34" charset="0"/>
+                <a:ea typeface="メイリオ" pitchFamily="34" charset="-122"/>
+                <a:cs typeface="メイリオ" pitchFamily="34" charset="-120"/>
+              </a:rPr>
+              <a:t>見当識、睡眠、早期離床、眼鏡・補聴器、水分・栄養、鎮痛</a:t>
+            </a:r>
+            <a:endParaRPr lang="ja-JP" sz="2400" dirty="0"/>
+          </a:p>
+          <a:p>
+            <a:pPr algn="l" marL="355600" indent="-355600">
+              <a:spcAft>
+                <a:spcPts val="1000"/>
+              </a:spcAft>
+              <a:buClr>
+                <a:srgbClr val="262626"/>
+              </a:buClr>
+              <a:buSzPct val="100000"/>
+              <a:buChar char="•"/>
+            </a:pPr>
+            <a:r>
+              <a:rPr lang="ja-JP" altLang="en-US" sz="2400" dirty="0">
+                <a:solidFill>
+                  <a:srgbClr val="262626"/>
+                </a:solidFill>
+                <a:latin typeface="メイリオ" pitchFamily="34" charset="0"/>
+                <a:ea typeface="メイリオ" pitchFamily="34" charset="-122"/>
+                <a:cs typeface="メイリオ" pitchFamily="34" charset="-120"/>
+              </a:rPr>
+              <a:t>薬の見直し、酸素化、便秘。せん妄のオッズ </a:t>
+            </a:r>
+            <a:r>
+              <a:rPr lang="ja-JP" altLang="en-US" sz="2400" b="1" dirty="0">
+                <a:solidFill>
+                  <a:srgbClr val="0072B2"/>
+                </a:solidFill>
+                <a:latin typeface="メイリオ" pitchFamily="34" charset="0"/>
+                <a:ea typeface="メイリオ" pitchFamily="34" charset="-122"/>
+                <a:cs typeface="メイリオ" pitchFamily="34" charset="-120"/>
+              </a:rPr>
+              <a:t>44% 減</a:t>
+            </a:r>
+            <a:r>
+              <a:rPr lang="ja-JP" altLang="en-US" sz="2400" dirty="0">
+                <a:solidFill>
+                  <a:srgbClr val="262626"/>
+                </a:solidFill>
+                <a:latin typeface="メイリオ" pitchFamily="34" charset="0"/>
+                <a:ea typeface="メイリオ" pitchFamily="34" charset="-122"/>
+                <a:cs typeface="メイリオ" pitchFamily="34" charset="-120"/>
+              </a:rPr>
+              <a:t>（メタ解析）</a:t>
+            </a:r>
+            <a:endParaRPr lang="ja-JP" sz="2400" dirty="0"/>
+          </a:p>
+          <a:p>
+            <a:pPr algn="l" marL="355600" indent="-355600">
+              <a:spcAft>
+                <a:spcPts val="1000"/>
+              </a:spcAft>
+              <a:buClr>
+                <a:srgbClr val="262626"/>
+              </a:buClr>
+              <a:buSzPct val="100000"/>
+              <a:buChar char="•"/>
+            </a:pPr>
+            <a:r>
+              <a:rPr lang="ja-JP" altLang="en-US" sz="2400" dirty="0">
+                <a:solidFill>
+                  <a:srgbClr val="262626"/>
+                </a:solidFill>
+                <a:latin typeface="メイリオ" pitchFamily="34" charset="0"/>
+                <a:ea typeface="メイリオ" pitchFamily="34" charset="-122"/>
+                <a:cs typeface="メイリオ" pitchFamily="34" charset="-120"/>
+              </a:rPr>
+              <a:t>老年科医の関与でせん妄 </a:t>
+            </a:r>
+            <a:r>
+              <a:rPr lang="ja-JP" altLang="en-US" sz="2400" b="1" dirty="0">
+                <a:solidFill>
+                  <a:srgbClr val="0072B2"/>
+                </a:solidFill>
+                <a:latin typeface="メイリオ" pitchFamily="34" charset="0"/>
+                <a:ea typeface="メイリオ" pitchFamily="34" charset="-122"/>
+                <a:cs typeface="メイリオ" pitchFamily="34" charset="-120"/>
+              </a:rPr>
+              <a:t>32% 対 50%</a:t>
+            </a:r>
+            <a:r>
+              <a:rPr lang="ja-JP" altLang="en-US" sz="2400" dirty="0">
+                <a:solidFill>
+                  <a:srgbClr val="262626"/>
+                </a:solidFill>
+                <a:latin typeface="メイリオ" pitchFamily="34" charset="0"/>
+                <a:ea typeface="メイリオ" pitchFamily="34" charset="-122"/>
+                <a:cs typeface="メイリオ" pitchFamily="34" charset="-120"/>
+              </a:rPr>
+              <a:t>（大腿骨近位部骨折）</a:t>
+            </a:r>
+            <a:endParaRPr lang="ja-JP" sz="2400" dirty="0"/>
+          </a:p>
+          <a:p>
+            <a:pPr algn="l" marL="355600" indent="-355600">
+              <a:spcAft>
+                <a:spcPts val="1000"/>
+              </a:spcAft>
+              <a:buClr>
+                <a:srgbClr val="262626"/>
+              </a:buClr>
+              <a:buSzPct val="100000"/>
+              <a:buChar char="•"/>
+            </a:pPr>
+            <a:r>
+              <a:rPr lang="ja-JP" altLang="en-US" sz="2400" b="1" u="sng" dirty="0">
+                <a:solidFill>
+                  <a:srgbClr val="C00000"/>
+                </a:solidFill>
+                <a:latin typeface="メイリオ" pitchFamily="34" charset="0"/>
+                <a:ea typeface="メイリオ" pitchFamily="34" charset="-122"/>
+                <a:cs typeface="メイリオ" pitchFamily="34" charset="-120"/>
+              </a:rPr>
+              <a:t>予防薬は勧めない</a:t>
+            </a:r>
+            <a:r>
+              <a:rPr lang="ja-JP" altLang="en-US" sz="2400" dirty="0">
+                <a:solidFill>
+                  <a:srgbClr val="262626"/>
+                </a:solidFill>
+                <a:latin typeface="メイリオ" pitchFamily="34" charset="0"/>
+                <a:ea typeface="メイリオ" pitchFamily="34" charset="-122"/>
+                <a:cs typeface="メイリオ" pitchFamily="34" charset="-120"/>
+              </a:rPr>
+              <a:t>（ESAIC）。抗精神病薬の予防投与は根拠不十分</a:t>
+            </a:r>
+            <a:endParaRPr lang="ja-JP" sz="2400" dirty="0"/>
+          </a:p>
+          <a:p>
+            <a:pPr algn="l" marL="355600" indent="-355600">
+              <a:spcAft>
+                <a:spcPts val="1000"/>
+              </a:spcAft>
+              <a:buClr>
+                <a:srgbClr val="262626"/>
+              </a:buClr>
+              <a:buSzPct val="100000"/>
+              <a:buChar char="•"/>
+            </a:pPr>
+            <a:r>
+              <a:rPr lang="ja-JP" altLang="en-US" sz="2400" dirty="0">
+                <a:solidFill>
+                  <a:srgbClr val="262626"/>
+                </a:solidFill>
+                <a:latin typeface="メイリオ" pitchFamily="34" charset="0"/>
+                <a:ea typeface="メイリオ" pitchFamily="34" charset="-122"/>
+                <a:cs typeface="メイリオ" pitchFamily="34" charset="-120"/>
+              </a:rPr>
+              <a:t>コリンエステラーゼ阻害薬を予防のために</a:t>
+            </a:r>
+            <a:r>
+              <a:rPr lang="ja-JP" altLang="en-US" sz="2400" b="1" u="sng" dirty="0">
+                <a:solidFill>
+                  <a:srgbClr val="C00000"/>
+                </a:solidFill>
+                <a:latin typeface="メイリオ" pitchFamily="34" charset="0"/>
+                <a:ea typeface="メイリオ" pitchFamily="34" charset="-122"/>
+                <a:cs typeface="メイリオ" pitchFamily="34" charset="-120"/>
+              </a:rPr>
+              <a:t>新しく始めない</a:t>
+            </a:r>
+            <a:r>
+              <a:rPr lang="ja-JP" altLang="en-US" sz="2400" dirty="0">
+                <a:solidFill>
+                  <a:srgbClr val="262626"/>
+                </a:solidFill>
+                <a:latin typeface="メイリオ" pitchFamily="34" charset="0"/>
+                <a:ea typeface="メイリオ" pitchFamily="34" charset="-122"/>
+                <a:cs typeface="メイリオ" pitchFamily="34" charset="-120"/>
+              </a:rPr>
+              <a:t>（AGS 強）</a:t>
+            </a:r>
+            <a:endParaRPr lang="ja-JP" sz="2400" dirty="0"/>
+          </a:p>
+        </p:txBody>
+      </p:sp>
+      <p:sp>
+        <p:nvSpPr>
+          <p:cNvPr id="12" name="Text 10"/>
           <p:cNvSpPr/>
           <p:nvPr/>
         </p:nvSpPr>
         <p:spPr>
           <a:xfrm>
-            <a:off x="502920" y="5158130"/>
-            <a:ext cx="11183112" cy="730606"/>
+            <a:off x="502920" y="5358384"/>
+            <a:ext cx="11183112" cy="530352"/>
           </a:xfrm>
           <a:prstGeom prst="roundRect">
             <a:avLst>
-              <a:gd name="adj" fmla="val 12516"/>
+              <a:gd name="adj" fmla="val 17241"/>
             </a:avLst>
           </a:prstGeom>
           <a:solidFill>
@@ -7795,97 +8040,28 @@
             <a:solidFill>
               <a:srgbClr val="00A8AA"/>
             </a:solidFill>
-            <a:prstDash val="solid"/>
           </a:ln>
         </p:spPr>
-      </p:sp>
-      <p:sp>
-        <p:nvSpPr>
-          <p:cNvPr id="12" name="Text 10"/>
-          <p:cNvSpPr txBox="1"/>
-          <p:nvPr/>
-        </p:nvSpPr>
-        <p:spPr>
-          <a:xfrm>
-            <a:off x="640080" y="5182819"/>
-            <a:ext cx="10908792" cy="374904"/>
-          </a:xfrm>
-          <a:prstGeom prst="rect">
-            <a:avLst/>
-          </a:prstGeom>
-          <a:noFill/>
-          <a:ln/>
-        </p:spPr>
-        <p:txBody>
-          <a:bodyPr wrap="square" lIns="0" tIns="0" rIns="0" bIns="0" rtlCol="0" anchor="t"/>
+        <p:txBody>
+          <a:bodyPr wrap="square" lIns="73152" tIns="73152" rIns="73152" bIns="73152" rtlCol="0" anchor="ctr"/>
           <a:lstStyle/>
           <a:p>
             <a:pPr algn="ctr" indent="0" marL="0">
               <a:buNone/>
             </a:pPr>
             <a:r>
-              <a:rPr lang="ja-JP" altLang="en-US" sz="2200" b="1" dirty="0">
-                <a:solidFill>
-                  <a:srgbClr val="262626"/>
-                </a:solidFill>
-                <a:latin typeface="メイリオ" pitchFamily="34" charset="0"/>
-                <a:ea typeface="メイリオ" pitchFamily="34" charset="-122"/>
-                <a:cs typeface="メイリオ" pitchFamily="34" charset="-120"/>
-              </a:rPr>
-              <a:t>常用薬 </a:t>
-            </a:r>
-            <a:r>
-              <a:rPr lang="ja-JP" altLang="en-US" sz="2200" b="1" dirty="0">
-                <a:solidFill>
-                  <a:srgbClr val="D55E00"/>
-                </a:solidFill>
-                <a:latin typeface="メイリオ" pitchFamily="34" charset="0"/>
-                <a:ea typeface="メイリオ" pitchFamily="34" charset="-122"/>
-                <a:cs typeface="メイリオ" pitchFamily="34" charset="-120"/>
-              </a:rPr>
-              <a:t>5〜6 剤以上</a:t>
-            </a:r>
-            <a:r>
-              <a:rPr lang="ja-JP" altLang="en-US" sz="2200" b="1" dirty="0">
-                <a:solidFill>
-                  <a:srgbClr val="262626"/>
-                </a:solidFill>
-                <a:latin typeface="メイリオ" pitchFamily="34" charset="0"/>
-                <a:ea typeface="メイリオ" pitchFamily="34" charset="-122"/>
-                <a:cs typeface="メイリオ" pitchFamily="34" charset="-120"/>
-              </a:rPr>
-              <a:t>は転倒・有害事象が増える。</a:t>
-            </a:r>
-            <a:endParaRPr lang="ja-JP" sz="2200" dirty="0"/>
-          </a:p>
-        </p:txBody>
-      </p:sp>
-      <p:sp>
-        <p:nvSpPr>
-          <p:cNvPr id="13" name="Text 11"/>
-          <p:cNvSpPr txBox="1"/>
-          <p:nvPr/>
-        </p:nvSpPr>
-        <p:spPr>
-          <a:xfrm>
-            <a:off x="640080" y="5490972"/>
-            <a:ext cx="10908792" cy="374904"/>
-          </a:xfrm>
-          <a:prstGeom prst="rect">
-            <a:avLst/>
-          </a:prstGeom>
-          <a:noFill/>
-          <a:ln/>
-        </p:spPr>
-        <p:txBody>
-          <a:bodyPr wrap="square" lIns="0" tIns="0" rIns="0" bIns="0" rtlCol="0" anchor="t"/>
-          <a:lstStyle/>
-          <a:p>
-            <a:pPr algn="ctr" indent="0" marL="0">
-              <a:buNone/>
-            </a:pPr>
-            <a:r>
-              <a:rPr lang="ja-JP" altLang="en-US" sz="2200" b="1" dirty="0">
+              <a:rPr lang="ja-JP" altLang="en-US" sz="2400" b="1" dirty="0">
+                <a:solidFill>
+                  <a:srgbClr val="262626"/>
+                </a:solidFill>
+                <a:latin typeface="メイリオ" pitchFamily="34" charset="0"/>
+                <a:ea typeface="メイリオ" pitchFamily="34" charset="-122"/>
+                <a:cs typeface="メイリオ" pitchFamily="34" charset="-120"/>
+              </a:rPr>
+              <a:t>薬で予防しない。</a:t>
+            </a:r>
+            <a:r>
+              <a:rPr lang="ja-JP" altLang="en-US" sz="2400" b="1" dirty="0">
                 <a:solidFill>
                   <a:srgbClr val="0072B2"/>
                 </a:solidFill>
@@ -7893,1077 +8069,20 @@
                 <a:ea typeface="メイリオ" pitchFamily="34" charset="-122"/>
                 <a:cs typeface="メイリオ" pitchFamily="34" charset="-120"/>
               </a:rPr>
-              <a:t>お薬手帳</a:t>
-            </a:r>
-            <a:r>
-              <a:rPr lang="ja-JP" altLang="en-US" sz="2200" b="1" dirty="0">
-                <a:solidFill>
-                  <a:srgbClr val="262626"/>
-                </a:solidFill>
-                <a:latin typeface="メイリオ" pitchFamily="34" charset="0"/>
-                <a:ea typeface="メイリオ" pitchFamily="34" charset="-122"/>
-                <a:cs typeface="メイリオ" pitchFamily="34" charset="-120"/>
-              </a:rPr>
-              <a:t>で睡眠薬・抗コリン薬・市販薬まで確認</a:t>
-            </a:r>
-            <a:endParaRPr lang="ja-JP" sz="2200" dirty="0"/>
-          </a:p>
-        </p:txBody>
-      </p:sp>
-      <p:sp>
-        <p:nvSpPr>
-          <p:cNvPr id="14" name="Shape 12"/>
-          <p:cNvSpPr/>
-          <p:nvPr/>
-        </p:nvSpPr>
-        <p:spPr>
-          <a:xfrm>
-            <a:off x="502920" y="1664208"/>
-            <a:ext cx="5945429" cy="3274466"/>
-          </a:xfrm>
-          <a:prstGeom prst="roundRect">
-            <a:avLst>
-              <a:gd name="adj" fmla="val 2234"/>
-            </a:avLst>
-          </a:prstGeom>
-          <a:solidFill>
-            <a:srgbClr val="F2F2F2"/>
-          </a:solidFill>
-          <a:ln/>
-        </p:spPr>
-      </p:sp>
-      <p:sp>
-        <p:nvSpPr>
-          <p:cNvPr id="15" name="Text 13"/>
-          <p:cNvSpPr txBox="1"/>
-          <p:nvPr/>
-        </p:nvSpPr>
-        <p:spPr>
-          <a:xfrm>
-            <a:off x="566928" y="1700784"/>
-            <a:ext cx="5817413" cy="420624"/>
-          </a:xfrm>
-          <a:prstGeom prst="rect">
-            <a:avLst/>
-          </a:prstGeom>
-          <a:noFill/>
-          <a:ln/>
-        </p:spPr>
-        <p:txBody>
-          <a:bodyPr wrap="square" lIns="0" tIns="0" rIns="0" bIns="0" rtlCol="0" anchor="t"/>
-          <a:lstStyle/>
-          <a:p>
-            <a:pPr algn="l" indent="0" marL="0">
-              <a:buNone/>
-            </a:pPr>
+              <a:t>入院初日から</a:t>
+            </a:r>
             <a:r>
               <a:rPr lang="ja-JP" altLang="en-US" sz="2400" b="1" dirty="0">
                 <a:solidFill>
-                  <a:srgbClr val="D55E00"/>
-                </a:solidFill>
-                <a:latin typeface="メイリオ" pitchFamily="34" charset="0"/>
-                <a:ea typeface="メイリオ" pitchFamily="34" charset="-122"/>
-                <a:cs typeface="メイリオ" pitchFamily="34" charset="-120"/>
-              </a:rPr>
-              <a:t>避ける・慎重に（AGS・Beers）</a:t>
+                  <a:srgbClr val="262626"/>
+                </a:solidFill>
+                <a:latin typeface="メイリオ" pitchFamily="34" charset="0"/>
+                <a:ea typeface="メイリオ" pitchFamily="34" charset="-122"/>
+                <a:cs typeface="メイリオ" pitchFamily="34" charset="-120"/>
+              </a:rPr>
+              <a:t>多職種で多因子介入を始める</a:t>
             </a:r>
             <a:endParaRPr lang="ja-JP" sz="2400" dirty="0"/>
-          </a:p>
-        </p:txBody>
-      </p:sp>
-      <p:sp>
-        <p:nvSpPr>
-          <p:cNvPr id="16" name="Shape 14"/>
-          <p:cNvSpPr/>
-          <p:nvPr/>
-        </p:nvSpPr>
-        <p:spPr>
-          <a:xfrm>
-            <a:off x="594360" y="2173529"/>
-            <a:ext cx="91440" cy="91440"/>
-          </a:xfrm>
-          <a:prstGeom prst="ellipse">
-            <a:avLst/>
-          </a:prstGeom>
-          <a:solidFill>
-            <a:srgbClr val="D55E00"/>
-          </a:solidFill>
-          <a:ln/>
-        </p:spPr>
-      </p:sp>
-      <p:sp>
-        <p:nvSpPr>
-          <p:cNvPr id="17" name="Text 15"/>
-          <p:cNvSpPr txBox="1"/>
-          <p:nvPr/>
-        </p:nvSpPr>
-        <p:spPr>
-          <a:xfrm>
-            <a:off x="749808" y="2045513"/>
-            <a:ext cx="5634533" cy="374904"/>
-          </a:xfrm>
-          <a:prstGeom prst="rect">
-            <a:avLst/>
-          </a:prstGeom>
-          <a:noFill/>
-          <a:ln/>
-        </p:spPr>
-        <p:txBody>
-          <a:bodyPr wrap="square" lIns="0" tIns="0" rIns="0" bIns="0" rtlCol="0" anchor="t"/>
-          <a:lstStyle/>
-          <a:p>
-            <a:pPr algn="l" indent="0" marL="0">
-              <a:buNone/>
-            </a:pPr>
-            <a:r>
-              <a:rPr lang="ja-JP" altLang="en-US" sz="2200" dirty="0">
-                <a:solidFill>
-                  <a:srgbClr val="262626"/>
-                </a:solidFill>
-                <a:latin typeface="メイリオ" pitchFamily="34" charset="0"/>
-                <a:ea typeface="メイリオ" pitchFamily="34" charset="-122"/>
-                <a:cs typeface="メイリオ" pitchFamily="34" charset="-120"/>
-              </a:rPr>
-              <a:t>ベンゾジアゼピン</a:t>
-            </a:r>
-            <a:endParaRPr lang="ja-JP" sz="2200" dirty="0"/>
-          </a:p>
-        </p:txBody>
-      </p:sp>
-      <p:sp>
-        <p:nvSpPr>
-          <p:cNvPr id="18" name="Text 16"/>
-          <p:cNvSpPr txBox="1"/>
-          <p:nvPr/>
-        </p:nvSpPr>
-        <p:spPr>
-          <a:xfrm>
-            <a:off x="749808" y="2352751"/>
-            <a:ext cx="5634533" cy="374904"/>
-          </a:xfrm>
-          <a:prstGeom prst="rect">
-            <a:avLst/>
-          </a:prstGeom>
-          <a:noFill/>
-          <a:ln/>
-        </p:spPr>
-        <p:txBody>
-          <a:bodyPr wrap="square" lIns="0" tIns="0" rIns="0" bIns="0" rtlCol="0" anchor="t"/>
-          <a:lstStyle/>
-          <a:p>
-            <a:pPr algn="l" indent="0" marL="0">
-              <a:buNone/>
-            </a:pPr>
-            <a:r>
-              <a:rPr lang="ja-JP" altLang="en-US" sz="2200" dirty="0">
-                <a:solidFill>
-                  <a:srgbClr val="262626"/>
-                </a:solidFill>
-                <a:latin typeface="メイリオ" pitchFamily="34" charset="0"/>
-                <a:ea typeface="メイリオ" pitchFamily="34" charset="-122"/>
-                <a:cs typeface="メイリオ" pitchFamily="34" charset="-120"/>
-              </a:rPr>
-              <a:t>（ミダゾラム、ジアゼパム）</a:t>
-            </a:r>
-            <a:endParaRPr lang="ja-JP" sz="2200" dirty="0"/>
-          </a:p>
-        </p:txBody>
-      </p:sp>
-      <p:sp>
-        <p:nvSpPr>
-          <p:cNvPr id="19" name="Shape 17"/>
-          <p:cNvSpPr/>
-          <p:nvPr/>
-        </p:nvSpPr>
-        <p:spPr>
-          <a:xfrm>
-            <a:off x="594360" y="2788006"/>
-            <a:ext cx="91440" cy="91440"/>
-          </a:xfrm>
-          <a:prstGeom prst="ellipse">
-            <a:avLst/>
-          </a:prstGeom>
-          <a:solidFill>
-            <a:srgbClr val="D55E00"/>
-          </a:solidFill>
-          <a:ln/>
-        </p:spPr>
-      </p:sp>
-      <p:sp>
-        <p:nvSpPr>
-          <p:cNvPr id="20" name="Text 18"/>
-          <p:cNvSpPr txBox="1"/>
-          <p:nvPr/>
-        </p:nvSpPr>
-        <p:spPr>
-          <a:xfrm>
-            <a:off x="749808" y="2659990"/>
-            <a:ext cx="5634533" cy="374904"/>
-          </a:xfrm>
-          <a:prstGeom prst="rect">
-            <a:avLst/>
-          </a:prstGeom>
-          <a:noFill/>
-          <a:ln/>
-        </p:spPr>
-        <p:txBody>
-          <a:bodyPr wrap="square" lIns="0" tIns="0" rIns="0" bIns="0" rtlCol="0" anchor="t"/>
-          <a:lstStyle/>
-          <a:p>
-            <a:pPr algn="l" indent="0" marL="0">
-              <a:buNone/>
-            </a:pPr>
-            <a:r>
-              <a:rPr lang="ja-JP" altLang="en-US" sz="2200" dirty="0">
-                <a:solidFill>
-                  <a:srgbClr val="262626"/>
-                </a:solidFill>
-                <a:latin typeface="メイリオ" pitchFamily="34" charset="0"/>
-                <a:ea typeface="メイリオ" pitchFamily="34" charset="-122"/>
-                <a:cs typeface="メイリオ" pitchFamily="34" charset="-120"/>
-              </a:rPr>
-              <a:t>抗コリン：スコポラミン、アトロピン、</a:t>
-            </a:r>
-            <a:endParaRPr lang="ja-JP" sz="2200" dirty="0"/>
-          </a:p>
-        </p:txBody>
-      </p:sp>
-      <p:sp>
-        <p:nvSpPr>
-          <p:cNvPr id="21" name="Text 19"/>
-          <p:cNvSpPr txBox="1"/>
-          <p:nvPr/>
-        </p:nvSpPr>
-        <p:spPr>
-          <a:xfrm>
-            <a:off x="749808" y="2967228"/>
-            <a:ext cx="5634533" cy="374904"/>
-          </a:xfrm>
-          <a:prstGeom prst="rect">
-            <a:avLst/>
-          </a:prstGeom>
-          <a:noFill/>
-          <a:ln/>
-        </p:spPr>
-        <p:txBody>
-          <a:bodyPr wrap="square" lIns="0" tIns="0" rIns="0" bIns="0" rtlCol="0" anchor="t"/>
-          <a:lstStyle/>
-          <a:p>
-            <a:pPr algn="l" indent="0" marL="0">
-              <a:buNone/>
-            </a:pPr>
-            <a:r>
-              <a:rPr lang="ja-JP" altLang="en-US" sz="2200" dirty="0">
-                <a:solidFill>
-                  <a:srgbClr val="262626"/>
-                </a:solidFill>
-                <a:latin typeface="メイリオ" pitchFamily="34" charset="0"/>
-                <a:ea typeface="メイリオ" pitchFamily="34" charset="-122"/>
-                <a:cs typeface="メイリオ" pitchFamily="34" charset="-120"/>
-              </a:rPr>
-              <a:t>プロメタジン、ヒドロキシジン</a:t>
-            </a:r>
-            <a:endParaRPr lang="ja-JP" sz="2200" dirty="0"/>
-          </a:p>
-        </p:txBody>
-      </p:sp>
-      <p:sp>
-        <p:nvSpPr>
-          <p:cNvPr id="22" name="Shape 20"/>
-          <p:cNvSpPr/>
-          <p:nvPr/>
-        </p:nvSpPr>
-        <p:spPr>
-          <a:xfrm>
-            <a:off x="594360" y="3402482"/>
-            <a:ext cx="91440" cy="91440"/>
-          </a:xfrm>
-          <a:prstGeom prst="ellipse">
-            <a:avLst/>
-          </a:prstGeom>
-          <a:solidFill>
-            <a:srgbClr val="D55E00"/>
-          </a:solidFill>
-          <a:ln/>
-        </p:spPr>
-      </p:sp>
-      <p:sp>
-        <p:nvSpPr>
-          <p:cNvPr id="23" name="Text 21"/>
-          <p:cNvSpPr txBox="1"/>
-          <p:nvPr/>
-        </p:nvSpPr>
-        <p:spPr>
-          <a:xfrm>
-            <a:off x="749808" y="3274466"/>
-            <a:ext cx="5634533" cy="374904"/>
-          </a:xfrm>
-          <a:prstGeom prst="rect">
-            <a:avLst/>
-          </a:prstGeom>
-          <a:noFill/>
-          <a:ln/>
-        </p:spPr>
-        <p:txBody>
-          <a:bodyPr wrap="square" lIns="0" tIns="0" rIns="0" bIns="0" rtlCol="0" anchor="t"/>
-          <a:lstStyle/>
-          <a:p>
-            <a:pPr algn="l" indent="0" marL="0">
-              <a:buNone/>
-            </a:pPr>
-            <a:r>
-              <a:rPr lang="ja-JP" altLang="en-US" sz="2200" dirty="0">
-                <a:solidFill>
-                  <a:srgbClr val="262626"/>
-                </a:solidFill>
-                <a:latin typeface="メイリオ" pitchFamily="34" charset="0"/>
-                <a:ea typeface="メイリオ" pitchFamily="34" charset="-122"/>
-                <a:cs typeface="メイリオ" pitchFamily="34" charset="-120"/>
-              </a:rPr>
-              <a:t>ジフェンヒドラミン、H2 遮断薬</a:t>
-            </a:r>
-            <a:endParaRPr lang="ja-JP" sz="2200" dirty="0"/>
-          </a:p>
-        </p:txBody>
-      </p:sp>
-      <p:sp>
-        <p:nvSpPr>
-          <p:cNvPr id="24" name="Text 22"/>
-          <p:cNvSpPr txBox="1"/>
-          <p:nvPr/>
-        </p:nvSpPr>
-        <p:spPr>
-          <a:xfrm>
-            <a:off x="749808" y="3581705"/>
-            <a:ext cx="5634533" cy="374904"/>
-          </a:xfrm>
-          <a:prstGeom prst="rect">
-            <a:avLst/>
-          </a:prstGeom>
-          <a:noFill/>
-          <a:ln/>
-        </p:spPr>
-        <p:txBody>
-          <a:bodyPr wrap="square" lIns="0" tIns="0" rIns="0" bIns="0" rtlCol="0" anchor="t"/>
-          <a:lstStyle/>
-          <a:p>
-            <a:pPr algn="l" indent="0" marL="0">
-              <a:buNone/>
-            </a:pPr>
-            <a:r>
-              <a:rPr lang="ja-JP" altLang="en-US" sz="2200" dirty="0">
-                <a:solidFill>
-                  <a:srgbClr val="262626"/>
-                </a:solidFill>
-                <a:latin typeface="メイリオ" pitchFamily="34" charset="0"/>
-                <a:ea typeface="メイリオ" pitchFamily="34" charset="-122"/>
-                <a:cs typeface="メイリオ" pitchFamily="34" charset="-120"/>
-              </a:rPr>
-              <a:t>（ファモチジンも）、メトクロプラミド</a:t>
-            </a:r>
-            <a:endParaRPr lang="ja-JP" sz="2200" dirty="0"/>
-          </a:p>
-        </p:txBody>
-      </p:sp>
-      <p:sp>
-        <p:nvSpPr>
-          <p:cNvPr id="25" name="Shape 23"/>
-          <p:cNvSpPr/>
-          <p:nvPr/>
-        </p:nvSpPr>
-        <p:spPr>
-          <a:xfrm>
-            <a:off x="594360" y="4016959"/>
-            <a:ext cx="91440" cy="91440"/>
-          </a:xfrm>
-          <a:prstGeom prst="ellipse">
-            <a:avLst/>
-          </a:prstGeom>
-          <a:solidFill>
-            <a:srgbClr val="D55E00"/>
-          </a:solidFill>
-          <a:ln/>
-        </p:spPr>
-      </p:sp>
-      <p:sp>
-        <p:nvSpPr>
-          <p:cNvPr id="26" name="Text 24"/>
-          <p:cNvSpPr txBox="1"/>
-          <p:nvPr/>
-        </p:nvSpPr>
-        <p:spPr>
-          <a:xfrm>
-            <a:off x="749808" y="3888943"/>
-            <a:ext cx="5634533" cy="374904"/>
-          </a:xfrm>
-          <a:prstGeom prst="rect">
-            <a:avLst/>
-          </a:prstGeom>
-          <a:noFill/>
-          <a:ln/>
-        </p:spPr>
-        <p:txBody>
-          <a:bodyPr wrap="square" lIns="0" tIns="0" rIns="0" bIns="0" rtlCol="0" anchor="t"/>
-          <a:lstStyle/>
-          <a:p>
-            <a:pPr algn="l" indent="0" marL="0">
-              <a:buNone/>
-            </a:pPr>
-            <a:r>
-              <a:rPr lang="ja-JP" altLang="en-US" sz="2200" dirty="0">
-                <a:solidFill>
-                  <a:srgbClr val="262626"/>
-                </a:solidFill>
-                <a:latin typeface="メイリオ" pitchFamily="34" charset="0"/>
-                <a:ea typeface="メイリオ" pitchFamily="34" charset="-122"/>
-                <a:cs typeface="メイリオ" pitchFamily="34" charset="-120"/>
-              </a:rPr>
-              <a:t>ペチジン、ハロペリドールの予防投与</a:t>
-            </a:r>
-            <a:endParaRPr lang="ja-JP" sz="2200" dirty="0"/>
-          </a:p>
-        </p:txBody>
-      </p:sp>
-      <p:sp>
-        <p:nvSpPr>
-          <p:cNvPr id="27" name="Shape 25"/>
-          <p:cNvSpPr/>
-          <p:nvPr/>
-        </p:nvSpPr>
-        <p:spPr>
-          <a:xfrm>
-            <a:off x="594360" y="4324198"/>
-            <a:ext cx="91440" cy="91440"/>
-          </a:xfrm>
-          <a:prstGeom prst="ellipse">
-            <a:avLst/>
-          </a:prstGeom>
-          <a:solidFill>
-            <a:srgbClr val="D55E00"/>
-          </a:solidFill>
-          <a:ln/>
-        </p:spPr>
-      </p:sp>
-      <p:sp>
-        <p:nvSpPr>
-          <p:cNvPr id="28" name="Text 26"/>
-          <p:cNvSpPr txBox="1"/>
-          <p:nvPr/>
-        </p:nvSpPr>
-        <p:spPr>
-          <a:xfrm>
-            <a:off x="749808" y="4196182"/>
-            <a:ext cx="5634533" cy="374904"/>
-          </a:xfrm>
-          <a:prstGeom prst="rect">
-            <a:avLst/>
-          </a:prstGeom>
-          <a:noFill/>
-          <a:ln/>
-        </p:spPr>
-        <p:txBody>
-          <a:bodyPr wrap="square" lIns="0" tIns="0" rIns="0" bIns="0" rtlCol="0" anchor="t"/>
-          <a:lstStyle/>
-          <a:p>
-            <a:pPr algn="l" indent="0" marL="0">
-              <a:buNone/>
-            </a:pPr>
-            <a:r>
-              <a:rPr lang="ja-JP" altLang="en-US" sz="2200" b="1" dirty="0">
-                <a:solidFill>
-                  <a:srgbClr val="0072B2"/>
-                </a:solidFill>
-                <a:latin typeface="メイリオ" pitchFamily="34" charset="0"/>
-                <a:ea typeface="メイリオ" pitchFamily="34" charset="-122"/>
-                <a:cs typeface="メイリオ" pitchFamily="34" charset="-120"/>
-              </a:rPr>
-              <a:t>例外：</a:t>
-            </a:r>
-            <a:r>
-              <a:rPr lang="ja-JP" altLang="en-US" sz="2200" dirty="0">
-                <a:solidFill>
-                  <a:srgbClr val="262626"/>
-                </a:solidFill>
-                <a:latin typeface="メイリオ" pitchFamily="34" charset="0"/>
-                <a:ea typeface="メイリオ" pitchFamily="34" charset="-122"/>
-                <a:cs typeface="メイリオ" pitchFamily="34" charset="-120"/>
-              </a:rPr>
-              <a:t>離脱予防のベンゾジアゼピン、</a:t>
-            </a:r>
-            <a:endParaRPr lang="ja-JP" sz="2200" dirty="0"/>
-          </a:p>
-        </p:txBody>
-      </p:sp>
-      <p:sp>
-        <p:nvSpPr>
-          <p:cNvPr id="29" name="Text 27"/>
-          <p:cNvSpPr txBox="1"/>
-          <p:nvPr/>
-        </p:nvSpPr>
-        <p:spPr>
-          <a:xfrm>
-            <a:off x="749808" y="4504334"/>
-            <a:ext cx="5634533" cy="374904"/>
-          </a:xfrm>
-          <a:prstGeom prst="rect">
-            <a:avLst/>
-          </a:prstGeom>
-          <a:noFill/>
-          <a:ln/>
-        </p:spPr>
-        <p:txBody>
-          <a:bodyPr wrap="square" lIns="0" tIns="0" rIns="0" bIns="0" rtlCol="0" anchor="t"/>
-          <a:lstStyle/>
-          <a:p>
-            <a:pPr algn="l" indent="0" marL="0">
-              <a:buNone/>
-            </a:pPr>
-            <a:r>
-              <a:rPr lang="ja-JP" altLang="en-US" sz="2200" dirty="0">
-                <a:solidFill>
-                  <a:srgbClr val="262626"/>
-                </a:solidFill>
-                <a:latin typeface="メイリオ" pitchFamily="34" charset="0"/>
-                <a:ea typeface="メイリオ" pitchFamily="34" charset="-122"/>
-                <a:cs typeface="メイリオ" pitchFamily="34" charset="-120"/>
-              </a:rPr>
-              <a:t>徐脈へのアトロピン</a:t>
-            </a:r>
-            <a:endParaRPr lang="ja-JP" sz="2200" dirty="0"/>
-          </a:p>
-        </p:txBody>
-      </p:sp>
-      <p:sp>
-        <p:nvSpPr>
-          <p:cNvPr id="30" name="Shape 28"/>
-          <p:cNvSpPr/>
-          <p:nvPr/>
-        </p:nvSpPr>
-        <p:spPr>
-          <a:xfrm>
-            <a:off x="6667805" y="1664208"/>
-            <a:ext cx="5018227" cy="3274466"/>
-          </a:xfrm>
-          <a:prstGeom prst="roundRect">
-            <a:avLst>
-              <a:gd name="adj" fmla="val 2234"/>
-            </a:avLst>
-          </a:prstGeom>
-          <a:solidFill>
-            <a:srgbClr val="F2F2F2"/>
-          </a:solidFill>
-          <a:ln/>
-        </p:spPr>
-      </p:sp>
-      <p:sp>
-        <p:nvSpPr>
-          <p:cNvPr id="31" name="Text 29"/>
-          <p:cNvSpPr txBox="1"/>
-          <p:nvPr/>
-        </p:nvSpPr>
-        <p:spPr>
-          <a:xfrm>
-            <a:off x="6731813" y="1700784"/>
-            <a:ext cx="4890211" cy="420624"/>
-          </a:xfrm>
-          <a:prstGeom prst="rect">
-            <a:avLst/>
-          </a:prstGeom>
-          <a:noFill/>
-          <a:ln/>
-        </p:spPr>
-        <p:txBody>
-          <a:bodyPr wrap="square" lIns="0" tIns="0" rIns="0" bIns="0" rtlCol="0" anchor="t"/>
-          <a:lstStyle/>
-          <a:p>
-            <a:pPr algn="l" indent="0" marL="0">
-              <a:buNone/>
-            </a:pPr>
-            <a:r>
-              <a:rPr lang="ja-JP" altLang="en-US" sz="2400" b="1" dirty="0">
-                <a:solidFill>
-                  <a:srgbClr val="0072B2"/>
-                </a:solidFill>
-                <a:latin typeface="メイリオ" pitchFamily="34" charset="0"/>
-                <a:ea typeface="メイリオ" pitchFamily="34" charset="-122"/>
-                <a:cs typeface="メイリオ" pitchFamily="34" charset="-120"/>
-              </a:rPr>
-              <a:t>麻酔の調節</a:t>
-            </a:r>
-            <a:endParaRPr lang="ja-JP" sz="2400" dirty="0"/>
-          </a:p>
-        </p:txBody>
-      </p:sp>
-      <p:sp>
-        <p:nvSpPr>
-          <p:cNvPr id="32" name="Shape 30"/>
-          <p:cNvSpPr/>
-          <p:nvPr/>
-        </p:nvSpPr>
-        <p:spPr>
-          <a:xfrm>
-            <a:off x="6759245" y="2173529"/>
-            <a:ext cx="91440" cy="91440"/>
-          </a:xfrm>
-          <a:prstGeom prst="ellipse">
-            <a:avLst/>
-          </a:prstGeom>
-          <a:solidFill>
-            <a:srgbClr val="0072B2"/>
-          </a:solidFill>
-          <a:ln/>
-        </p:spPr>
-      </p:sp>
-      <p:sp>
-        <p:nvSpPr>
-          <p:cNvPr id="33" name="Text 31"/>
-          <p:cNvSpPr txBox="1"/>
-          <p:nvPr/>
-        </p:nvSpPr>
-        <p:spPr>
-          <a:xfrm>
-            <a:off x="6914693" y="2045513"/>
-            <a:ext cx="4707331" cy="374904"/>
-          </a:xfrm>
-          <a:prstGeom prst="rect">
-            <a:avLst/>
-          </a:prstGeom>
-          <a:noFill/>
-          <a:ln/>
-        </p:spPr>
-        <p:txBody>
-          <a:bodyPr wrap="square" lIns="0" tIns="0" rIns="0" bIns="0" rtlCol="0" anchor="t"/>
-          <a:lstStyle/>
-          <a:p>
-            <a:pPr algn="l" indent="0" marL="0">
-              <a:buNone/>
-            </a:pPr>
-            <a:r>
-              <a:rPr lang="ja-JP" altLang="en-US" sz="2200" dirty="0">
-                <a:solidFill>
-                  <a:srgbClr val="262626"/>
-                </a:solidFill>
-                <a:latin typeface="メイリオ" pitchFamily="34" charset="0"/>
-                <a:ea typeface="メイリオ" pitchFamily="34" charset="-122"/>
-                <a:cs typeface="メイリオ" pitchFamily="34" charset="-120"/>
-              </a:rPr>
-              <a:t>MAC は 10 歳ごとに</a:t>
-            </a:r>
-            <a:r>
-              <a:rPr lang="ja-JP" altLang="en-US" sz="2200" b="1" dirty="0">
-                <a:solidFill>
-                  <a:srgbClr val="D55E00"/>
-                </a:solidFill>
-                <a:latin typeface="メイリオ" pitchFamily="34" charset="0"/>
-                <a:ea typeface="メイリオ" pitchFamily="34" charset="-122"/>
-                <a:cs typeface="メイリオ" pitchFamily="34" charset="-120"/>
-              </a:rPr>
-              <a:t>約 6% 低下</a:t>
-            </a:r>
-            <a:endParaRPr lang="ja-JP" sz="2200" dirty="0"/>
-          </a:p>
-        </p:txBody>
-      </p:sp>
-      <p:sp>
-        <p:nvSpPr>
-          <p:cNvPr id="34" name="Text 32"/>
-          <p:cNvSpPr txBox="1"/>
-          <p:nvPr/>
-        </p:nvSpPr>
-        <p:spPr>
-          <a:xfrm>
-            <a:off x="6914693" y="2352751"/>
-            <a:ext cx="4707331" cy="374904"/>
-          </a:xfrm>
-          <a:prstGeom prst="rect">
-            <a:avLst/>
-          </a:prstGeom>
-          <a:noFill/>
-          <a:ln/>
-        </p:spPr>
-        <p:txBody>
-          <a:bodyPr wrap="square" lIns="0" tIns="0" rIns="0" bIns="0" rtlCol="0" anchor="t"/>
-          <a:lstStyle/>
-          <a:p>
-            <a:pPr algn="l" indent="0" marL="0">
-              <a:buNone/>
-            </a:pPr>
-            <a:r>
-              <a:rPr lang="ja-JP" altLang="en-US" sz="2200" dirty="0">
-                <a:solidFill>
-                  <a:srgbClr val="262626"/>
-                </a:solidFill>
-                <a:latin typeface="メイリオ" pitchFamily="34" charset="0"/>
-                <a:ea typeface="メイリオ" pitchFamily="34" charset="-122"/>
-                <a:cs typeface="メイリオ" pitchFamily="34" charset="-120"/>
-              </a:rPr>
-              <a:t>（80 歳のセボフルラン約 1.4%）</a:t>
-            </a:r>
-            <a:endParaRPr lang="ja-JP" sz="2200" dirty="0"/>
-          </a:p>
-        </p:txBody>
-      </p:sp>
-      <p:sp>
-        <p:nvSpPr>
-          <p:cNvPr id="35" name="Shape 33"/>
-          <p:cNvSpPr/>
-          <p:nvPr/>
-        </p:nvSpPr>
-        <p:spPr>
-          <a:xfrm>
-            <a:off x="6759245" y="2788006"/>
-            <a:ext cx="91440" cy="91440"/>
-          </a:xfrm>
-          <a:prstGeom prst="ellipse">
-            <a:avLst/>
-          </a:prstGeom>
-          <a:solidFill>
-            <a:srgbClr val="0072B2"/>
-          </a:solidFill>
-          <a:ln/>
-        </p:spPr>
-      </p:sp>
-      <p:sp>
-        <p:nvSpPr>
-          <p:cNvPr id="36" name="Text 34"/>
-          <p:cNvSpPr txBox="1"/>
-          <p:nvPr/>
-        </p:nvSpPr>
-        <p:spPr>
-          <a:xfrm>
-            <a:off x="6914693" y="2659990"/>
-            <a:ext cx="4707331" cy="374904"/>
-          </a:xfrm>
-          <a:prstGeom prst="rect">
-            <a:avLst/>
-          </a:prstGeom>
-          <a:noFill/>
-          <a:ln/>
-        </p:spPr>
-        <p:txBody>
-          <a:bodyPr wrap="square" lIns="0" tIns="0" rIns="0" bIns="0" rtlCol="0" anchor="t"/>
-          <a:lstStyle/>
-          <a:p>
-            <a:pPr algn="l" indent="0" marL="0">
-              <a:buNone/>
-            </a:pPr>
-            <a:r>
-              <a:rPr lang="ja-JP" altLang="en-US" sz="2200" dirty="0">
-                <a:solidFill>
-                  <a:srgbClr val="262626"/>
-                </a:solidFill>
-                <a:latin typeface="メイリオ" pitchFamily="34" charset="0"/>
-                <a:ea typeface="メイリオ" pitchFamily="34" charset="-122"/>
-                <a:cs typeface="メイリオ" pitchFamily="34" charset="-120"/>
-              </a:rPr>
-              <a:t>年齢補正 MAC 比を見る。</a:t>
-            </a:r>
-            <a:endParaRPr lang="ja-JP" sz="2200" dirty="0"/>
-          </a:p>
-        </p:txBody>
-      </p:sp>
-      <p:sp>
-        <p:nvSpPr>
-          <p:cNvPr id="37" name="Text 35"/>
-          <p:cNvSpPr txBox="1"/>
-          <p:nvPr/>
-        </p:nvSpPr>
-        <p:spPr>
-          <a:xfrm>
-            <a:off x="6914693" y="2967228"/>
-            <a:ext cx="4707331" cy="374904"/>
-          </a:xfrm>
-          <a:prstGeom prst="rect">
-            <a:avLst/>
-          </a:prstGeom>
-          <a:noFill/>
-          <a:ln/>
-        </p:spPr>
-        <p:txBody>
-          <a:bodyPr wrap="square" lIns="0" tIns="0" rIns="0" bIns="0" rtlCol="0" anchor="t"/>
-          <a:lstStyle/>
-          <a:p>
-            <a:pPr algn="l" indent="0" marL="0">
-              <a:buNone/>
-            </a:pPr>
-            <a:r>
-              <a:rPr lang="ja-JP" altLang="en-US" sz="2200" dirty="0">
-                <a:solidFill>
-                  <a:srgbClr val="262626"/>
-                </a:solidFill>
-                <a:latin typeface="メイリオ" pitchFamily="34" charset="0"/>
-                <a:ea typeface="メイリオ" pitchFamily="34" charset="-122"/>
-                <a:cs typeface="メイリオ" pitchFamily="34" charset="-120"/>
-              </a:rPr>
-              <a:t>BIS は高く出ることがある</a:t>
-            </a:r>
-            <a:endParaRPr lang="ja-JP" sz="2200" dirty="0"/>
-          </a:p>
-        </p:txBody>
-      </p:sp>
-      <p:sp>
-        <p:nvSpPr>
-          <p:cNvPr id="38" name="Shape 36"/>
-          <p:cNvSpPr/>
-          <p:nvPr/>
-        </p:nvSpPr>
-        <p:spPr>
-          <a:xfrm>
-            <a:off x="6759245" y="3402482"/>
-            <a:ext cx="91440" cy="91440"/>
-          </a:xfrm>
-          <a:prstGeom prst="ellipse">
-            <a:avLst/>
-          </a:prstGeom>
-          <a:solidFill>
-            <a:srgbClr val="0072B2"/>
-          </a:solidFill>
-          <a:ln/>
-        </p:spPr>
-      </p:sp>
-      <p:sp>
-        <p:nvSpPr>
-          <p:cNvPr id="39" name="Text 37"/>
-          <p:cNvSpPr txBox="1"/>
-          <p:nvPr/>
-        </p:nvSpPr>
-        <p:spPr>
-          <a:xfrm>
-            <a:off x="6914693" y="3274466"/>
-            <a:ext cx="4707331" cy="374904"/>
-          </a:xfrm>
-          <a:prstGeom prst="rect">
-            <a:avLst/>
-          </a:prstGeom>
-          <a:noFill/>
-          <a:ln/>
-        </p:spPr>
-        <p:txBody>
-          <a:bodyPr wrap="square" lIns="0" tIns="0" rIns="0" bIns="0" rtlCol="0" anchor="t"/>
-          <a:lstStyle/>
-          <a:p>
-            <a:pPr algn="l" indent="0" marL="0">
-              <a:buNone/>
-            </a:pPr>
-            <a:r>
-              <a:rPr lang="ja-JP" altLang="en-US" sz="2200" dirty="0">
-                <a:solidFill>
-                  <a:srgbClr val="262626"/>
-                </a:solidFill>
-                <a:latin typeface="メイリオ" pitchFamily="34" charset="0"/>
-                <a:ea typeface="メイリオ" pitchFamily="34" charset="-122"/>
-                <a:cs typeface="メイリオ" pitchFamily="34" charset="-120"/>
-              </a:rPr>
-              <a:t>プロポフォール・ミダゾラムは</a:t>
-            </a:r>
-            <a:endParaRPr lang="ja-JP" sz="2200" dirty="0"/>
-          </a:p>
-        </p:txBody>
-      </p:sp>
-      <p:sp>
-        <p:nvSpPr>
-          <p:cNvPr id="40" name="Text 38"/>
-          <p:cNvSpPr txBox="1"/>
-          <p:nvPr/>
-        </p:nvSpPr>
-        <p:spPr>
-          <a:xfrm>
-            <a:off x="6914693" y="3581705"/>
-            <a:ext cx="4707331" cy="374904"/>
-          </a:xfrm>
-          <a:prstGeom prst="rect">
-            <a:avLst/>
-          </a:prstGeom>
-          <a:noFill/>
-          <a:ln/>
-        </p:spPr>
-        <p:txBody>
-          <a:bodyPr wrap="square" lIns="0" tIns="0" rIns="0" bIns="0" rtlCol="0" anchor="t"/>
-          <a:lstStyle/>
-          <a:p>
-            <a:pPr algn="l" indent="0" marL="0">
-              <a:buNone/>
-            </a:pPr>
-            <a:r>
-              <a:rPr lang="ja-JP" altLang="en-US" sz="2200" dirty="0">
-                <a:solidFill>
-                  <a:srgbClr val="262626"/>
-                </a:solidFill>
-                <a:latin typeface="メイリオ" pitchFamily="34" charset="0"/>
-                <a:ea typeface="メイリオ" pitchFamily="34" charset="-122"/>
-                <a:cs typeface="メイリオ" pitchFamily="34" charset="-120"/>
-              </a:rPr>
-              <a:t>減量し、ゆっくり</a:t>
-            </a:r>
-            <a:endParaRPr lang="ja-JP" sz="2200" dirty="0"/>
-          </a:p>
-        </p:txBody>
-      </p:sp>
-      <p:sp>
-        <p:nvSpPr>
-          <p:cNvPr id="41" name="Shape 39"/>
-          <p:cNvSpPr/>
-          <p:nvPr/>
-        </p:nvSpPr>
-        <p:spPr>
-          <a:xfrm>
-            <a:off x="6759245" y="4016959"/>
-            <a:ext cx="91440" cy="91440"/>
-          </a:xfrm>
-          <a:prstGeom prst="ellipse">
-            <a:avLst/>
-          </a:prstGeom>
-          <a:solidFill>
-            <a:srgbClr val="0072B2"/>
-          </a:solidFill>
-          <a:ln/>
-        </p:spPr>
-      </p:sp>
-      <p:sp>
-        <p:nvSpPr>
-          <p:cNvPr id="42" name="Text 40"/>
-          <p:cNvSpPr txBox="1"/>
-          <p:nvPr/>
-        </p:nvSpPr>
-        <p:spPr>
-          <a:xfrm>
-            <a:off x="6914693" y="3888943"/>
-            <a:ext cx="4707331" cy="374904"/>
-          </a:xfrm>
-          <a:prstGeom prst="rect">
-            <a:avLst/>
-          </a:prstGeom>
-          <a:noFill/>
-          <a:ln/>
-        </p:spPr>
-        <p:txBody>
-          <a:bodyPr wrap="square" lIns="0" tIns="0" rIns="0" bIns="0" rtlCol="0" anchor="t"/>
-          <a:lstStyle/>
-          <a:p>
-            <a:pPr algn="l" indent="0" marL="0">
-              <a:buNone/>
-            </a:pPr>
-            <a:r>
-              <a:rPr lang="ja-JP" altLang="en-US" sz="2200" b="1" dirty="0">
-                <a:solidFill>
-                  <a:srgbClr val="D55E00"/>
-                </a:solidFill>
-                <a:latin typeface="メイリオ" pitchFamily="34" charset="0"/>
-                <a:ea typeface="メイリオ" pitchFamily="34" charset="-122"/>
-                <a:cs typeface="メイリオ" pitchFamily="34" charset="-120"/>
-              </a:rPr>
-              <a:t>相対的低血圧</a:t>
-            </a:r>
-            <a:r>
-              <a:rPr lang="ja-JP" altLang="en-US" sz="2200" dirty="0">
-                <a:solidFill>
-                  <a:srgbClr val="262626"/>
-                </a:solidFill>
-                <a:latin typeface="メイリオ" pitchFamily="34" charset="0"/>
-                <a:ea typeface="メイリオ" pitchFamily="34" charset="-122"/>
-                <a:cs typeface="メイリオ" pitchFamily="34" charset="-120"/>
-              </a:rPr>
-              <a:t>を避ける。正常体温</a:t>
-            </a:r>
-            <a:endParaRPr lang="ja-JP" sz="2200" dirty="0"/>
-          </a:p>
-        </p:txBody>
-      </p:sp>
-      <p:sp>
-        <p:nvSpPr>
-          <p:cNvPr id="43" name="Shape 41"/>
-          <p:cNvSpPr/>
-          <p:nvPr/>
-        </p:nvSpPr>
-        <p:spPr>
-          <a:xfrm>
-            <a:off x="6759245" y="4324198"/>
-            <a:ext cx="91440" cy="91440"/>
-          </a:xfrm>
-          <a:prstGeom prst="ellipse">
-            <a:avLst/>
-          </a:prstGeom>
-          <a:solidFill>
-            <a:srgbClr val="0072B2"/>
-          </a:solidFill>
-          <a:ln/>
-        </p:spPr>
-      </p:sp>
-      <p:sp>
-        <p:nvSpPr>
-          <p:cNvPr id="44" name="Text 42"/>
-          <p:cNvSpPr txBox="1"/>
-          <p:nvPr/>
-        </p:nvSpPr>
-        <p:spPr>
-          <a:xfrm>
-            <a:off x="6914693" y="4196182"/>
-            <a:ext cx="4707331" cy="374904"/>
-          </a:xfrm>
-          <a:prstGeom prst="rect">
-            <a:avLst/>
-          </a:prstGeom>
-          <a:noFill/>
-          <a:ln/>
-        </p:spPr>
-        <p:txBody>
-          <a:bodyPr wrap="square" lIns="0" tIns="0" rIns="0" bIns="0" rtlCol="0" anchor="t"/>
-          <a:lstStyle/>
-          <a:p>
-            <a:pPr algn="l" indent="0" marL="0">
-              <a:buNone/>
-            </a:pPr>
-            <a:r>
-              <a:rPr lang="ja-JP" altLang="en-US" sz="2200" dirty="0">
-                <a:solidFill>
-                  <a:srgbClr val="262626"/>
-                </a:solidFill>
-                <a:latin typeface="メイリオ" pitchFamily="34" charset="0"/>
-                <a:ea typeface="メイリオ" pitchFamily="34" charset="-122"/>
-                <a:cs typeface="メイリオ" pitchFamily="34" charset="-120"/>
-              </a:rPr>
-              <a:t>鎮静の少ない多角的鎮痛。</a:t>
-            </a:r>
-            <a:endParaRPr lang="ja-JP" sz="2200" dirty="0"/>
-          </a:p>
-        </p:txBody>
-      </p:sp>
-      <p:sp>
-        <p:nvSpPr>
-          <p:cNvPr id="45" name="Text 43"/>
-          <p:cNvSpPr txBox="1"/>
-          <p:nvPr/>
-        </p:nvSpPr>
-        <p:spPr>
-          <a:xfrm>
-            <a:off x="6914693" y="4504334"/>
-            <a:ext cx="4707331" cy="374904"/>
-          </a:xfrm>
-          <a:prstGeom prst="rect">
-            <a:avLst/>
-          </a:prstGeom>
-          <a:noFill/>
-          <a:ln/>
-        </p:spPr>
-        <p:txBody>
-          <a:bodyPr wrap="square" lIns="0" tIns="0" rIns="0" bIns="0" rtlCol="0" anchor="t"/>
-          <a:lstStyle/>
-          <a:p>
-            <a:pPr algn="l" indent="0" marL="0">
-              <a:buNone/>
-            </a:pPr>
-            <a:r>
-              <a:rPr lang="ja-JP" altLang="en-US" sz="2200" dirty="0">
-                <a:solidFill>
-                  <a:srgbClr val="262626"/>
-                </a:solidFill>
-                <a:latin typeface="メイリオ" pitchFamily="34" charset="0"/>
-                <a:ea typeface="メイリオ" pitchFamily="34" charset="-122"/>
-                <a:cs typeface="メイリオ" pitchFamily="34" charset="-120"/>
-              </a:rPr>
-              <a:t>区域麻酔自体でせん妄は減らない</a:t>
-            </a:r>
-            <a:endParaRPr lang="ja-JP" sz="2200" dirty="0"/>
           </a:p>
         </p:txBody>
       </p:sp>
@@ -9034,7 +8153,7 @@
                 <a:ea typeface="メイリオ" pitchFamily="34" charset="-122"/>
                 <a:cs typeface="メイリオ" pitchFamily="34" charset="-120"/>
               </a:rPr>
-              <a:t>相談先と離島での工夫</a:t>
+              <a:t>高齢者で避ける薬</a:t>
             </a:r>
             <a:endParaRPr lang="ja-JP" sz="4400" dirty="0"/>
           </a:p>
@@ -9384,7 +8503,7 @@
                 <a:ea typeface="メイリオ" pitchFamily="34" charset="-122"/>
                 <a:cs typeface="メイリオ" pitchFamily="34" charset="-120"/>
               </a:rPr>
-              <a:t>Marcantonio ER, et al. J Am Geriatr Soc 2001;49:516-522 / Berger M, et al.</a:t>
+              <a:t>2023 AGS Beers Criteria Update Expert Panel. J Am Geriatr Soc 2023;71:2052-2081</a:t>
             </a:r>
             <a:endParaRPr lang="ja-JP" sz="1600" dirty="0"/>
           </a:p>
@@ -9401,7 +8520,7 @@
                 <a:ea typeface="メイリオ" pitchFamily="34" charset="-122"/>
                 <a:cs typeface="メイリオ" pitchFamily="34" charset="-120"/>
               </a:rPr>
-              <a:t>Anesth Analg 2018;127:1406-1413 / Chow WB, et al. J Am Coll Surg 2012;215:453-466</a:t>
+              <a:t>AGS. J Am Geriatr Soc 2015;63:142-150 / Berger M, et al. Anesth Analg 2018;127:1406-1413</a:t>
             </a:r>
             <a:endParaRPr lang="ja-JP" sz="1600" dirty="0"/>
           </a:p>
@@ -9415,8 +8534,8 @@
         </p:nvSpPr>
         <p:spPr>
           <a:xfrm>
-            <a:off x="502920" y="1737360"/>
-            <a:ext cx="11155680" cy="2798064"/>
+            <a:off x="502920" y="1691640"/>
+            <a:ext cx="11155680" cy="3383280"/>
           </a:xfrm>
           <a:prstGeom prst="rect">
             <a:avLst/>
@@ -9432,10 +8551,24 @@
               <a:spcAft>
                 <a:spcPts val="1000"/>
               </a:spcAft>
+              <a:buClr>
+                <a:srgbClr val="262626"/>
+              </a:buClr>
               <a:buSzPct val="100000"/>
               <a:buChar char="•"/>
             </a:pPr>
             <a:r>
+              <a:rPr lang="ja-JP" altLang="en-US" sz="2400" b="1" dirty="0">
+                <a:solidFill>
+                  <a:srgbClr val="D55E00"/>
+                </a:solidFill>
+                <a:latin typeface="メイリオ" pitchFamily="34" charset="0"/>
+                <a:ea typeface="メイリオ" pitchFamily="34" charset="-122"/>
+                <a:cs typeface="メイリオ" pitchFamily="34" charset="-120"/>
+              </a:rPr>
+              <a:t>ベンゾジアゼピン</a:t>
+            </a:r>
+            <a:r>
               <a:rPr lang="ja-JP" altLang="en-US" sz="2400" dirty="0">
                 <a:solidFill>
                   <a:srgbClr val="262626"/>
@@ -9444,29 +8577,7 @@
                 <a:ea typeface="メイリオ" pitchFamily="34" charset="-122"/>
                 <a:cs typeface="メイリオ" pitchFamily="34" charset="-120"/>
               </a:rPr>
-              <a:t>老年科・認知症ケアチーム・精神科リエゾンに</a:t>
-            </a:r>
-            <a:r>
-              <a:rPr lang="ja-JP" altLang="en-US" sz="2400" b="1" dirty="0">
-                <a:solidFill>
-                  <a:srgbClr val="D55E00"/>
-                </a:solidFill>
-                <a:latin typeface="メイリオ" pitchFamily="34" charset="0"/>
-                <a:ea typeface="メイリオ" pitchFamily="34" charset="-122"/>
-                <a:cs typeface="メイリオ" pitchFamily="34" charset="-120"/>
-              </a:rPr>
-              <a:t>術前から</a:t>
-            </a:r>
-            <a:r>
-              <a:rPr lang="ja-JP" altLang="en-US" sz="2400" dirty="0">
-                <a:solidFill>
-                  <a:srgbClr val="262626"/>
-                </a:solidFill>
-                <a:latin typeface="メイリオ" pitchFamily="34" charset="0"/>
-                <a:ea typeface="メイリオ" pitchFamily="34" charset="-122"/>
-                <a:cs typeface="メイリオ" pitchFamily="34" charset="-120"/>
-              </a:rPr>
-              <a:t>（遠隔でも）</a:t>
+              <a:t>（ミダゾラム、ジアゼパム）</a:t>
             </a:r>
             <a:endParaRPr lang="ja-JP" sz="2400" dirty="0"/>
           </a:p>
@@ -9475,10 +8586,24 @@
               <a:spcAft>
                 <a:spcPts val="1000"/>
               </a:spcAft>
+              <a:buClr>
+                <a:srgbClr val="262626"/>
+              </a:buClr>
               <a:buSzPct val="100000"/>
               <a:buChar char="•"/>
             </a:pPr>
             <a:r>
+              <a:rPr lang="ja-JP" altLang="en-US" sz="2400" b="1" dirty="0">
+                <a:solidFill>
+                  <a:srgbClr val="D55E00"/>
+                </a:solidFill>
+                <a:latin typeface="メイリオ" pitchFamily="34" charset="0"/>
+                <a:ea typeface="メイリオ" pitchFamily="34" charset="-122"/>
+                <a:cs typeface="メイリオ" pitchFamily="34" charset="-120"/>
+              </a:rPr>
+              <a:t>抗コリン薬：</a:t>
+            </a:r>
+            <a:r>
               <a:rPr lang="ja-JP" altLang="en-US" sz="2400" dirty="0">
                 <a:solidFill>
                   <a:srgbClr val="262626"/>
@@ -9487,29 +8612,7 @@
                 <a:ea typeface="メイリオ" pitchFamily="34" charset="-122"/>
                 <a:cs typeface="メイリオ" pitchFamily="34" charset="-120"/>
               </a:rPr>
-              <a:t>家族に：眼鏡・補聴器・時計・慣れた物を持参し、</a:t>
-            </a:r>
-            <a:r>
-              <a:rPr lang="ja-JP" altLang="en-US" sz="2400" b="1" dirty="0">
-                <a:solidFill>
-                  <a:srgbClr val="0072B2"/>
-                </a:solidFill>
-                <a:latin typeface="メイリオ" pitchFamily="34" charset="0"/>
-                <a:ea typeface="メイリオ" pitchFamily="34" charset="-122"/>
-                <a:cs typeface="メイリオ" pitchFamily="34" charset="-120"/>
-              </a:rPr>
-              <a:t>付き添い</a:t>
-            </a:r>
-            <a:r>
-              <a:rPr lang="ja-JP" altLang="en-US" sz="2400" dirty="0">
-                <a:solidFill>
-                  <a:srgbClr val="262626"/>
-                </a:solidFill>
-                <a:latin typeface="メイリオ" pitchFamily="34" charset="0"/>
-                <a:ea typeface="メイリオ" pitchFamily="34" charset="-122"/>
-                <a:cs typeface="メイリオ" pitchFamily="34" charset="-120"/>
-              </a:rPr>
-              <a:t>を</a:t>
+              <a:t>スコポラミン、アトロピン、プロメタジン</a:t>
             </a:r>
             <a:endParaRPr lang="ja-JP" sz="2400" dirty="0"/>
           </a:p>
@@ -9518,6 +8621,9 @@
               <a:spcAft>
                 <a:spcPts val="1000"/>
               </a:spcAft>
+              <a:buClr>
+                <a:srgbClr val="262626"/>
+              </a:buClr>
               <a:buSzPct val="100000"/>
               <a:buChar char="•"/>
             </a:pPr>
@@ -9530,7 +8636,7 @@
                 <a:ea typeface="メイリオ" pitchFamily="34" charset="-122"/>
                 <a:cs typeface="メイリオ" pitchFamily="34" charset="-120"/>
               </a:rPr>
-              <a:t>看護師・薬剤師・リハビリと多因子介入を</a:t>
+              <a:t>ジフェンヒドラミン、ヒドロキシジン、</a:t>
             </a:r>
             <a:r>
               <a:rPr lang="ja-JP" altLang="en-US" sz="2400" b="1" dirty="0">
@@ -9541,7 +8647,18 @@
                 <a:ea typeface="メイリオ" pitchFamily="34" charset="-122"/>
                 <a:cs typeface="メイリオ" pitchFamily="34" charset="-120"/>
               </a:rPr>
-              <a:t>入院初日から</a:t>
+              <a:t>H2 遮断薬</a:t>
+            </a:r>
+            <a:r>
+              <a:rPr lang="ja-JP" altLang="en-US" sz="2400" dirty="0">
+                <a:solidFill>
+                  <a:srgbClr val="262626"/>
+                </a:solidFill>
+                <a:latin typeface="メイリオ" pitchFamily="34" charset="0"/>
+                <a:ea typeface="メイリオ" pitchFamily="34" charset="-122"/>
+                <a:cs typeface="メイリオ" pitchFamily="34" charset="-120"/>
+              </a:rPr>
+              <a:t>（ファモチジン）</a:t>
             </a:r>
             <a:endParaRPr lang="ja-JP" sz="2400" dirty="0"/>
           </a:p>
@@ -9550,6 +8667,9 @@
               <a:spcAft>
                 <a:spcPts val="1000"/>
               </a:spcAft>
+              <a:buClr>
+                <a:srgbClr val="262626"/>
+              </a:buClr>
               <a:buSzPct val="100000"/>
               <a:buChar char="•"/>
             </a:pPr>
@@ -9562,18 +8682,18 @@
                 <a:ea typeface="メイリオ" pitchFamily="34" charset="-122"/>
                 <a:cs typeface="メイリオ" pitchFamily="34" charset="-120"/>
               </a:rPr>
-              <a:t>術前から</a:t>
+              <a:t>メトクロプラミド、</a:t>
             </a:r>
             <a:r>
               <a:rPr lang="ja-JP" altLang="en-US" sz="2400" b="1" dirty="0">
                 <a:solidFill>
-                  <a:srgbClr val="0072B2"/>
-                </a:solidFill>
-                <a:latin typeface="メイリオ" pitchFamily="34" charset="0"/>
-                <a:ea typeface="メイリオ" pitchFamily="34" charset="-122"/>
-                <a:cs typeface="メイリオ" pitchFamily="34" charset="-120"/>
-              </a:rPr>
-              <a:t>栄養と運動</a:t>
+                  <a:srgbClr val="D55E00"/>
+                </a:solidFill>
+                <a:latin typeface="メイリオ" pitchFamily="34" charset="0"/>
+                <a:ea typeface="メイリオ" pitchFamily="34" charset="-122"/>
+                <a:cs typeface="メイリオ" pitchFamily="34" charset="-120"/>
+              </a:rPr>
+              <a:t>ペチジン</a:t>
             </a:r>
             <a:r>
               <a:rPr lang="ja-JP" altLang="en-US" sz="2400" dirty="0">
@@ -9584,7 +8704,7 @@
                 <a:ea typeface="メイリオ" pitchFamily="34" charset="-122"/>
                 <a:cs typeface="メイリオ" pitchFamily="34" charset="-120"/>
               </a:rPr>
-              <a:t>（プレハビリテーション）、飲酒・睡眠薬の整理</a:t>
+              <a:t>（シバリングも加温が先）</a:t>
             </a:r>
             <a:endParaRPr lang="ja-JP" sz="2400" dirty="0"/>
           </a:p>
@@ -9593,6 +8713,9 @@
               <a:spcAft>
                 <a:spcPts val="1000"/>
               </a:spcAft>
+              <a:buClr>
+                <a:srgbClr val="262626"/>
+              </a:buClr>
               <a:buSzPct val="100000"/>
               <a:buChar char="•"/>
             </a:pPr>
@@ -9605,7 +8728,7 @@
                 <a:ea typeface="メイリオ" pitchFamily="34" charset="-122"/>
                 <a:cs typeface="メイリオ" pitchFamily="34" charset="-120"/>
               </a:rPr>
-              <a:t>退院先と治療の目標を本人・家族と</a:t>
+              <a:t>ハロペリドールの</a:t>
             </a:r>
             <a:r>
               <a:rPr lang="ja-JP" altLang="en-US" sz="2400" b="1" dirty="0">
@@ -9616,7 +8739,31 @@
                 <a:ea typeface="メイリオ" pitchFamily="34" charset="-122"/>
                 <a:cs typeface="メイリオ" pitchFamily="34" charset="-120"/>
               </a:rPr>
-              <a:t>前もって話す</a:t>
+              <a:t>予防投与・ルーチン投与</a:t>
+            </a:r>
+            <a:endParaRPr lang="ja-JP" sz="2400" dirty="0"/>
+          </a:p>
+          <a:p>
+            <a:pPr algn="l" marL="355600" indent="-355600">
+              <a:spcAft>
+                <a:spcPts val="1000"/>
+              </a:spcAft>
+              <a:buClr>
+                <a:srgbClr val="262626"/>
+              </a:buClr>
+              <a:buSzPct val="100000"/>
+              <a:buChar char="•"/>
+            </a:pPr>
+            <a:r>
+              <a:rPr lang="ja-JP" altLang="en-US" sz="2400" b="1" dirty="0">
+                <a:solidFill>
+                  <a:srgbClr val="0072B2"/>
+                </a:solidFill>
+                <a:latin typeface="メイリオ" pitchFamily="34" charset="0"/>
+                <a:ea typeface="メイリオ" pitchFamily="34" charset="-122"/>
+                <a:cs typeface="メイリオ" pitchFamily="34" charset="-120"/>
+              </a:rPr>
+              <a:t>例外：</a:t>
             </a:r>
             <a:r>
               <a:rPr lang="ja-JP" altLang="en-US" sz="2400" dirty="0">
@@ -9627,7 +8774,7 @@
                 <a:ea typeface="メイリオ" pitchFamily="34" charset="-122"/>
                 <a:cs typeface="メイリオ" pitchFamily="34" charset="-120"/>
               </a:rPr>
-              <a:t>（→ 4-6）</a:t>
+              <a:t>徐脈へのアトロピン、離脱予防のベンゾジアゼピン</a:t>
             </a:r>
             <a:endParaRPr lang="ja-JP" sz="2400" dirty="0"/>
           </a:p>
@@ -9641,12 +8788,12 @@
         </p:nvSpPr>
         <p:spPr>
           <a:xfrm>
-            <a:off x="502920" y="4754880"/>
-            <a:ext cx="11183112" cy="1097280"/>
+            <a:off x="502920" y="5358384"/>
+            <a:ext cx="11183112" cy="530352"/>
           </a:xfrm>
           <a:prstGeom prst="roundRect">
             <a:avLst>
-              <a:gd name="adj" fmla="val 8333"/>
+              <a:gd name="adj" fmla="val 17241"/>
             </a:avLst>
           </a:prstGeom>
           <a:solidFill>
@@ -9666,24 +8813,7 @@
               <a:buNone/>
             </a:pPr>
             <a:r>
-              <a:rPr lang="ja-JP" altLang="en-US" sz="2800" b="1" dirty="0">
-                <a:solidFill>
-                  <a:srgbClr val="262626"/>
-                </a:solidFill>
-                <a:latin typeface="メイリオ" pitchFamily="34" charset="0"/>
-                <a:ea typeface="メイリオ" pitchFamily="34" charset="-122"/>
-                <a:cs typeface="メイリオ" pitchFamily="34" charset="-120"/>
-              </a:rPr>
-              <a:t>老年科医がいない島では、チェックリストと多職種で</a:t>
-            </a:r>
-            <a:endParaRPr lang="ja-JP" sz="2800" dirty="0"/>
-          </a:p>
-          <a:p>
-            <a:pPr algn="ctr" indent="0" marL="0">
-              <a:buNone/>
-            </a:pPr>
-            <a:r>
-              <a:rPr lang="ja-JP" altLang="en-US" sz="2800" b="1" dirty="0">
+              <a:rPr lang="ja-JP" altLang="en-US" sz="2400" b="1" dirty="0">
                 <a:solidFill>
                   <a:srgbClr val="D55E00"/>
                 </a:solidFill>
@@ -9691,20 +8821,42 @@
                 <a:ea typeface="メイリオ" pitchFamily="34" charset="-122"/>
                 <a:cs typeface="メイリオ" pitchFamily="34" charset="-120"/>
               </a:rPr>
-              <a:t>『老年科の目』</a:t>
-            </a:r>
-            <a:r>
-              <a:rPr lang="ja-JP" altLang="en-US" sz="2800" b="1" dirty="0">
-                <a:solidFill>
-                  <a:srgbClr val="262626"/>
-                </a:solidFill>
-                <a:latin typeface="メイリオ" pitchFamily="34" charset="0"/>
-                <a:ea typeface="メイリオ" pitchFamily="34" charset="-122"/>
-                <a:cs typeface="メイリオ" pitchFamily="34" charset="-120"/>
-              </a:rPr>
-              <a:t>を代わりに入れる</a:t>
-            </a:r>
-            <a:endParaRPr lang="ja-JP" sz="2800" dirty="0"/>
+              <a:t>5〜6 剤以上</a:t>
+            </a:r>
+            <a:r>
+              <a:rPr lang="ja-JP" altLang="en-US" sz="2400" b="1" dirty="0">
+                <a:solidFill>
+                  <a:srgbClr val="262626"/>
+                </a:solidFill>
+                <a:latin typeface="メイリオ" pitchFamily="34" charset="0"/>
+                <a:ea typeface="メイリオ" pitchFamily="34" charset="-122"/>
+                <a:cs typeface="メイリオ" pitchFamily="34" charset="-120"/>
+              </a:rPr>
+              <a:t>は転倒・有害事象が増える。</a:t>
+            </a:r>
+            <a:r>
+              <a:rPr lang="ja-JP" altLang="en-US" sz="2400" b="1" dirty="0">
+                <a:solidFill>
+                  <a:srgbClr val="0072B2"/>
+                </a:solidFill>
+                <a:latin typeface="メイリオ" pitchFamily="34" charset="0"/>
+                <a:ea typeface="メイリオ" pitchFamily="34" charset="-122"/>
+                <a:cs typeface="メイリオ" pitchFamily="34" charset="-120"/>
+              </a:rPr>
+              <a:t>お薬手帳</a:t>
+            </a:r>
+            <a:r>
+              <a:rPr lang="ja-JP" altLang="en-US" sz="2400" b="1" dirty="0">
+                <a:solidFill>
+                  <a:srgbClr val="262626"/>
+                </a:solidFill>
+                <a:latin typeface="メイリオ" pitchFamily="34" charset="0"/>
+                <a:ea typeface="メイリオ" pitchFamily="34" charset="-122"/>
+                <a:cs typeface="メイリオ" pitchFamily="34" charset="-120"/>
+              </a:rPr>
+              <a:t>で市販薬まで確認</a:t>
+            </a:r>
+            <a:endParaRPr lang="ja-JP" sz="2400" dirty="0"/>
           </a:p>
         </p:txBody>
       </p:sp>
@@ -9775,7 +8927,7 @@
                 <a:ea typeface="メイリオ" pitchFamily="34" charset="-122"/>
                 <a:cs typeface="メイリオ" pitchFamily="34" charset="-120"/>
               </a:rPr>
-              <a:t>まとめ</a:t>
+              <a:t>高齢者の麻酔の調節</a:t>
             </a:r>
             <a:endParaRPr lang="ja-JP" sz="4400" dirty="0"/>
           </a:p>
@@ -9967,7 +9119,7 @@
             </a:avLst>
           </a:prstGeom>
           <a:solidFill>
-            <a:srgbClr val="D9D9D9"/>
+            <a:srgbClr val="00A8AA"/>
           </a:solidFill>
           <a:ln/>
         </p:spPr>
@@ -9979,9 +9131,9 @@
               <a:buNone/>
             </a:pPr>
             <a:r>
-              <a:rPr lang="ja-JP" altLang="en-US" sz="1050" dirty="0">
-                <a:solidFill>
-                  <a:srgbClr val="404040"/>
+              <a:rPr lang="ja-JP" altLang="en-US" sz="1050" b="1" dirty="0">
+                <a:solidFill>
+                  <a:srgbClr val="FFFFFF"/>
                 </a:solidFill>
                 <a:latin typeface="メイリオ" pitchFamily="34" charset="0"/>
                 <a:ea typeface="メイリオ" pitchFamily="34" charset="-122"/>
@@ -9996,9 +9148,9 @@
               <a:buNone/>
             </a:pPr>
             <a:r>
-              <a:rPr lang="ja-JP" altLang="en-US" sz="1050" dirty="0">
-                <a:solidFill>
-                  <a:srgbClr val="404040"/>
+              <a:rPr lang="ja-JP" altLang="en-US" sz="1050" b="1" dirty="0">
+                <a:solidFill>
+                  <a:srgbClr val="FFFFFF"/>
                 </a:solidFill>
                 <a:latin typeface="メイリオ" pitchFamily="34" charset="0"/>
                 <a:ea typeface="メイリオ" pitchFamily="34" charset="-122"/>
@@ -10027,6 +9179,691 @@
             </a:avLst>
           </a:prstGeom>
           <a:solidFill>
+            <a:srgbClr val="D9D9D9"/>
+          </a:solidFill>
+          <a:ln/>
+        </p:spPr>
+        <p:txBody>
+          <a:bodyPr wrap="none" lIns="0" tIns="0" rIns="0" bIns="0" rtlCol="0" anchor="ctr"/>
+          <a:lstStyle/>
+          <a:p>
+            <a:pPr algn="ctr" indent="0" marL="0">
+              <a:buNone/>
+            </a:pPr>
+            <a:r>
+              <a:rPr lang="ja-JP" altLang="en-US" sz="1050" dirty="0">
+                <a:solidFill>
+                  <a:srgbClr val="404040"/>
+                </a:solidFill>
+                <a:latin typeface="メイリオ" pitchFamily="34" charset="0"/>
+                <a:ea typeface="メイリオ" pitchFamily="34" charset="-122"/>
+                <a:cs typeface="メイリオ" pitchFamily="34" charset="-120"/>
+              </a:rPr>
+              <a:t>まとめ</a:t>
+            </a:r>
+            <a:endParaRPr lang="ja-JP" sz="1050" dirty="0"/>
+          </a:p>
+        </p:txBody>
+      </p:sp>
+      <p:sp>
+        <p:nvSpPr>
+          <p:cNvPr id="9" name="Text 7"/>
+          <p:cNvSpPr txBox="1"/>
+          <p:nvPr/>
+        </p:nvSpPr>
+        <p:spPr>
+          <a:xfrm>
+            <a:off x="11247120" y="6446520"/>
+            <a:ext cx="731520" cy="320040"/>
+          </a:xfrm>
+          <a:prstGeom prst="rect">
+            <a:avLst/>
+          </a:prstGeom>
+          <a:noFill/>
+          <a:ln/>
+        </p:spPr>
+        <p:txBody>
+          <a:bodyPr wrap="square" lIns="0" tIns="0" rIns="0" bIns="0" rtlCol="0" anchor="b"/>
+          <a:lstStyle/>
+          <a:p>
+            <a:pPr algn="r" indent="0" marL="0">
+              <a:buNone/>
+            </a:pPr>
+            <a:r>
+              <a:rPr lang="ja-JP" altLang="en-US" sz="1200" dirty="0">
+                <a:solidFill>
+                  <a:srgbClr val="7F7F7F"/>
+                </a:solidFill>
+                <a:latin typeface="メイリオ" pitchFamily="34" charset="0"/>
+                <a:ea typeface="メイリオ" pitchFamily="34" charset="-122"/>
+                <a:cs typeface="メイリオ" pitchFamily="34" charset="-120"/>
+              </a:rPr>
+              <a:t>7</a:t>
+            </a:r>
+            <a:endParaRPr lang="ja-JP" sz="1200" dirty="0"/>
+          </a:p>
+        </p:txBody>
+      </p:sp>
+      <p:sp>
+        <p:nvSpPr>
+          <p:cNvPr id="10" name="Text 8"/>
+          <p:cNvSpPr txBox="1"/>
+          <p:nvPr/>
+        </p:nvSpPr>
+        <p:spPr>
+          <a:xfrm>
+            <a:off x="502920" y="5943600"/>
+            <a:ext cx="10607040" cy="777240"/>
+          </a:xfrm>
+          <a:prstGeom prst="rect">
+            <a:avLst/>
+          </a:prstGeom>
+          <a:noFill/>
+          <a:ln/>
+        </p:spPr>
+        <p:txBody>
+          <a:bodyPr wrap="square" lIns="0" tIns="0" rIns="0" bIns="0" rtlCol="0" anchor="b"/>
+          <a:lstStyle/>
+          <a:p>
+            <a:pPr algn="l" indent="0" marL="0">
+              <a:buNone/>
+            </a:pPr>
+            <a:r>
+              <a:rPr lang="ja-JP" altLang="en-US" sz="1600" dirty="0">
+                <a:solidFill>
+                  <a:srgbClr val="595959"/>
+                </a:solidFill>
+                <a:latin typeface="メイリオ" pitchFamily="34" charset="0"/>
+                <a:ea typeface="メイリオ" pitchFamily="34" charset="-122"/>
+                <a:cs typeface="メイリオ" pitchFamily="34" charset="-120"/>
+              </a:rPr>
+              <a:t>Berger M, et al. Anesth Analg 2018;127:1406-1413 / Mapleson WW.</a:t>
+            </a:r>
+            <a:endParaRPr lang="ja-JP" sz="1600" dirty="0"/>
+          </a:p>
+          <a:p>
+            <a:pPr algn="l" indent="0" marL="0">
+              <a:buNone/>
+            </a:pPr>
+            <a:r>
+              <a:rPr lang="ja-JP" altLang="en-US" sz="1600" dirty="0">
+                <a:solidFill>
+                  <a:srgbClr val="595959"/>
+                </a:solidFill>
+                <a:latin typeface="メイリオ" pitchFamily="34" charset="0"/>
+                <a:ea typeface="メイリオ" pitchFamily="34" charset="-122"/>
+                <a:cs typeface="メイリオ" pitchFamily="34" charset="-120"/>
+              </a:rPr>
+              <a:t>Br J Anaesth 1996;76:179-185 / Schnider TW, et al. Anesthesiology 1999;90:1502-1516</a:t>
+            </a:r>
+            <a:endParaRPr lang="ja-JP" sz="1600" dirty="0"/>
+          </a:p>
+        </p:txBody>
+      </p:sp>
+      <p:sp>
+        <p:nvSpPr>
+          <p:cNvPr id="11" name="Text 9"/>
+          <p:cNvSpPr txBox="1"/>
+          <p:nvPr/>
+        </p:nvSpPr>
+        <p:spPr>
+          <a:xfrm>
+            <a:off x="502920" y="1737360"/>
+            <a:ext cx="11155680" cy="2798064"/>
+          </a:xfrm>
+          <a:prstGeom prst="rect">
+            <a:avLst/>
+          </a:prstGeom>
+          <a:noFill/>
+          <a:ln/>
+        </p:spPr>
+        <p:txBody>
+          <a:bodyPr wrap="square" lIns="0" tIns="0" rIns="0" bIns="0" rtlCol="0" anchor="t"/>
+          <a:lstStyle/>
+          <a:p>
+            <a:pPr algn="l" marL="355600" indent="-355600">
+              <a:spcAft>
+                <a:spcPts val="1000"/>
+              </a:spcAft>
+              <a:buClr>
+                <a:srgbClr val="262626"/>
+              </a:buClr>
+              <a:buSzPct val="100000"/>
+              <a:buChar char="•"/>
+            </a:pPr>
+            <a:r>
+              <a:rPr lang="ja-JP" altLang="en-US" sz="2400" dirty="0">
+                <a:solidFill>
+                  <a:srgbClr val="262626"/>
+                </a:solidFill>
+                <a:latin typeface="メイリオ" pitchFamily="34" charset="0"/>
+                <a:ea typeface="メイリオ" pitchFamily="34" charset="-122"/>
+                <a:cs typeface="メイリオ" pitchFamily="34" charset="-120"/>
+              </a:rPr>
+              <a:t>MAC は 10 歳ごとに</a:t>
+            </a:r>
+            <a:r>
+              <a:rPr lang="ja-JP" altLang="en-US" sz="2400" b="1" dirty="0">
+                <a:solidFill>
+                  <a:srgbClr val="D55E00"/>
+                </a:solidFill>
+                <a:latin typeface="メイリオ" pitchFamily="34" charset="0"/>
+                <a:ea typeface="メイリオ" pitchFamily="34" charset="-122"/>
+                <a:cs typeface="メイリオ" pitchFamily="34" charset="-120"/>
+              </a:rPr>
+              <a:t>約 6% 低下</a:t>
+            </a:r>
+            <a:r>
+              <a:rPr lang="ja-JP" altLang="en-US" sz="2400" dirty="0">
+                <a:solidFill>
+                  <a:srgbClr val="262626"/>
+                </a:solidFill>
+                <a:latin typeface="メイリオ" pitchFamily="34" charset="0"/>
+                <a:ea typeface="メイリオ" pitchFamily="34" charset="-122"/>
+                <a:cs typeface="メイリオ" pitchFamily="34" charset="-120"/>
+              </a:rPr>
+              <a:t>（80 歳のセボフルラン約 1.4%）</a:t>
+            </a:r>
+            <a:endParaRPr lang="ja-JP" sz="2400" dirty="0"/>
+          </a:p>
+          <a:p>
+            <a:pPr algn="l" marL="355600" indent="-355600">
+              <a:spcAft>
+                <a:spcPts val="1000"/>
+              </a:spcAft>
+              <a:buClr>
+                <a:srgbClr val="262626"/>
+              </a:buClr>
+              <a:buSzPct val="100000"/>
+              <a:buChar char="•"/>
+            </a:pPr>
+            <a:r>
+              <a:rPr lang="ja-JP" altLang="en-US" sz="2400" b="1" dirty="0">
+                <a:solidFill>
+                  <a:srgbClr val="0072B2"/>
+                </a:solidFill>
+                <a:latin typeface="メイリオ" pitchFamily="34" charset="0"/>
+                <a:ea typeface="メイリオ" pitchFamily="34" charset="-122"/>
+                <a:cs typeface="メイリオ" pitchFamily="34" charset="-120"/>
+              </a:rPr>
+              <a:t>年齢補正 MAC 比</a:t>
+            </a:r>
+            <a:r>
+              <a:rPr lang="ja-JP" altLang="en-US" sz="2400" dirty="0">
+                <a:solidFill>
+                  <a:srgbClr val="262626"/>
+                </a:solidFill>
+                <a:latin typeface="メイリオ" pitchFamily="34" charset="0"/>
+                <a:ea typeface="メイリオ" pitchFamily="34" charset="-122"/>
+                <a:cs typeface="メイリオ" pitchFamily="34" charset="-120"/>
+              </a:rPr>
+              <a:t>を見る。BIS は高く出ることがある</a:t>
+            </a:r>
+            <a:endParaRPr lang="ja-JP" sz="2400" dirty="0"/>
+          </a:p>
+          <a:p>
+            <a:pPr algn="l" marL="355600" indent="-355600">
+              <a:spcAft>
+                <a:spcPts val="1000"/>
+              </a:spcAft>
+              <a:buClr>
+                <a:srgbClr val="262626"/>
+              </a:buClr>
+              <a:buSzPct val="100000"/>
+              <a:buChar char="•"/>
+            </a:pPr>
+            <a:r>
+              <a:rPr lang="ja-JP" altLang="en-US" sz="2400" dirty="0">
+                <a:solidFill>
+                  <a:srgbClr val="262626"/>
+                </a:solidFill>
+                <a:latin typeface="メイリオ" pitchFamily="34" charset="0"/>
+                <a:ea typeface="メイリオ" pitchFamily="34" charset="-122"/>
+                <a:cs typeface="メイリオ" pitchFamily="34" charset="-120"/>
+              </a:rPr>
+              <a:t>プロポフォール・ミダゾラムは</a:t>
+            </a:r>
+            <a:r>
+              <a:rPr lang="ja-JP" altLang="en-US" sz="2400" b="1" dirty="0">
+                <a:solidFill>
+                  <a:srgbClr val="D55E00"/>
+                </a:solidFill>
+                <a:latin typeface="メイリオ" pitchFamily="34" charset="0"/>
+                <a:ea typeface="メイリオ" pitchFamily="34" charset="-122"/>
+                <a:cs typeface="メイリオ" pitchFamily="34" charset="-120"/>
+              </a:rPr>
+              <a:t>減量し、ゆっくり</a:t>
+            </a:r>
+            <a:r>
+              <a:rPr lang="ja-JP" altLang="en-US" sz="2400" dirty="0">
+                <a:solidFill>
+                  <a:srgbClr val="262626"/>
+                </a:solidFill>
+                <a:latin typeface="メイリオ" pitchFamily="34" charset="0"/>
+                <a:ea typeface="メイリオ" pitchFamily="34" charset="-122"/>
+                <a:cs typeface="メイリオ" pitchFamily="34" charset="-120"/>
+              </a:rPr>
+              <a:t>（感受性が高い）</a:t>
+            </a:r>
+            <a:endParaRPr lang="ja-JP" sz="2400" dirty="0"/>
+          </a:p>
+          <a:p>
+            <a:pPr algn="l" marL="355600" indent="-355600">
+              <a:spcAft>
+                <a:spcPts val="1000"/>
+              </a:spcAft>
+              <a:buClr>
+                <a:srgbClr val="262626"/>
+              </a:buClr>
+              <a:buSzPct val="100000"/>
+              <a:buChar char="•"/>
+            </a:pPr>
+            <a:r>
+              <a:rPr lang="ja-JP" altLang="en-US" sz="2400" dirty="0">
+                <a:solidFill>
+                  <a:srgbClr val="262626"/>
+                </a:solidFill>
+                <a:latin typeface="メイリオ" pitchFamily="34" charset="0"/>
+                <a:ea typeface="メイリオ" pitchFamily="34" charset="-122"/>
+                <a:cs typeface="メイリオ" pitchFamily="34" charset="-120"/>
+              </a:rPr>
+              <a:t>ベースラインに対する</a:t>
+            </a:r>
+            <a:r>
+              <a:rPr lang="ja-JP" altLang="en-US" sz="2400" b="1" dirty="0">
+                <a:solidFill>
+                  <a:srgbClr val="D55E00"/>
+                </a:solidFill>
+                <a:latin typeface="メイリオ" pitchFamily="34" charset="0"/>
+                <a:ea typeface="メイリオ" pitchFamily="34" charset="-122"/>
+                <a:cs typeface="メイリオ" pitchFamily="34" charset="-120"/>
+              </a:rPr>
+              <a:t>相対的低血圧</a:t>
+            </a:r>
+            <a:r>
+              <a:rPr lang="ja-JP" altLang="en-US" sz="2400" dirty="0">
+                <a:solidFill>
+                  <a:srgbClr val="262626"/>
+                </a:solidFill>
+                <a:latin typeface="メイリオ" pitchFamily="34" charset="0"/>
+                <a:ea typeface="メイリオ" pitchFamily="34" charset="-122"/>
+                <a:cs typeface="メイリオ" pitchFamily="34" charset="-120"/>
+              </a:rPr>
+              <a:t>を避ける。正常体温を保つ</a:t>
+            </a:r>
+            <a:endParaRPr lang="ja-JP" sz="2400" dirty="0"/>
+          </a:p>
+          <a:p>
+            <a:pPr algn="l" marL="355600" indent="-355600">
+              <a:spcAft>
+                <a:spcPts val="1000"/>
+              </a:spcAft>
+              <a:buClr>
+                <a:srgbClr val="262626"/>
+              </a:buClr>
+              <a:buSzPct val="100000"/>
+              <a:buChar char="•"/>
+            </a:pPr>
+            <a:r>
+              <a:rPr lang="ja-JP" altLang="en-US" sz="2400" b="1" dirty="0">
+                <a:solidFill>
+                  <a:srgbClr val="0072B2"/>
+                </a:solidFill>
+                <a:latin typeface="メイリオ" pitchFamily="34" charset="0"/>
+                <a:ea typeface="メイリオ" pitchFamily="34" charset="-122"/>
+                <a:cs typeface="メイリオ" pitchFamily="34" charset="-120"/>
+              </a:rPr>
+              <a:t>鎮静の少ない多角的鎮痛</a:t>
+            </a:r>
+            <a:r>
+              <a:rPr lang="ja-JP" altLang="en-US" sz="2400" dirty="0">
+                <a:solidFill>
+                  <a:srgbClr val="262626"/>
+                </a:solidFill>
+                <a:latin typeface="メイリオ" pitchFamily="34" charset="0"/>
+                <a:ea typeface="メイリオ" pitchFamily="34" charset="-122"/>
+                <a:cs typeface="メイリオ" pitchFamily="34" charset="-120"/>
+              </a:rPr>
+              <a:t>。区域麻酔そのものではせん妄は減らない</a:t>
+            </a:r>
+            <a:endParaRPr lang="ja-JP" sz="2400" dirty="0"/>
+          </a:p>
+        </p:txBody>
+      </p:sp>
+      <p:sp>
+        <p:nvSpPr>
+          <p:cNvPr id="12" name="Text 10"/>
+          <p:cNvSpPr/>
+          <p:nvPr/>
+        </p:nvSpPr>
+        <p:spPr>
+          <a:xfrm>
+            <a:off x="502920" y="4754880"/>
+            <a:ext cx="11183112" cy="1097280"/>
+          </a:xfrm>
+          <a:prstGeom prst="roundRect">
+            <a:avLst>
+              <a:gd name="adj" fmla="val 8333"/>
+            </a:avLst>
+          </a:prstGeom>
+          <a:solidFill>
+            <a:srgbClr val="FFFFFF"/>
+          </a:solidFill>
+          <a:ln w="38100">
+            <a:solidFill>
+              <a:srgbClr val="00A8AA"/>
+            </a:solidFill>
+          </a:ln>
+        </p:spPr>
+        <p:txBody>
+          <a:bodyPr wrap="square" lIns="73152" tIns="73152" rIns="73152" bIns="73152" rtlCol="0" anchor="ctr"/>
+          <a:lstStyle/>
+          <a:p>
+            <a:pPr algn="ctr" indent="0" marL="0">
+              <a:buNone/>
+            </a:pPr>
+            <a:r>
+              <a:rPr lang="ja-JP" altLang="en-US" sz="2800" b="1" dirty="0">
+                <a:solidFill>
+                  <a:srgbClr val="262626"/>
+                </a:solidFill>
+                <a:latin typeface="メイリオ" pitchFamily="34" charset="0"/>
+                <a:ea typeface="メイリオ" pitchFamily="34" charset="-122"/>
+                <a:cs typeface="メイリオ" pitchFamily="34" charset="-120"/>
+              </a:rPr>
+              <a:t>若年成人と同じ設定・用量にしない。</a:t>
+            </a:r>
+            <a:endParaRPr lang="ja-JP" sz="2800" dirty="0"/>
+          </a:p>
+          <a:p>
+            <a:pPr algn="ctr" indent="0" marL="0">
+              <a:buNone/>
+            </a:pPr>
+            <a:r>
+              <a:rPr lang="ja-JP" altLang="en-US" sz="2800" b="1" dirty="0">
+                <a:solidFill>
+                  <a:srgbClr val="D55E00"/>
+                </a:solidFill>
+                <a:latin typeface="メイリオ" pitchFamily="34" charset="0"/>
+                <a:ea typeface="メイリオ" pitchFamily="34" charset="-122"/>
+                <a:cs typeface="メイリオ" pitchFamily="34" charset="-120"/>
+              </a:rPr>
+              <a:t>少量から</a:t>
+            </a:r>
+            <a:r>
+              <a:rPr lang="ja-JP" altLang="en-US" sz="2800" b="1" dirty="0">
+                <a:solidFill>
+                  <a:srgbClr val="262626"/>
+                </a:solidFill>
+                <a:latin typeface="メイリオ" pitchFamily="34" charset="0"/>
+                <a:ea typeface="メイリオ" pitchFamily="34" charset="-122"/>
+                <a:cs typeface="メイリオ" pitchFamily="34" charset="-120"/>
+              </a:rPr>
+              <a:t>、効果を待って追加</a:t>
+            </a:r>
+            <a:endParaRPr lang="ja-JP" sz="2800" dirty="0"/>
+          </a:p>
+        </p:txBody>
+      </p:sp>
+    </p:spTree>
+  </p:cSld>
+  <p:clrMapOvr>
+    <a:masterClrMapping/>
+  </p:clrMapOvr>
+</p:sld>
+</file>
+
+<file path=ppt/slides/slide9.xml><?xml version="1.0" encoding="utf-8"?>
+<p:sld xmlns:a="http://schemas.openxmlformats.org/drawingml/2006/main" xmlns:r="http://schemas.openxmlformats.org/officeDocument/2006/relationships" xmlns:p="http://schemas.openxmlformats.org/presentationml/2006/main">
+  <p:cSld name="Slide 9">
+    <p:spTree>
+      <p:nvGrpSpPr>
+        <p:cNvPr id="1" name=""/>
+        <p:cNvGrpSpPr/>
+        <p:nvPr/>
+      </p:nvGrpSpPr>
+      <p:grpSpPr>
+        <a:xfrm>
+          <a:off x="0" y="0"/>
+          <a:ext cx="0" cy="0"/>
+          <a:chOff x="0" y="0"/>
+          <a:chExt cx="0" cy="0"/>
+        </a:xfrm>
+      </p:grpSpPr>
+      <p:sp>
+        <p:nvSpPr>
+          <p:cNvPr id="2" name="Title"/>
+          <p:cNvSpPr>
+            <a:spLocks noGrp="1"/>
+          </p:cNvSpPr>
+          <p:nvPr>
+            <p:ph type="title"/>
+          </p:nvPr>
+        </p:nvSpPr>
+        <p:spPr>
+          <a:xfrm>
+            <a:off x="502920" y="320040"/>
+            <a:ext cx="8503920" cy="868680"/>
+          </a:xfrm>
+          <a:prstGeom prst="rect">
+            <a:avLst/>
+          </a:prstGeom>
+          <a:noFill/>
+          <a:ln/>
+        </p:spPr>
+        <p:txBody>
+          <a:bodyPr wrap="square" lIns="0" tIns="0" rIns="0" bIns="0" rtlCol="0" anchor="ctr"/>
+          <a:lstStyle/>
+          <a:p>
+            <a:pPr algn="l" indent="0" marL="0">
+              <a:buNone/>
+            </a:pPr>
+            <a:r>
+              <a:rPr lang="ja-JP" altLang="en-US" sz="4400" b="1" dirty="0">
+                <a:ln w="28575">
+                  <a:solidFill>
+                    <a:srgbClr val="000000"/>
+                  </a:solidFill>
+                </a:ln>
+                <a:solidFill>
+                  <a:srgbClr val="BF9000"/>
+                </a:solidFill>
+                <a:latin typeface="メイリオ" pitchFamily="34" charset="0"/>
+                <a:ea typeface="メイリオ" pitchFamily="34" charset="-122"/>
+                <a:cs typeface="メイリオ" pitchFamily="34" charset="-120"/>
+              </a:rPr>
+              <a:t>相談先と離島での工夫</a:t>
+            </a:r>
+            <a:endParaRPr lang="ja-JP" sz="4400" dirty="0"/>
+          </a:p>
+        </p:txBody>
+      </p:sp>
+      <p:sp>
+        <p:nvSpPr>
+          <p:cNvPr id="3" name="Shape 1"/>
+          <p:cNvSpPr/>
+          <p:nvPr/>
+        </p:nvSpPr>
+        <p:spPr>
+          <a:xfrm>
+            <a:off x="0" y="1389888"/>
+            <a:ext cx="12191970" cy="0"/>
+          </a:xfrm>
+          <a:prstGeom prst="line">
+            <a:avLst/>
+          </a:prstGeom>
+          <a:noFill/>
+          <a:ln w="101600">
+            <a:solidFill>
+              <a:srgbClr val="BF9000"/>
+            </a:solidFill>
+            <a:prstDash val="solid"/>
+          </a:ln>
+        </p:spPr>
+      </p:sp>
+      <p:sp>
+        <p:nvSpPr>
+          <p:cNvPr id="4" name="Text 2"/>
+          <p:cNvSpPr/>
+          <p:nvPr/>
+        </p:nvSpPr>
+        <p:spPr>
+          <a:xfrm>
+            <a:off x="8677656" y="54864"/>
+            <a:ext cx="621792" cy="585216"/>
+          </a:xfrm>
+          <a:prstGeom prst="roundRect">
+            <a:avLst>
+              <a:gd name="adj" fmla="val 7813"/>
+            </a:avLst>
+          </a:prstGeom>
+          <a:solidFill>
+            <a:srgbClr val="D9D9D9"/>
+          </a:solidFill>
+          <a:ln/>
+        </p:spPr>
+        <p:txBody>
+          <a:bodyPr wrap="none" lIns="0" tIns="0" rIns="0" bIns="0" rtlCol="0" anchor="ctr"/>
+          <a:lstStyle/>
+          <a:p>
+            <a:pPr algn="ctr" indent="0" marL="0">
+              <a:buNone/>
+            </a:pPr>
+            <a:r>
+              <a:rPr lang="ja-JP" altLang="en-US" sz="1050" dirty="0">
+                <a:solidFill>
+                  <a:srgbClr val="404040"/>
+                </a:solidFill>
+                <a:latin typeface="メイリオ" pitchFamily="34" charset="0"/>
+                <a:ea typeface="メイリオ" pitchFamily="34" charset="-122"/>
+                <a:cs typeface="メイリオ" pitchFamily="34" charset="-120"/>
+              </a:rPr>
+              <a:t>フレイル</a:t>
+            </a:r>
+            <a:endParaRPr lang="ja-JP" sz="1050" dirty="0"/>
+          </a:p>
+        </p:txBody>
+      </p:sp>
+      <p:sp>
+        <p:nvSpPr>
+          <p:cNvPr id="5" name="Text 3"/>
+          <p:cNvSpPr/>
+          <p:nvPr/>
+        </p:nvSpPr>
+        <p:spPr>
+          <a:xfrm>
+            <a:off x="9354312" y="54864"/>
+            <a:ext cx="621792" cy="585216"/>
+          </a:xfrm>
+          <a:prstGeom prst="roundRect">
+            <a:avLst>
+              <a:gd name="adj" fmla="val 7813"/>
+            </a:avLst>
+          </a:prstGeom>
+          <a:solidFill>
+            <a:srgbClr val="D9D9D9"/>
+          </a:solidFill>
+          <a:ln/>
+        </p:spPr>
+        <p:txBody>
+          <a:bodyPr wrap="none" lIns="0" tIns="0" rIns="0" bIns="0" rtlCol="0" anchor="ctr"/>
+          <a:lstStyle/>
+          <a:p>
+            <a:pPr algn="ctr" indent="0" marL="0">
+              <a:buNone/>
+            </a:pPr>
+            <a:r>
+              <a:rPr lang="ja-JP" altLang="en-US" sz="1050" dirty="0">
+                <a:solidFill>
+                  <a:srgbClr val="404040"/>
+                </a:solidFill>
+                <a:latin typeface="メイリオ" pitchFamily="34" charset="0"/>
+                <a:ea typeface="メイリオ" pitchFamily="34" charset="-122"/>
+                <a:cs typeface="メイリオ" pitchFamily="34" charset="-120"/>
+              </a:rPr>
+              <a:t>認知</a:t>
+            </a:r>
+            <a:endParaRPr lang="ja-JP" sz="1050" dirty="0"/>
+          </a:p>
+          <a:p>
+            <a:pPr algn="ctr" indent="0" marL="0">
+              <a:buNone/>
+            </a:pPr>
+            <a:r>
+              <a:rPr lang="ja-JP" altLang="en-US" sz="1050" dirty="0">
+                <a:solidFill>
+                  <a:srgbClr val="404040"/>
+                </a:solidFill>
+                <a:latin typeface="メイリオ" pitchFamily="34" charset="0"/>
+                <a:ea typeface="メイリオ" pitchFamily="34" charset="-122"/>
+                <a:cs typeface="メイリオ" pitchFamily="34" charset="-120"/>
+              </a:rPr>
+              <a:t>機能</a:t>
+            </a:r>
+            <a:endParaRPr lang="ja-JP" sz="1050" dirty="0"/>
+          </a:p>
+        </p:txBody>
+      </p:sp>
+      <p:sp>
+        <p:nvSpPr>
+          <p:cNvPr id="6" name="Text 4"/>
+          <p:cNvSpPr/>
+          <p:nvPr/>
+        </p:nvSpPr>
+        <p:spPr>
+          <a:xfrm>
+            <a:off x="10030968" y="54864"/>
+            <a:ext cx="621792" cy="585216"/>
+          </a:xfrm>
+          <a:prstGeom prst="roundRect">
+            <a:avLst>
+              <a:gd name="adj" fmla="val 7813"/>
+            </a:avLst>
+          </a:prstGeom>
+          <a:solidFill>
+            <a:srgbClr val="D9D9D9"/>
+          </a:solidFill>
+          <a:ln/>
+        </p:spPr>
+        <p:txBody>
+          <a:bodyPr wrap="none" lIns="0" tIns="0" rIns="0" bIns="0" rtlCol="0" anchor="ctr"/>
+          <a:lstStyle/>
+          <a:p>
+            <a:pPr algn="ctr" indent="0" marL="0">
+              <a:buNone/>
+            </a:pPr>
+            <a:r>
+              <a:rPr lang="ja-JP" altLang="en-US" sz="1050" dirty="0">
+                <a:solidFill>
+                  <a:srgbClr val="404040"/>
+                </a:solidFill>
+                <a:latin typeface="メイリオ" pitchFamily="34" charset="0"/>
+                <a:ea typeface="メイリオ" pitchFamily="34" charset="-122"/>
+                <a:cs typeface="メイリオ" pitchFamily="34" charset="-120"/>
+              </a:rPr>
+              <a:t>せん妄</a:t>
+            </a:r>
+            <a:endParaRPr lang="ja-JP" sz="1050" dirty="0"/>
+          </a:p>
+        </p:txBody>
+      </p:sp>
+      <p:sp>
+        <p:nvSpPr>
+          <p:cNvPr id="7" name="Text 5"/>
+          <p:cNvSpPr/>
+          <p:nvPr/>
+        </p:nvSpPr>
+        <p:spPr>
+          <a:xfrm>
+            <a:off x="10707624" y="54864"/>
+            <a:ext cx="621792" cy="585216"/>
+          </a:xfrm>
+          <a:prstGeom prst="roundRect">
+            <a:avLst>
+              <a:gd name="adj" fmla="val 7813"/>
+            </a:avLst>
+          </a:prstGeom>
+          <a:solidFill>
             <a:srgbClr val="00A8AA"/>
           </a:solidFill>
           <a:ln/>
@@ -10047,6 +9884,66 @@
                 <a:ea typeface="メイリオ" pitchFamily="34" charset="-122"/>
                 <a:cs typeface="メイリオ" pitchFamily="34" charset="-120"/>
               </a:rPr>
+              <a:t>薬と</a:t>
+            </a:r>
+            <a:endParaRPr lang="ja-JP" sz="1050" dirty="0"/>
+          </a:p>
+          <a:p>
+            <a:pPr algn="ctr" indent="0" marL="0">
+              <a:buNone/>
+            </a:pPr>
+            <a:r>
+              <a:rPr lang="ja-JP" altLang="en-US" sz="1050" b="1" dirty="0">
+                <a:solidFill>
+                  <a:srgbClr val="FFFFFF"/>
+                </a:solidFill>
+                <a:latin typeface="メイリオ" pitchFamily="34" charset="0"/>
+                <a:ea typeface="メイリオ" pitchFamily="34" charset="-122"/>
+                <a:cs typeface="メイリオ" pitchFamily="34" charset="-120"/>
+              </a:rPr>
+              <a:t>麻酔</a:t>
+            </a:r>
+            <a:endParaRPr lang="ja-JP" sz="1050" dirty="0"/>
+          </a:p>
+        </p:txBody>
+      </p:sp>
+      <p:sp>
+        <p:nvSpPr>
+          <p:cNvPr id="8" name="Text 6"/>
+          <p:cNvSpPr/>
+          <p:nvPr/>
+        </p:nvSpPr>
+        <p:spPr>
+          <a:xfrm>
+            <a:off x="11384280" y="54864"/>
+            <a:ext cx="621792" cy="585216"/>
+          </a:xfrm>
+          <a:prstGeom prst="roundRect">
+            <a:avLst>
+              <a:gd name="adj" fmla="val 7813"/>
+            </a:avLst>
+          </a:prstGeom>
+          <a:solidFill>
+            <a:srgbClr val="D9D9D9"/>
+          </a:solidFill>
+          <a:ln/>
+        </p:spPr>
+        <p:txBody>
+          <a:bodyPr wrap="none" lIns="0" tIns="0" rIns="0" bIns="0" rtlCol="0" anchor="ctr"/>
+          <a:lstStyle/>
+          <a:p>
+            <a:pPr algn="ctr" indent="0" marL="0">
+              <a:buNone/>
+            </a:pPr>
+            <a:r>
+              <a:rPr lang="ja-JP" altLang="en-US" sz="1050" dirty="0">
+                <a:solidFill>
+                  <a:srgbClr val="404040"/>
+                </a:solidFill>
+                <a:latin typeface="メイリオ" pitchFamily="34" charset="0"/>
+                <a:ea typeface="メイリオ" pitchFamily="34" charset="-122"/>
+                <a:cs typeface="メイリオ" pitchFamily="34" charset="-120"/>
+              </a:rPr>
               <a:t>まとめ</a:t>
             </a:r>
             <a:endParaRPr lang="ja-JP" sz="1050" dirty="0"/>
@@ -10086,7 +9983,7 @@
                 <a:ea typeface="メイリオ" pitchFamily="34" charset="-122"/>
                 <a:cs typeface="メイリオ" pitchFamily="34" charset="-120"/>
               </a:rPr>
-              <a:t>7</a:t>
+              <a:t>8</a:t>
             </a:r>
             <a:endParaRPr lang="ja-JP" sz="1200" dirty="0"/>
           </a:p>
@@ -10125,7 +10022,7 @@
                 <a:ea typeface="メイリオ" pitchFamily="34" charset="-122"/>
                 <a:cs typeface="メイリオ" pitchFamily="34" charset="-120"/>
               </a:rPr>
-              <a:t>Berger M, et al. Anesth Analg 2018;127:1406-1413 / American Geriatrics Society.</a:t>
+              <a:t>Marcantonio ER, et al. J Am Geriatr Soc 2001;49:516-522 / Berger M, et al.</a:t>
             </a:r>
             <a:endParaRPr lang="ja-JP" sz="1600" dirty="0"/>
           </a:p>
@@ -10142,7 +10039,7 @@
                 <a:ea typeface="メイリオ" pitchFamily="34" charset="-122"/>
                 <a:cs typeface="メイリオ" pitchFamily="34" charset="-120"/>
               </a:rPr>
-              <a:t>J Am Geriatr Soc 2015;63:142-150 / Aldecoa C, et al. Eur J Anaesthesiol 2024;41:81-108</a:t>
+              <a:t>Anesth Analg 2018;127:1406-1413 / Chow WB, et al. J Am Coll Surg 2012;215:453-466</a:t>
             </a:r>
             <a:endParaRPr lang="ja-JP" sz="1600" dirty="0"/>
           </a:p>
@@ -10156,8 +10053,8 @@
         </p:nvSpPr>
         <p:spPr>
           <a:xfrm>
-            <a:off x="502920" y="1828800"/>
-            <a:ext cx="11155680" cy="4087368"/>
+            <a:off x="502920" y="1737360"/>
+            <a:ext cx="11155680" cy="2798064"/>
           </a:xfrm>
           <a:prstGeom prst="rect">
             <a:avLst/>
@@ -10171,8 +10068,11 @@
           <a:p>
             <a:pPr algn="l" marL="355600" indent="-355600">
               <a:spcAft>
-                <a:spcPts val="3200"/>
+                <a:spcPts val="1000"/>
               </a:spcAft>
+              <a:buClr>
+                <a:srgbClr val="262626"/>
+              </a:buClr>
               <a:buSzPct val="100000"/>
               <a:buChar char="•"/>
             </a:pPr>
@@ -10185,18 +10085,18 @@
                 <a:ea typeface="メイリオ" pitchFamily="34" charset="-122"/>
                 <a:cs typeface="メイリオ" pitchFamily="34" charset="-120"/>
               </a:rPr>
-              <a:t>年齢だけでなく </a:t>
+              <a:t>老年科・認知症ケアチーム・精神科リエゾンに</a:t>
             </a:r>
             <a:r>
               <a:rPr lang="ja-JP" altLang="en-US" sz="2400" b="1" dirty="0">
                 <a:solidFill>
-                  <a:srgbClr val="0072B2"/>
-                </a:solidFill>
-                <a:latin typeface="メイリオ" pitchFamily="34" charset="0"/>
-                <a:ea typeface="メイリオ" pitchFamily="34" charset="-122"/>
-                <a:cs typeface="メイリオ" pitchFamily="34" charset="-120"/>
-              </a:rPr>
-              <a:t>CFS を病前で</a:t>
+                  <a:srgbClr val="D55E00"/>
+                </a:solidFill>
+                <a:latin typeface="メイリオ" pitchFamily="34" charset="0"/>
+                <a:ea typeface="メイリオ" pitchFamily="34" charset="-122"/>
+                <a:cs typeface="メイリオ" pitchFamily="34" charset="-120"/>
+              </a:rPr>
+              <a:t>術前から</a:t>
             </a:r>
             <a:r>
               <a:rPr lang="ja-JP" altLang="en-US" sz="2400" dirty="0">
@@ -10207,15 +10107,18 @@
                 <a:ea typeface="メイリオ" pitchFamily="34" charset="-122"/>
                 <a:cs typeface="メイリオ" pitchFamily="34" charset="-120"/>
               </a:rPr>
-              <a:t>。4 以上は注意、5 以上はフレイル</a:t>
+              <a:t>（遠隔でも）</a:t>
             </a:r>
             <a:endParaRPr lang="ja-JP" sz="2400" dirty="0"/>
           </a:p>
           <a:p>
             <a:pPr algn="l" marL="355600" indent="-355600">
               <a:spcAft>
-                <a:spcPts val="3200"/>
+                <a:spcPts val="1000"/>
               </a:spcAft>
+              <a:buClr>
+                <a:srgbClr val="262626"/>
+              </a:buClr>
               <a:buSzPct val="100000"/>
               <a:buChar char="•"/>
             </a:pPr>
@@ -10228,7 +10131,7 @@
                 <a:ea typeface="メイリオ" pitchFamily="34" charset="-122"/>
                 <a:cs typeface="メイリオ" pitchFamily="34" charset="-120"/>
               </a:rPr>
-              <a:t>65 歳超は</a:t>
+              <a:t>家族に：眼鏡・補聴器・時計・慣れた物を持参し、</a:t>
             </a:r>
             <a:r>
               <a:rPr lang="ja-JP" altLang="en-US" sz="2400" b="1" dirty="0">
@@ -10239,7 +10142,7 @@
                 <a:ea typeface="メイリオ" pitchFamily="34" charset="-122"/>
                 <a:cs typeface="メイリオ" pitchFamily="34" charset="-120"/>
               </a:rPr>
-              <a:t>全員 Mini-Cog</a:t>
+              <a:t>付き添い</a:t>
             </a:r>
             <a:r>
               <a:rPr lang="ja-JP" altLang="en-US" sz="2400" dirty="0">
@@ -10250,15 +10153,18 @@
                 <a:ea typeface="メイリオ" pitchFamily="34" charset="-122"/>
                 <a:cs typeface="メイリオ" pitchFamily="34" charset="-120"/>
               </a:rPr>
-              <a:t>。陽性なら家族に説明し能力を確かめる</a:t>
+              <a:t>を</a:t>
             </a:r>
             <a:endParaRPr lang="ja-JP" sz="2400" dirty="0"/>
           </a:p>
           <a:p>
             <a:pPr algn="l" marL="355600" indent="-355600">
               <a:spcAft>
-                <a:spcPts val="3200"/>
+                <a:spcPts val="1000"/>
               </a:spcAft>
+              <a:buClr>
+                <a:srgbClr val="262626"/>
+              </a:buClr>
               <a:buSzPct val="100000"/>
               <a:buChar char="•"/>
             </a:pPr>
@@ -10271,7 +10177,7 @@
                 <a:ea typeface="メイリオ" pitchFamily="34" charset="-122"/>
                 <a:cs typeface="メイリオ" pitchFamily="34" charset="-120"/>
               </a:rPr>
-              <a:t>せん妄は大手術で 20〜40%、半数以上を見逃す。</a:t>
+              <a:t>看護師・薬剤師・リハビリと多因子介入を</a:t>
             </a:r>
             <a:r>
               <a:rPr lang="ja-JP" altLang="en-US" sz="2400" b="1" dirty="0">
@@ -10282,15 +10188,18 @@
                 <a:ea typeface="メイリオ" pitchFamily="34" charset="-122"/>
                 <a:cs typeface="メイリオ" pitchFamily="34" charset="-120"/>
               </a:rPr>
-              <a:t>多因子介入で予防</a:t>
+              <a:t>入院初日から</a:t>
             </a:r>
             <a:endParaRPr lang="ja-JP" sz="2400" dirty="0"/>
           </a:p>
           <a:p>
             <a:pPr algn="l" marL="355600" indent="-355600">
               <a:spcAft>
-                <a:spcPts val="3200"/>
+                <a:spcPts val="1000"/>
               </a:spcAft>
+              <a:buClr>
+                <a:srgbClr val="262626"/>
+              </a:buClr>
               <a:buSzPct val="100000"/>
               <a:buChar char="•"/>
             </a:pPr>
@@ -10303,18 +10212,18 @@
                 <a:ea typeface="メイリオ" pitchFamily="34" charset="-122"/>
                 <a:cs typeface="メイリオ" pitchFamily="34" charset="-120"/>
               </a:rPr>
-              <a:t>薬で</a:t>
-            </a:r>
-            <a:r>
-              <a:rPr lang="ja-JP" altLang="en-US" sz="2400" b="1" u="sng" dirty="0">
-                <a:solidFill>
-                  <a:srgbClr val="C00000"/>
-                </a:solidFill>
-                <a:latin typeface="メイリオ" pitchFamily="34" charset="0"/>
-                <a:ea typeface="メイリオ" pitchFamily="34" charset="-122"/>
-                <a:cs typeface="メイリオ" pitchFamily="34" charset="-120"/>
-              </a:rPr>
-              <a:t>予防しない</a:t>
+              <a:t>術前から</a:t>
+            </a:r>
+            <a:r>
+              <a:rPr lang="ja-JP" altLang="en-US" sz="2400" b="1" dirty="0">
+                <a:solidFill>
+                  <a:srgbClr val="0072B2"/>
+                </a:solidFill>
+                <a:latin typeface="メイリオ" pitchFamily="34" charset="0"/>
+                <a:ea typeface="メイリオ" pitchFamily="34" charset="-122"/>
+                <a:cs typeface="メイリオ" pitchFamily="34" charset="-120"/>
+              </a:rPr>
+              <a:t>栄養と運動</a:t>
             </a:r>
             <a:r>
               <a:rPr lang="ja-JP" altLang="en-US" sz="2400" dirty="0">
@@ -10325,15 +10234,18 @@
                 <a:ea typeface="メイリオ" pitchFamily="34" charset="-122"/>
                 <a:cs typeface="メイリオ" pitchFamily="34" charset="-120"/>
               </a:rPr>
-              <a:t>。ベンゾジアゼピン・抗コリン薬・ペチジンを避ける</a:t>
+              <a:t>（プレハビリテーション）、飲酒・睡眠薬の整理</a:t>
             </a:r>
             <a:endParaRPr lang="ja-JP" sz="2400" dirty="0"/>
           </a:p>
           <a:p>
             <a:pPr algn="l" marL="355600" indent="-355600">
               <a:spcAft>
-                <a:spcPts val="3200"/>
+                <a:spcPts val="1000"/>
               </a:spcAft>
+              <a:buClr>
+                <a:srgbClr val="262626"/>
+              </a:buClr>
               <a:buSzPct val="100000"/>
               <a:buChar char="•"/>
             </a:pPr>
@@ -10346,7 +10258,7 @@
                 <a:ea typeface="メイリオ" pitchFamily="34" charset="-122"/>
                 <a:cs typeface="メイリオ" pitchFamily="34" charset="-120"/>
               </a:rPr>
-              <a:t>MAC は </a:t>
+              <a:t>退院先と治療の目標を本人・家族と</a:t>
             </a:r>
             <a:r>
               <a:rPr lang="ja-JP" altLang="en-US" sz="2400" b="1" dirty="0">
@@ -10357,7 +10269,7 @@
                 <a:ea typeface="メイリオ" pitchFamily="34" charset="-122"/>
                 <a:cs typeface="メイリオ" pitchFamily="34" charset="-120"/>
               </a:rPr>
-              <a:t>10 歳で 6% 低下</a:t>
+              <a:t>前もって話す</a:t>
             </a:r>
             <a:r>
               <a:rPr lang="ja-JP" altLang="en-US" sz="2400" dirty="0">
@@ -10368,9 +10280,84 @@
                 <a:ea typeface="メイリオ" pitchFamily="34" charset="-122"/>
                 <a:cs typeface="メイリオ" pitchFamily="34" charset="-120"/>
               </a:rPr>
-              <a:t>。相対的低血圧を避け、鎮静の少ない鎮痛</a:t>
+              <a:t>（→ 4-6）</a:t>
             </a:r>
             <a:endParaRPr lang="ja-JP" sz="2400" dirty="0"/>
+          </a:p>
+        </p:txBody>
+      </p:sp>
+      <p:sp>
+        <p:nvSpPr>
+          <p:cNvPr id="12" name="Text 10"/>
+          <p:cNvSpPr/>
+          <p:nvPr/>
+        </p:nvSpPr>
+        <p:spPr>
+          <a:xfrm>
+            <a:off x="502920" y="4754880"/>
+            <a:ext cx="11183112" cy="1097280"/>
+          </a:xfrm>
+          <a:prstGeom prst="roundRect">
+            <a:avLst>
+              <a:gd name="adj" fmla="val 8333"/>
+            </a:avLst>
+          </a:prstGeom>
+          <a:solidFill>
+            <a:srgbClr val="FFFFFF"/>
+          </a:solidFill>
+          <a:ln w="38100">
+            <a:solidFill>
+              <a:srgbClr val="00A8AA"/>
+            </a:solidFill>
+          </a:ln>
+        </p:spPr>
+        <p:txBody>
+          <a:bodyPr wrap="square" lIns="73152" tIns="73152" rIns="73152" bIns="73152" rtlCol="0" anchor="ctr"/>
+          <a:lstStyle/>
+          <a:p>
+            <a:pPr algn="ctr" indent="0" marL="0">
+              <a:buNone/>
+            </a:pPr>
+            <a:r>
+              <a:rPr lang="ja-JP" altLang="en-US" sz="2800" b="1" dirty="0">
+                <a:solidFill>
+                  <a:srgbClr val="262626"/>
+                </a:solidFill>
+                <a:latin typeface="メイリオ" pitchFamily="34" charset="0"/>
+                <a:ea typeface="メイリオ" pitchFamily="34" charset="-122"/>
+                <a:cs typeface="メイリオ" pitchFamily="34" charset="-120"/>
+              </a:rPr>
+              <a:t>老年科医がいない島では、チェックリストと多職種で</a:t>
+            </a:r>
+            <a:endParaRPr lang="ja-JP" sz="2800" dirty="0"/>
+          </a:p>
+          <a:p>
+            <a:pPr algn="ctr" indent="0" marL="0">
+              <a:buNone/>
+            </a:pPr>
+            <a:r>
+              <a:rPr lang="ja-JP" altLang="en-US" sz="2800" b="1" dirty="0">
+                <a:solidFill>
+                  <a:srgbClr val="D55E00"/>
+                </a:solidFill>
+                <a:latin typeface="メイリオ" pitchFamily="34" charset="0"/>
+                <a:ea typeface="メイリオ" pitchFamily="34" charset="-122"/>
+                <a:cs typeface="メイリオ" pitchFamily="34" charset="-120"/>
+              </a:rPr>
+              <a:t>『老年科の目』</a:t>
+            </a:r>
+            <a:r>
+              <a:rPr lang="ja-JP" altLang="en-US" sz="2800" b="1" dirty="0">
+                <a:solidFill>
+                  <a:srgbClr val="262626"/>
+                </a:solidFill>
+                <a:latin typeface="メイリオ" pitchFamily="34" charset="0"/>
+                <a:ea typeface="メイリオ" pitchFamily="34" charset="-122"/>
+                <a:cs typeface="メイリオ" pitchFamily="34" charset="-120"/>
+              </a:rPr>
+              <a:t>を代わりに入れる</a:t>
+            </a:r>
+            <a:endParaRPr lang="ja-JP" sz="2800" dirty="0"/>
           </a:p>
         </p:txBody>
       </p:sp>
